--- a/ENSA_Module_8_VPN_and_IPsec_GRE tunnel.pptx
+++ b/ENSA_Module_8_VPN_and_IPsec_GRE tunnel.pptx
@@ -6,77 +6,66 @@
     <p:sldMasterId id="2147483945" r:id="rId2"/>
   </p:sldMasterIdLst>
   <p:notesMasterIdLst>
-    <p:notesMasterId r:id="rId68"/>
+    <p:notesMasterId r:id="rId57"/>
   </p:notesMasterIdLst>
   <p:handoutMasterIdLst>
-    <p:handoutMasterId r:id="rId69"/>
+    <p:handoutMasterId r:id="rId58"/>
   </p:handoutMasterIdLst>
   <p:sldIdLst>
     <p:sldId id="500" r:id="rId3"/>
-    <p:sldId id="898" r:id="rId4"/>
-    <p:sldId id="541" r:id="rId5"/>
-    <p:sldId id="782" r:id="rId6"/>
-    <p:sldId id="835" r:id="rId7"/>
-    <p:sldId id="880" r:id="rId8"/>
-    <p:sldId id="816" r:id="rId9"/>
-    <p:sldId id="836" r:id="rId10"/>
-    <p:sldId id="881" r:id="rId11"/>
-    <p:sldId id="837" r:id="rId12"/>
-    <p:sldId id="882" r:id="rId13"/>
-    <p:sldId id="886" r:id="rId14"/>
-    <p:sldId id="839" r:id="rId15"/>
-    <p:sldId id="887" r:id="rId16"/>
-    <p:sldId id="883" r:id="rId17"/>
-    <p:sldId id="838" r:id="rId18"/>
-    <p:sldId id="841" r:id="rId19"/>
-    <p:sldId id="873" r:id="rId20"/>
-    <p:sldId id="842" r:id="rId21"/>
-    <p:sldId id="877" r:id="rId22"/>
-    <p:sldId id="844" r:id="rId23"/>
-    <p:sldId id="884" r:id="rId24"/>
-    <p:sldId id="846" r:id="rId25"/>
-    <p:sldId id="847" r:id="rId26"/>
-    <p:sldId id="848" r:id="rId27"/>
-    <p:sldId id="849" r:id="rId28"/>
-    <p:sldId id="850" r:id="rId29"/>
-    <p:sldId id="851" r:id="rId30"/>
-    <p:sldId id="879" r:id="rId31"/>
-    <p:sldId id="852" r:id="rId32"/>
-    <p:sldId id="853" r:id="rId33"/>
-    <p:sldId id="854" r:id="rId34"/>
-    <p:sldId id="855" r:id="rId35"/>
-    <p:sldId id="856" r:id="rId36"/>
-    <p:sldId id="857" r:id="rId37"/>
-    <p:sldId id="858" r:id="rId38"/>
-    <p:sldId id="859" r:id="rId39"/>
-    <p:sldId id="860" r:id="rId40"/>
-    <p:sldId id="878" r:id="rId41"/>
-    <p:sldId id="861" r:id="rId42"/>
-    <p:sldId id="862" r:id="rId43"/>
-    <p:sldId id="863" r:id="rId44"/>
-    <p:sldId id="864" r:id="rId45"/>
-    <p:sldId id="885" r:id="rId46"/>
-    <p:sldId id="865" r:id="rId47"/>
-    <p:sldId id="866" r:id="rId48"/>
-    <p:sldId id="867" r:id="rId49"/>
-    <p:sldId id="869" r:id="rId50"/>
-    <p:sldId id="870" r:id="rId51"/>
-    <p:sldId id="871" r:id="rId52"/>
-    <p:sldId id="872" r:id="rId53"/>
-    <p:sldId id="783" r:id="rId54"/>
-    <p:sldId id="874" r:id="rId55"/>
-    <p:sldId id="875" r:id="rId56"/>
-    <p:sldId id="681" r:id="rId57"/>
-    <p:sldId id="888" r:id="rId58"/>
-    <p:sldId id="889" r:id="rId59"/>
-    <p:sldId id="890" r:id="rId60"/>
-    <p:sldId id="891" r:id="rId61"/>
-    <p:sldId id="892" r:id="rId62"/>
-    <p:sldId id="893" r:id="rId63"/>
-    <p:sldId id="894" r:id="rId64"/>
-    <p:sldId id="895" r:id="rId65"/>
-    <p:sldId id="896" r:id="rId66"/>
-    <p:sldId id="897" r:id="rId67"/>
+    <p:sldId id="541" r:id="rId4"/>
+    <p:sldId id="782" r:id="rId5"/>
+    <p:sldId id="835" r:id="rId6"/>
+    <p:sldId id="880" r:id="rId7"/>
+    <p:sldId id="816" r:id="rId8"/>
+    <p:sldId id="836" r:id="rId9"/>
+    <p:sldId id="881" r:id="rId10"/>
+    <p:sldId id="837" r:id="rId11"/>
+    <p:sldId id="882" r:id="rId12"/>
+    <p:sldId id="886" r:id="rId13"/>
+    <p:sldId id="839" r:id="rId14"/>
+    <p:sldId id="887" r:id="rId15"/>
+    <p:sldId id="883" r:id="rId16"/>
+    <p:sldId id="838" r:id="rId17"/>
+    <p:sldId id="841" r:id="rId18"/>
+    <p:sldId id="873" r:id="rId19"/>
+    <p:sldId id="842" r:id="rId20"/>
+    <p:sldId id="877" r:id="rId21"/>
+    <p:sldId id="844" r:id="rId22"/>
+    <p:sldId id="884" r:id="rId23"/>
+    <p:sldId id="846" r:id="rId24"/>
+    <p:sldId id="847" r:id="rId25"/>
+    <p:sldId id="848" r:id="rId26"/>
+    <p:sldId id="849" r:id="rId27"/>
+    <p:sldId id="850" r:id="rId28"/>
+    <p:sldId id="851" r:id="rId29"/>
+    <p:sldId id="879" r:id="rId30"/>
+    <p:sldId id="852" r:id="rId31"/>
+    <p:sldId id="853" r:id="rId32"/>
+    <p:sldId id="854" r:id="rId33"/>
+    <p:sldId id="855" r:id="rId34"/>
+    <p:sldId id="856" r:id="rId35"/>
+    <p:sldId id="857" r:id="rId36"/>
+    <p:sldId id="858" r:id="rId37"/>
+    <p:sldId id="859" r:id="rId38"/>
+    <p:sldId id="860" r:id="rId39"/>
+    <p:sldId id="878" r:id="rId40"/>
+    <p:sldId id="861" r:id="rId41"/>
+    <p:sldId id="862" r:id="rId42"/>
+    <p:sldId id="863" r:id="rId43"/>
+    <p:sldId id="864" r:id="rId44"/>
+    <p:sldId id="885" r:id="rId45"/>
+    <p:sldId id="865" r:id="rId46"/>
+    <p:sldId id="866" r:id="rId47"/>
+    <p:sldId id="867" r:id="rId48"/>
+    <p:sldId id="869" r:id="rId49"/>
+    <p:sldId id="870" r:id="rId50"/>
+    <p:sldId id="871" r:id="rId51"/>
+    <p:sldId id="872" r:id="rId52"/>
+    <p:sldId id="783" r:id="rId53"/>
+    <p:sldId id="874" r:id="rId54"/>
+    <p:sldId id="875" r:id="rId55"/>
+    <p:sldId id="681" r:id="rId56"/>
   </p:sldIdLst>
   <p:sldSz cx="9144000" cy="6858000" type="screen4x3"/>
   <p:notesSz cx="7010400" cy="9296400"/>
@@ -1102,7 +1091,7 @@
             <a:fld id="{E2906053-E8A2-4DAD-B57C-C8945C1AD1DD}" type="slidenum">
               <a:rPr lang="en-US" smtClean="0"/>
               <a:pPr/>
-              <a:t>11</a:t>
+              <a:t>10</a:t>
             </a:fld>
             <a:endParaRPr lang="en-US" dirty="0" smtClean="0"/>
           </a:p>
@@ -1216,7 +1205,7 @@
             <a:fld id="{E2906053-E8A2-4DAD-B57C-C8945C1AD1DD}" type="slidenum">
               <a:rPr lang="en-US" smtClean="0"/>
               <a:pPr/>
-              <a:t>12</a:t>
+              <a:t>11</a:t>
             </a:fld>
             <a:endParaRPr lang="en-US" dirty="0" smtClean="0"/>
           </a:p>
@@ -1330,7 +1319,7 @@
             <a:fld id="{E2906053-E8A2-4DAD-B57C-C8945C1AD1DD}" type="slidenum">
               <a:rPr lang="en-US" smtClean="0"/>
               <a:pPr/>
-              <a:t>13</a:t>
+              <a:t>12</a:t>
             </a:fld>
             <a:endParaRPr lang="en-US" dirty="0" smtClean="0"/>
           </a:p>
@@ -1444,7 +1433,7 @@
             <a:fld id="{E2906053-E8A2-4DAD-B57C-C8945C1AD1DD}" type="slidenum">
               <a:rPr lang="en-US" smtClean="0"/>
               <a:pPr/>
-              <a:t>14</a:t>
+              <a:t>13</a:t>
             </a:fld>
             <a:endParaRPr lang="en-US" dirty="0" smtClean="0"/>
           </a:p>
@@ -1558,7 +1547,7 @@
             <a:fld id="{F602A389-8690-465F-BB28-DC61C90E42E7}" type="slidenum">
               <a:rPr lang="en-US" smtClean="0"/>
               <a:pPr/>
-              <a:t>15</a:t>
+              <a:t>14</a:t>
             </a:fld>
             <a:endParaRPr lang="en-US" dirty="0" smtClean="0"/>
           </a:p>
@@ -1661,7 +1650,7 @@
             <a:fld id="{E2906053-E8A2-4DAD-B57C-C8945C1AD1DD}" type="slidenum">
               <a:rPr lang="en-US" smtClean="0"/>
               <a:pPr/>
-              <a:t>16</a:t>
+              <a:t>15</a:t>
             </a:fld>
             <a:endParaRPr lang="en-US" dirty="0" smtClean="0"/>
           </a:p>
@@ -1775,7 +1764,7 @@
             <a:fld id="{E2906053-E8A2-4DAD-B57C-C8945C1AD1DD}" type="slidenum">
               <a:rPr lang="en-US" smtClean="0"/>
               <a:pPr/>
-              <a:t>17</a:t>
+              <a:t>16</a:t>
             </a:fld>
             <a:endParaRPr lang="en-US" dirty="0" smtClean="0"/>
           </a:p>
@@ -1889,7 +1878,7 @@
             <a:fld id="{E2906053-E8A2-4DAD-B57C-C8945C1AD1DD}" type="slidenum">
               <a:rPr lang="en-US" smtClean="0"/>
               <a:pPr/>
-              <a:t>18</a:t>
+              <a:t>17</a:t>
             </a:fld>
             <a:endParaRPr lang="en-US" dirty="0" smtClean="0"/>
           </a:p>
@@ -2003,7 +1992,7 @@
             <a:fld id="{E2906053-E8A2-4DAD-B57C-C8945C1AD1DD}" type="slidenum">
               <a:rPr lang="en-US" smtClean="0"/>
               <a:pPr/>
-              <a:t>19</a:t>
+              <a:t>18</a:t>
             </a:fld>
             <a:endParaRPr lang="en-US" dirty="0" smtClean="0"/>
           </a:p>
@@ -2111,7 +2100,7 @@
             <a:fld id="{E2906053-E8A2-4DAD-B57C-C8945C1AD1DD}" type="slidenum">
               <a:rPr lang="en-US" smtClean="0"/>
               <a:pPr/>
-              <a:t>20</a:t>
+              <a:t>19</a:t>
             </a:fld>
             <a:endParaRPr lang="en-US" dirty="0" smtClean="0"/>
           </a:p>
@@ -2219,7 +2208,7 @@
             <a:fld id="{470EE284-7961-42D5-9E4B-29540E276A78}" type="slidenum">
               <a:rPr lang="en-US" smtClean="0"/>
               <a:pPr/>
-              <a:t>3</a:t>
+              <a:t>2</a:t>
             </a:fld>
             <a:endParaRPr lang="en-US" dirty="0" smtClean="0"/>
           </a:p>
@@ -2313,7 +2302,7 @@
             <a:fld id="{E2906053-E8A2-4DAD-B57C-C8945C1AD1DD}" type="slidenum">
               <a:rPr lang="en-US" smtClean="0"/>
               <a:pPr/>
-              <a:t>21</a:t>
+              <a:t>20</a:t>
             </a:fld>
             <a:endParaRPr lang="en-US" dirty="0" smtClean="0"/>
           </a:p>
@@ -2421,7 +2410,7 @@
             <a:fld id="{F602A389-8690-465F-BB28-DC61C90E42E7}" type="slidenum">
               <a:rPr lang="en-US" smtClean="0"/>
               <a:pPr/>
-              <a:t>22</a:t>
+              <a:t>21</a:t>
             </a:fld>
             <a:endParaRPr lang="en-US" dirty="0" smtClean="0"/>
           </a:p>
@@ -2520,7 +2509,7 @@
             <a:fld id="{E2906053-E8A2-4DAD-B57C-C8945C1AD1DD}" type="slidenum">
               <a:rPr lang="en-US" smtClean="0"/>
               <a:pPr/>
-              <a:t>23</a:t>
+              <a:t>22</a:t>
             </a:fld>
             <a:endParaRPr lang="en-US" dirty="0" smtClean="0"/>
           </a:p>
@@ -2628,7 +2617,7 @@
             <a:fld id="{E2906053-E8A2-4DAD-B57C-C8945C1AD1DD}" type="slidenum">
               <a:rPr lang="en-US" smtClean="0"/>
               <a:pPr/>
-              <a:t>24</a:t>
+              <a:t>23</a:t>
             </a:fld>
             <a:endParaRPr lang="en-US" dirty="0" smtClean="0"/>
           </a:p>
@@ -2736,7 +2725,7 @@
             <a:fld id="{E2906053-E8A2-4DAD-B57C-C8945C1AD1DD}" type="slidenum">
               <a:rPr lang="en-US" smtClean="0"/>
               <a:pPr/>
-              <a:t>25</a:t>
+              <a:t>24</a:t>
             </a:fld>
             <a:endParaRPr lang="en-US" dirty="0" smtClean="0"/>
           </a:p>
@@ -2844,7 +2833,7 @@
             <a:fld id="{E2906053-E8A2-4DAD-B57C-C8945C1AD1DD}" type="slidenum">
               <a:rPr lang="en-US" smtClean="0"/>
               <a:pPr/>
-              <a:t>26</a:t>
+              <a:t>25</a:t>
             </a:fld>
             <a:endParaRPr lang="en-US" dirty="0" smtClean="0"/>
           </a:p>
@@ -2952,7 +2941,7 @@
             <a:fld id="{E2906053-E8A2-4DAD-B57C-C8945C1AD1DD}" type="slidenum">
               <a:rPr lang="en-US" smtClean="0"/>
               <a:pPr/>
-              <a:t>27</a:t>
+              <a:t>26</a:t>
             </a:fld>
             <a:endParaRPr lang="en-US" dirty="0" smtClean="0"/>
           </a:p>
@@ -3066,7 +3055,7 @@
             <a:fld id="{E2906053-E8A2-4DAD-B57C-C8945C1AD1DD}" type="slidenum">
               <a:rPr lang="en-US" smtClean="0"/>
               <a:pPr/>
-              <a:t>28</a:t>
+              <a:t>27</a:t>
             </a:fld>
             <a:endParaRPr lang="en-US" dirty="0" smtClean="0"/>
           </a:p>
@@ -3167,7 +3156,7 @@
             <a:fld id="{E2906053-E8A2-4DAD-B57C-C8945C1AD1DD}" type="slidenum">
               <a:rPr lang="en-US" smtClean="0"/>
               <a:pPr/>
-              <a:t>29</a:t>
+              <a:t>28</a:t>
             </a:fld>
             <a:endParaRPr lang="en-US" dirty="0" smtClean="0"/>
           </a:p>
@@ -3261,7 +3250,7 @@
             <a:fld id="{E2906053-E8A2-4DAD-B57C-C8945C1AD1DD}" type="slidenum">
               <a:rPr lang="en-US" smtClean="0"/>
               <a:pPr/>
-              <a:t>30</a:t>
+              <a:t>29</a:t>
             </a:fld>
             <a:endParaRPr lang="en-US" dirty="0" smtClean="0"/>
           </a:p>
@@ -3355,7 +3344,7 @@
             <a:fld id="{E2906053-E8A2-4DAD-B57C-C8945C1AD1DD}" type="slidenum">
               <a:rPr lang="en-US" smtClean="0"/>
               <a:pPr/>
-              <a:t>4</a:t>
+              <a:t>3</a:t>
             </a:fld>
             <a:endParaRPr lang="en-US" dirty="0" smtClean="0"/>
           </a:p>
@@ -3449,7 +3438,7 @@
             <a:fld id="{E2906053-E8A2-4DAD-B57C-C8945C1AD1DD}" type="slidenum">
               <a:rPr lang="en-US" smtClean="0"/>
               <a:pPr/>
-              <a:t>31</a:t>
+              <a:t>30</a:t>
             </a:fld>
             <a:endParaRPr lang="en-US" dirty="0" smtClean="0"/>
           </a:p>
@@ -3550,7 +3539,7 @@
             <a:fld id="{E2906053-E8A2-4DAD-B57C-C8945C1AD1DD}" type="slidenum">
               <a:rPr lang="en-US" smtClean="0"/>
               <a:pPr/>
-              <a:t>32</a:t>
+              <a:t>31</a:t>
             </a:fld>
             <a:endParaRPr lang="en-US" dirty="0" smtClean="0"/>
           </a:p>
@@ -3651,7 +3640,7 @@
             <a:fld id="{E2906053-E8A2-4DAD-B57C-C8945C1AD1DD}" type="slidenum">
               <a:rPr lang="en-US" smtClean="0"/>
               <a:pPr/>
-              <a:t>33</a:t>
+              <a:t>32</a:t>
             </a:fld>
             <a:endParaRPr lang="en-US" dirty="0" smtClean="0"/>
           </a:p>
@@ -3758,7 +3747,7 @@
             <a:fld id="{E2906053-E8A2-4DAD-B57C-C8945C1AD1DD}" type="slidenum">
               <a:rPr lang="en-US" smtClean="0"/>
               <a:pPr/>
-              <a:t>34</a:t>
+              <a:t>33</a:t>
             </a:fld>
             <a:endParaRPr lang="en-US" dirty="0" smtClean="0"/>
           </a:p>
@@ -3865,7 +3854,7 @@
             <a:fld id="{E2906053-E8A2-4DAD-B57C-C8945C1AD1DD}" type="slidenum">
               <a:rPr lang="en-US" smtClean="0"/>
               <a:pPr/>
-              <a:t>35</a:t>
+              <a:t>34</a:t>
             </a:fld>
             <a:endParaRPr lang="en-US" dirty="0" smtClean="0"/>
           </a:p>
@@ -3972,7 +3961,7 @@
             <a:fld id="{E2906053-E8A2-4DAD-B57C-C8945C1AD1DD}" type="slidenum">
               <a:rPr lang="en-US" smtClean="0"/>
               <a:pPr/>
-              <a:t>36</a:t>
+              <a:t>35</a:t>
             </a:fld>
             <a:endParaRPr lang="en-US" dirty="0" smtClean="0"/>
           </a:p>
@@ -4079,7 +4068,7 @@
             <a:fld id="{E2906053-E8A2-4DAD-B57C-C8945C1AD1DD}" type="slidenum">
               <a:rPr lang="en-US" smtClean="0"/>
               <a:pPr/>
-              <a:t>37</a:t>
+              <a:t>36</a:t>
             </a:fld>
             <a:endParaRPr lang="en-US" dirty="0" smtClean="0"/>
           </a:p>
@@ -4186,7 +4175,7 @@
             <a:fld id="{E2906053-E8A2-4DAD-B57C-C8945C1AD1DD}" type="slidenum">
               <a:rPr lang="en-US" smtClean="0"/>
               <a:pPr/>
-              <a:t>38</a:t>
+              <a:t>37</a:t>
             </a:fld>
             <a:endParaRPr lang="en-US" dirty="0" smtClean="0"/>
           </a:p>
@@ -4293,7 +4282,7 @@
             <a:fld id="{E2906053-E8A2-4DAD-B57C-C8945C1AD1DD}" type="slidenum">
               <a:rPr lang="en-US" smtClean="0"/>
               <a:pPr/>
-              <a:t>39</a:t>
+              <a:t>38</a:t>
             </a:fld>
             <a:endParaRPr lang="en-US" dirty="0" smtClean="0"/>
           </a:p>
@@ -4400,7 +4389,7 @@
             <a:fld id="{E2906053-E8A2-4DAD-B57C-C8945C1AD1DD}" type="slidenum">
               <a:rPr lang="en-US" smtClean="0"/>
               <a:pPr/>
-              <a:t>40</a:t>
+              <a:t>39</a:t>
             </a:fld>
             <a:endParaRPr lang="en-US" dirty="0" smtClean="0"/>
           </a:p>
@@ -4507,7 +4496,7 @@
             <a:fld id="{E2906053-E8A2-4DAD-B57C-C8945C1AD1DD}" type="slidenum">
               <a:rPr lang="en-US" smtClean="0"/>
               <a:pPr/>
-              <a:t>5</a:t>
+              <a:t>4</a:t>
             </a:fld>
             <a:endParaRPr lang="en-US" dirty="0" smtClean="0"/>
           </a:p>
@@ -4598,7 +4587,7 @@
             <a:fld id="{E2906053-E8A2-4DAD-B57C-C8945C1AD1DD}" type="slidenum">
               <a:rPr lang="en-US" smtClean="0"/>
               <a:pPr/>
-              <a:t>41</a:t>
+              <a:t>40</a:t>
             </a:fld>
             <a:endParaRPr lang="en-US" dirty="0" smtClean="0"/>
           </a:p>
@@ -4705,7 +4694,7 @@
             <a:fld id="{E2906053-E8A2-4DAD-B57C-C8945C1AD1DD}" type="slidenum">
               <a:rPr lang="en-US" smtClean="0"/>
               <a:pPr/>
-              <a:t>42</a:t>
+              <a:t>41</a:t>
             </a:fld>
             <a:endParaRPr lang="en-US" dirty="0" smtClean="0"/>
           </a:p>
@@ -4812,7 +4801,7 @@
             <a:fld id="{E2906053-E8A2-4DAD-B57C-C8945C1AD1DD}" type="slidenum">
               <a:rPr lang="en-US" smtClean="0"/>
               <a:pPr/>
-              <a:t>43</a:t>
+              <a:t>42</a:t>
             </a:fld>
             <a:endParaRPr lang="en-US" dirty="0" smtClean="0"/>
           </a:p>
@@ -4919,7 +4908,7 @@
             <a:fld id="{F602A389-8690-465F-BB28-DC61C90E42E7}" type="slidenum">
               <a:rPr lang="en-US" smtClean="0"/>
               <a:pPr/>
-              <a:t>44</a:t>
+              <a:t>43</a:t>
             </a:fld>
             <a:endParaRPr lang="en-US" dirty="0" smtClean="0"/>
           </a:p>
@@ -5022,7 +5011,7 @@
             <a:fld id="{E2906053-E8A2-4DAD-B57C-C8945C1AD1DD}" type="slidenum">
               <a:rPr lang="en-US" smtClean="0"/>
               <a:pPr/>
-              <a:t>45</a:t>
+              <a:t>44</a:t>
             </a:fld>
             <a:endParaRPr lang="en-US" dirty="0" smtClean="0"/>
           </a:p>
@@ -5143,7 +5132,7 @@
             <a:fld id="{E2906053-E8A2-4DAD-B57C-C8945C1AD1DD}" type="slidenum">
               <a:rPr lang="en-US" smtClean="0"/>
               <a:pPr/>
-              <a:t>46</a:t>
+              <a:t>45</a:t>
             </a:fld>
             <a:endParaRPr lang="en-US" dirty="0" smtClean="0"/>
           </a:p>
@@ -5257,7 +5246,7 @@
             <a:fld id="{E2906053-E8A2-4DAD-B57C-C8945C1AD1DD}" type="slidenum">
               <a:rPr lang="en-US" smtClean="0"/>
               <a:pPr/>
-              <a:t>47</a:t>
+              <a:t>46</a:t>
             </a:fld>
             <a:endParaRPr lang="en-US" dirty="0" smtClean="0"/>
           </a:p>
@@ -5369,7 +5358,7 @@
             <a:fld id="{E2906053-E8A2-4DAD-B57C-C8945C1AD1DD}" type="slidenum">
               <a:rPr lang="en-US" smtClean="0"/>
               <a:pPr/>
-              <a:t>48</a:t>
+              <a:t>47</a:t>
             </a:fld>
             <a:endParaRPr lang="en-US" dirty="0" smtClean="0"/>
           </a:p>
@@ -5476,7 +5465,7 @@
             <a:fld id="{E2906053-E8A2-4DAD-B57C-C8945C1AD1DD}" type="slidenum">
               <a:rPr lang="en-US" smtClean="0"/>
               <a:pPr/>
-              <a:t>49</a:t>
+              <a:t>48</a:t>
             </a:fld>
             <a:endParaRPr lang="en-US" dirty="0" smtClean="0"/>
           </a:p>
@@ -5583,7 +5572,7 @@
             <a:fld id="{E2906053-E8A2-4DAD-B57C-C8945C1AD1DD}" type="slidenum">
               <a:rPr lang="en-US" smtClean="0"/>
               <a:pPr/>
-              <a:t>50</a:t>
+              <a:t>49</a:t>
             </a:fld>
             <a:endParaRPr lang="en-US" dirty="0" smtClean="0"/>
           </a:p>
@@ -5695,7 +5684,7 @@
             <a:fld id="{F602A389-8690-465F-BB28-DC61C90E42E7}" type="slidenum">
               <a:rPr lang="en-US" smtClean="0"/>
               <a:pPr/>
-              <a:t>6</a:t>
+              <a:t>5</a:t>
             </a:fld>
             <a:endParaRPr lang="en-US" dirty="0" smtClean="0"/>
           </a:p>
@@ -5794,7 +5783,7 @@
             <a:fld id="{E2906053-E8A2-4DAD-B57C-C8945C1AD1DD}" type="slidenum">
               <a:rPr lang="en-US" smtClean="0"/>
               <a:pPr/>
-              <a:t>51</a:t>
+              <a:t>50</a:t>
             </a:fld>
             <a:endParaRPr lang="en-US" dirty="0" smtClean="0"/>
           </a:p>
@@ -5906,7 +5895,7 @@
             <a:fld id="{3D5F77EF-9F5D-4805-BD17-79024BE7C85C}" type="slidenum">
               <a:rPr lang="en-US" smtClean="0"/>
               <a:pPr/>
-              <a:t>52</a:t>
+              <a:t>51</a:t>
             </a:fld>
             <a:endParaRPr lang="en-US" dirty="0" smtClean="0"/>
           </a:p>
@@ -6000,7 +5989,7 @@
             <a:fld id="{3D5F77EF-9F5D-4805-BD17-79024BE7C85C}" type="slidenum">
               <a:rPr lang="en-US" smtClean="0"/>
               <a:pPr/>
-              <a:t>53</a:t>
+              <a:t>52</a:t>
             </a:fld>
             <a:endParaRPr lang="en-US" dirty="0" smtClean="0"/>
           </a:p>
@@ -6094,7 +6083,7 @@
             <a:fld id="{3D5F77EF-9F5D-4805-BD17-79024BE7C85C}" type="slidenum">
               <a:rPr lang="en-US" smtClean="0"/>
               <a:pPr/>
-              <a:t>54</a:t>
+              <a:t>53</a:t>
             </a:fld>
             <a:endParaRPr lang="en-US" dirty="0" smtClean="0"/>
           </a:p>
@@ -6188,7 +6177,7 @@
             <a:fld id="{E2906053-E8A2-4DAD-B57C-C8945C1AD1DD}" type="slidenum">
               <a:rPr lang="en-US" smtClean="0"/>
               <a:pPr/>
-              <a:t>7</a:t>
+              <a:t>6</a:t>
             </a:fld>
             <a:endParaRPr lang="en-US" dirty="0" smtClean="0"/>
           </a:p>
@@ -6302,7 +6291,7 @@
             <a:fld id="{E2906053-E8A2-4DAD-B57C-C8945C1AD1DD}" type="slidenum">
               <a:rPr lang="en-US" smtClean="0"/>
               <a:pPr/>
-              <a:t>8</a:t>
+              <a:t>7</a:t>
             </a:fld>
             <a:endParaRPr lang="en-US" dirty="0" smtClean="0"/>
           </a:p>
@@ -6416,7 +6405,7 @@
             <a:fld id="{E2906053-E8A2-4DAD-B57C-C8945C1AD1DD}" type="slidenum">
               <a:rPr lang="en-US" smtClean="0"/>
               <a:pPr/>
-              <a:t>9</a:t>
+              <a:t>8</a:t>
             </a:fld>
             <a:endParaRPr lang="en-US" dirty="0" smtClean="0"/>
           </a:p>
@@ -6530,7 +6519,7 @@
             <a:fld id="{E2906053-E8A2-4DAD-B57C-C8945C1AD1DD}" type="slidenum">
               <a:rPr lang="en-US" smtClean="0"/>
               <a:pPr/>
-              <a:t>10</a:t>
+              <a:t>9</a:t>
             </a:fld>
             <a:endParaRPr lang="en-US" dirty="0" smtClean="0"/>
           </a:p>
@@ -12262,156 +12251,6 @@
         </p:nvSpPr>
         <p:spPr>
           <a:xfrm>
-            <a:off x="419781" y="450171"/>
-            <a:ext cx="8145462" cy="838200"/>
-          </a:xfrm>
-        </p:spPr>
-        <p:txBody>
-          <a:bodyPr/>
-          <a:lstStyle/>
-          <a:p>
-            <a:pPr eaLnBrk="1" hangingPunct="1"/>
-            <a:r>
-              <a:rPr lang="en-US" sz="1800" dirty="0" smtClean="0">
-                <a:ea typeface="ＭＳ Ｐゴシック" pitchFamily="34" charset="-128"/>
-              </a:rPr>
-              <a:t>Types of VPNs</a:t>
-            </a:r>
-            <a:br>
-              <a:rPr lang="en-US" sz="1800" dirty="0" smtClean="0">
-                <a:ea typeface="ＭＳ Ｐゴシック" pitchFamily="34" charset="-128"/>
-              </a:rPr>
-            </a:br>
-            <a:r>
-              <a:rPr lang="en-US" dirty="0" smtClean="0">
-                <a:ea typeface="ＭＳ Ｐゴシック" pitchFamily="34" charset="-128"/>
-              </a:rPr>
-              <a:t>Site-to-Site VPNs</a:t>
-            </a:r>
-          </a:p>
-        </p:txBody>
-      </p:sp>
-      <p:sp>
-        <p:nvSpPr>
-          <p:cNvPr id="2" name="Content Placeholder 1"/>
-          <p:cNvSpPr>
-            <a:spLocks noGrp="1"/>
-          </p:cNvSpPr>
-          <p:nvPr>
-            <p:ph idx="1"/>
-          </p:nvPr>
-        </p:nvSpPr>
-        <p:spPr>
-          <a:xfrm>
-            <a:off x="432690" y="1523998"/>
-            <a:ext cx="8362967" cy="5199127"/>
-          </a:xfrm>
-        </p:spPr>
-        <p:txBody>
-          <a:bodyPr/>
-          <a:lstStyle/>
-          <a:p>
-            <a:r>
-              <a:rPr lang="en-US" sz="2000" dirty="0" smtClean="0"/>
-              <a:t>Connect </a:t>
-            </a:r>
-            <a:r>
-              <a:rPr lang="en-US" sz="2000" dirty="0"/>
-              <a:t>entire networks to each other, </a:t>
-            </a:r>
-            <a:r>
-              <a:rPr lang="en-US" sz="2000" dirty="0" smtClean="0"/>
-              <a:t>in </a:t>
-            </a:r>
-            <a:r>
-              <a:rPr lang="en-US" sz="2000" dirty="0"/>
-              <a:t>the past, a leased line or Frame Relay connection was required to connect sites, but because most corporations now have Internet access, these connections can be replaced with site-to-site </a:t>
-            </a:r>
-            <a:r>
-              <a:rPr lang="en-US" sz="2000" dirty="0" smtClean="0"/>
-              <a:t>VPNs.</a:t>
-            </a:r>
-            <a:endParaRPr lang="en-US" sz="2000" dirty="0"/>
-          </a:p>
-          <a:p>
-            <a:r>
-              <a:rPr lang="en-US" sz="2000" dirty="0" smtClean="0"/>
-              <a:t>Internal hosts have no </a:t>
-            </a:r>
-            <a:r>
-              <a:rPr lang="en-US" sz="2000" dirty="0"/>
-              <a:t>knowledge that a VPN </a:t>
-            </a:r>
-            <a:r>
-              <a:rPr lang="en-US" sz="2000" dirty="0" smtClean="0"/>
-              <a:t>exists.</a:t>
-            </a:r>
-          </a:p>
-          <a:p>
-            <a:r>
-              <a:rPr lang="en-US" sz="2000" dirty="0" smtClean="0"/>
-              <a:t>Created </a:t>
-            </a:r>
-            <a:r>
-              <a:rPr lang="en-US" sz="2000" dirty="0"/>
-              <a:t>when devices on both sides of the VPN connection are aware of the VPN configuration in </a:t>
-            </a:r>
-            <a:r>
-              <a:rPr lang="en-US" sz="2000" dirty="0" smtClean="0"/>
-              <a:t>advance.</a:t>
-            </a:r>
-          </a:p>
-        </p:txBody>
-      </p:sp>
-    </p:spTree>
-    <p:extLst>
-      <p:ext uri="{BB962C8B-B14F-4D97-AF65-F5344CB8AC3E}">
-        <p14:creationId xmlns:p14="http://schemas.microsoft.com/office/powerpoint/2010/main" val="3987836530"/>
-      </p:ext>
-    </p:extLst>
-  </p:cSld>
-  <p:clrMapOvr>
-    <a:masterClrMapping/>
-  </p:clrMapOvr>
-  <p:timing>
-    <p:tnLst>
-      <p:par>
-        <p:cTn id="1" dur="indefinite" restart="never" nodeType="tmRoot"/>
-      </p:par>
-    </p:tnLst>
-  </p:timing>
-</p:sld>
-</file>
-
-<file path=ppt/slides/slide11.xml><?xml version="1.0" encoding="utf-8"?>
-<p:sld xmlns:a="http://schemas.openxmlformats.org/drawingml/2006/main" xmlns:r="http://schemas.openxmlformats.org/officeDocument/2006/relationships" xmlns:p="http://schemas.openxmlformats.org/presentationml/2006/main">
-  <p:cSld>
-    <p:spTree>
-      <p:nvGrpSpPr>
-        <p:cNvPr id="1" name=""/>
-        <p:cNvGrpSpPr/>
-        <p:nvPr/>
-      </p:nvGrpSpPr>
-      <p:grpSpPr>
-        <a:xfrm>
-          <a:off x="0" y="0"/>
-          <a:ext cx="0" cy="0"/>
-          <a:chOff x="0" y="0"/>
-          <a:chExt cx="0" cy="0"/>
-        </a:xfrm>
-      </p:grpSpPr>
-      <p:sp>
-        <p:nvSpPr>
-          <p:cNvPr id="7170" name="Rectangle 2"/>
-          <p:cNvSpPr>
-            <a:spLocks noGrp="1" noChangeArrowheads="1"/>
-          </p:cNvSpPr>
-          <p:nvPr>
-            <p:ph type="title"/>
-          </p:nvPr>
-        </p:nvSpPr>
-        <p:spPr>
-          <a:xfrm>
             <a:off x="405266" y="435656"/>
             <a:ext cx="8145462" cy="838200"/>
           </a:xfrm>
@@ -12539,7 +12378,7 @@
 </p:sld>
 </file>
 
-<file path=ppt/slides/slide12.xml><?xml version="1.0" encoding="utf-8"?>
+<file path=ppt/slides/slide11.xml><?xml version="1.0" encoding="utf-8"?>
 <p:sld xmlns:a="http://schemas.openxmlformats.org/drawingml/2006/main" xmlns:r="http://schemas.openxmlformats.org/officeDocument/2006/relationships" xmlns:p="http://schemas.openxmlformats.org/presentationml/2006/main">
   <p:cSld>
     <p:spTree>
@@ -12671,7 +12510,7 @@
 </p:sld>
 </file>
 
-<file path=ppt/slides/slide13.xml><?xml version="1.0" encoding="utf-8"?>
+<file path=ppt/slides/slide12.xml><?xml version="1.0" encoding="utf-8"?>
 <p:sld xmlns:a="http://schemas.openxmlformats.org/drawingml/2006/main" xmlns:r="http://schemas.openxmlformats.org/officeDocument/2006/relationships" xmlns:p="http://schemas.openxmlformats.org/presentationml/2006/main">
   <p:cSld>
     <p:spTree>
@@ -12882,7 +12721,7 @@
 </p:sld>
 </file>
 
-<file path=ppt/slides/slide14.xml><?xml version="1.0" encoding="utf-8"?>
+<file path=ppt/slides/slide13.xml><?xml version="1.0" encoding="utf-8"?>
 <p:sld xmlns:a="http://schemas.openxmlformats.org/drawingml/2006/main" xmlns:r="http://schemas.openxmlformats.org/officeDocument/2006/relationships" xmlns:p="http://schemas.openxmlformats.org/presentationml/2006/main">
   <p:cSld>
     <p:spTree>
@@ -13014,7 +12853,7 @@
 </p:sld>
 </file>
 
-<file path=ppt/slides/slide15.xml><?xml version="1.0" encoding="utf-8"?>
+<file path=ppt/slides/slide14.xml><?xml version="1.0" encoding="utf-8"?>
 <p:sld xmlns:a="http://schemas.openxmlformats.org/drawingml/2006/main" xmlns:r="http://schemas.openxmlformats.org/officeDocument/2006/relationships" xmlns:p="http://schemas.openxmlformats.org/presentationml/2006/main">
   <p:cSld>
     <p:spTree>
@@ -13087,7 +12926,7 @@
 </p:sld>
 </file>
 
-<file path=ppt/slides/slide16.xml><?xml version="1.0" encoding="utf-8"?>
+<file path=ppt/slides/slide15.xml><?xml version="1.0" encoding="utf-8"?>
 <p:sld xmlns:a="http://schemas.openxmlformats.org/drawingml/2006/main" xmlns:r="http://schemas.openxmlformats.org/officeDocument/2006/relationships" xmlns:p="http://schemas.openxmlformats.org/presentationml/2006/main">
   <p:cSld>
     <p:spTree>
@@ -13299,7 +13138,7 @@
 </p:sld>
 </file>
 
-<file path=ppt/slides/slide17.xml><?xml version="1.0" encoding="utf-8"?>
+<file path=ppt/slides/slide16.xml><?xml version="1.0" encoding="utf-8"?>
 <p:sld xmlns:a="http://schemas.openxmlformats.org/drawingml/2006/main" xmlns:r="http://schemas.openxmlformats.org/officeDocument/2006/relationships" xmlns:p="http://schemas.openxmlformats.org/presentationml/2006/main">
   <p:cSld>
     <p:spTree>
@@ -13426,7 +13265,7 @@
 </p:sld>
 </file>
 
-<file path=ppt/slides/slide18.xml><?xml version="1.0" encoding="utf-8"?>
+<file path=ppt/slides/slide17.xml><?xml version="1.0" encoding="utf-8"?>
 <p:sld xmlns:a="http://schemas.openxmlformats.org/drawingml/2006/main" xmlns:r="http://schemas.openxmlformats.org/officeDocument/2006/relationships" xmlns:p="http://schemas.openxmlformats.org/presentationml/2006/main">
   <p:cSld>
     <p:spTree>
@@ -13676,7 +13515,7 @@
 </p:sld>
 </file>
 
-<file path=ppt/slides/slide19.xml><?xml version="1.0" encoding="utf-8"?>
+<file path=ppt/slides/slide18.xml><?xml version="1.0" encoding="utf-8"?>
 <p:sld xmlns:a="http://schemas.openxmlformats.org/drawingml/2006/main" xmlns:r="http://schemas.openxmlformats.org/officeDocument/2006/relationships" xmlns:p="http://schemas.openxmlformats.org/presentationml/2006/main">
   <p:cSld>
     <p:spTree>
@@ -13803,194 +13642,7 @@
 </p:sld>
 </file>
 
-<file path=ppt/slides/slide2.xml><?xml version="1.0" encoding="utf-8"?>
-<p:sld xmlns:a="http://schemas.openxmlformats.org/drawingml/2006/main" xmlns:r="http://schemas.openxmlformats.org/officeDocument/2006/relationships" xmlns:p="http://schemas.openxmlformats.org/presentationml/2006/main">
-  <p:cSld>
-    <p:spTree>
-      <p:nvGrpSpPr>
-        <p:cNvPr id="1" name=""/>
-        <p:cNvGrpSpPr/>
-        <p:nvPr/>
-      </p:nvGrpSpPr>
-      <p:grpSpPr>
-        <a:xfrm>
-          <a:off x="0" y="0"/>
-          <a:ext cx="0" cy="0"/>
-          <a:chOff x="0" y="0"/>
-          <a:chExt cx="0" cy="0"/>
-        </a:xfrm>
-      </p:grpSpPr>
-      <p:sp>
-        <p:nvSpPr>
-          <p:cNvPr id="2" name="Title 1"/>
-          <p:cNvSpPr>
-            <a:spLocks noGrp="1"/>
-          </p:cNvSpPr>
-          <p:nvPr>
-            <p:ph type="title"/>
-          </p:nvPr>
-        </p:nvSpPr>
-        <p:spPr/>
-        <p:txBody>
-          <a:bodyPr/>
-          <a:lstStyle/>
-          <a:p>
-            <a:endParaRPr lang="en-US"/>
-          </a:p>
-        </p:txBody>
-      </p:sp>
-      <p:sp>
-        <p:nvSpPr>
-          <p:cNvPr id="3" name="Content Placeholder 2"/>
-          <p:cNvSpPr>
-            <a:spLocks noGrp="1"/>
-          </p:cNvSpPr>
-          <p:nvPr>
-            <p:ph idx="1"/>
-          </p:nvPr>
-        </p:nvSpPr>
-        <p:spPr/>
-        <p:txBody>
-          <a:bodyPr/>
-          <a:lstStyle/>
-          <a:p>
-            <a:endParaRPr lang="en-US" dirty="0"/>
-          </a:p>
-        </p:txBody>
-      </p:sp>
-      <p:sp>
-        <p:nvSpPr>
-          <p:cNvPr id="4" name="Rectangle 3"/>
-          <p:cNvSpPr/>
-          <p:nvPr/>
-        </p:nvSpPr>
-        <p:spPr>
-          <a:xfrm>
-            <a:off x="5895137" y="5964238"/>
-            <a:ext cx="2811352" cy="420756"/>
-          </a:xfrm>
-          <a:prstGeom prst="rect">
-            <a:avLst/>
-          </a:prstGeom>
-        </p:spPr>
-        <p:txBody>
-          <a:bodyPr wrap="square">
-            <a:spAutoFit/>
-          </a:bodyPr>
-          <a:lstStyle/>
-          <a:p>
-            <a:r>
-              <a:rPr lang="en-US" sz="1067" dirty="0"/>
-              <a:t>https://www.youtube.com/@AmelOline/videos</a:t>
-            </a:r>
-          </a:p>
-        </p:txBody>
-      </p:sp>
-      <p:sp>
-        <p:nvSpPr>
-          <p:cNvPr id="5" name="Rectangle 4"/>
-          <p:cNvSpPr/>
-          <p:nvPr/>
-        </p:nvSpPr>
-        <p:spPr>
-          <a:xfrm>
-            <a:off x="6850835" y="5707693"/>
-            <a:ext cx="1782399" cy="256545"/>
-          </a:xfrm>
-          <a:prstGeom prst="rect">
-            <a:avLst/>
-          </a:prstGeom>
-        </p:spPr>
-        <p:txBody>
-          <a:bodyPr wrap="square">
-            <a:spAutoFit/>
-          </a:bodyPr>
-          <a:lstStyle/>
-          <a:p>
-            <a:r>
-              <a:rPr lang="en-US" sz="1067" dirty="0"/>
-              <a:t>https://github.com/siagianp</a:t>
-            </a:r>
-          </a:p>
-        </p:txBody>
-      </p:sp>
-      <p:sp>
-        <p:nvSpPr>
-          <p:cNvPr id="6" name="Rectangle 5"/>
-          <p:cNvSpPr/>
-          <p:nvPr/>
-        </p:nvSpPr>
-        <p:spPr>
-          <a:xfrm>
-            <a:off x="4778081" y="6174616"/>
-            <a:ext cx="4023019" cy="256545"/>
-          </a:xfrm>
-          <a:prstGeom prst="rect">
-            <a:avLst/>
-          </a:prstGeom>
-        </p:spPr>
-        <p:txBody>
-          <a:bodyPr wrap="square">
-            <a:spAutoFit/>
-          </a:bodyPr>
-          <a:lstStyle/>
-          <a:p>
-            <a:r>
-              <a:rPr lang="en-US" sz="1067" dirty="0"/>
-              <a:t>https://github.com/amelcharolinesgn2/IoT_simulator-mqtt-NodeRed</a:t>
-            </a:r>
-          </a:p>
-        </p:txBody>
-      </p:sp>
-      <p:sp>
-        <p:nvSpPr>
-          <p:cNvPr id="7" name="Rectangle 6"/>
-          <p:cNvSpPr/>
-          <p:nvPr/>
-        </p:nvSpPr>
-        <p:spPr>
-          <a:xfrm>
-            <a:off x="5030007" y="6442843"/>
-            <a:ext cx="2201244" cy="246221"/>
-          </a:xfrm>
-          <a:prstGeom prst="rect">
-            <a:avLst/>
-          </a:prstGeom>
-        </p:spPr>
-        <p:txBody>
-          <a:bodyPr wrap="none">
-            <a:spAutoFit/>
-          </a:bodyPr>
-          <a:lstStyle/>
-          <a:p>
-            <a:r>
-              <a:rPr lang="en-US" sz="1000" dirty="0"/>
-              <a:t>github.com/amelcharolinesgn2/ANJAR</a:t>
-            </a:r>
-          </a:p>
-        </p:txBody>
-      </p:sp>
-    </p:spTree>
-    <p:extLst>
-      <p:ext uri="{BB962C8B-B14F-4D97-AF65-F5344CB8AC3E}">
-        <p14:creationId xmlns:p14="http://schemas.microsoft.com/office/powerpoint/2010/main" val="96135649"/>
-      </p:ext>
-    </p:extLst>
-  </p:cSld>
-  <p:clrMapOvr>
-    <a:masterClrMapping/>
-  </p:clrMapOvr>
-  <p:timing>
-    <p:tnLst>
-      <p:par>
-        <p:cTn id="1" dur="indefinite" restart="never" nodeType="tmRoot"/>
-      </p:par>
-    </p:tnLst>
-  </p:timing>
-</p:sld>
-</file>
-
-<file path=ppt/slides/slide20.xml><?xml version="1.0" encoding="utf-8"?>
+<file path=ppt/slides/slide19.xml><?xml version="1.0" encoding="utf-8"?>
 <p:sld xmlns:a="http://schemas.openxmlformats.org/drawingml/2006/main" xmlns:r="http://schemas.openxmlformats.org/officeDocument/2006/relationships" xmlns:p="http://schemas.openxmlformats.org/presentationml/2006/main">
   <p:cSld>
     <p:spTree>
@@ -14253,7 +13905,174 @@
 </p:sld>
 </file>
 
-<file path=ppt/slides/slide21.xml><?xml version="1.0" encoding="utf-8"?>
+<file path=ppt/slides/slide2.xml><?xml version="1.0" encoding="utf-8"?>
+<p:sld xmlns:a="http://schemas.openxmlformats.org/drawingml/2006/main" xmlns:r="http://schemas.openxmlformats.org/officeDocument/2006/relationships" xmlns:p="http://schemas.openxmlformats.org/presentationml/2006/main">
+  <p:cSld>
+    <p:spTree>
+      <p:nvGrpSpPr>
+        <p:cNvPr id="1" name=""/>
+        <p:cNvGrpSpPr/>
+        <p:nvPr/>
+      </p:nvGrpSpPr>
+      <p:grpSpPr>
+        <a:xfrm>
+          <a:off x="0" y="0"/>
+          <a:ext cx="0" cy="0"/>
+          <a:chOff x="0" y="0"/>
+          <a:chExt cx="0" cy="0"/>
+        </a:xfrm>
+      </p:grpSpPr>
+      <p:sp>
+        <p:nvSpPr>
+          <p:cNvPr id="6146" name="Rectangle 2"/>
+          <p:cNvSpPr>
+            <a:spLocks noGrp="1" noChangeArrowheads="1"/>
+          </p:cNvSpPr>
+          <p:nvPr>
+            <p:ph type="title"/>
+          </p:nvPr>
+        </p:nvSpPr>
+        <p:spPr>
+          <a:xfrm>
+            <a:off x="434295" y="363085"/>
+            <a:ext cx="8709705" cy="798058"/>
+          </a:xfrm>
+        </p:spPr>
+        <p:txBody>
+          <a:bodyPr/>
+          <a:lstStyle/>
+          <a:p>
+            <a:pPr eaLnBrk="1" hangingPunct="1"/>
+            <a:r>
+              <a:rPr lang="en-US" sz="2800" dirty="0" smtClean="0">
+                <a:ea typeface="ＭＳ Ｐゴシック" pitchFamily="34" charset="-128"/>
+              </a:rPr>
+              <a:t>Chapter 7: Securing Site-to-Site Connectivity</a:t>
+            </a:r>
+          </a:p>
+        </p:txBody>
+      </p:sp>
+      <p:sp>
+        <p:nvSpPr>
+          <p:cNvPr id="6147" name="Rectangle 3"/>
+          <p:cNvSpPr>
+            <a:spLocks noGrp="1" noChangeArrowheads="1"/>
+          </p:cNvSpPr>
+          <p:nvPr>
+            <p:ph idx="1"/>
+          </p:nvPr>
+        </p:nvSpPr>
+        <p:spPr>
+          <a:xfrm>
+            <a:off x="566057" y="1349829"/>
+            <a:ext cx="8312831" cy="4689021"/>
+          </a:xfrm>
+        </p:spPr>
+        <p:txBody>
+          <a:bodyPr/>
+          <a:lstStyle/>
+          <a:p>
+            <a:pPr marL="0" indent="0" eaLnBrk="1" hangingPunct="1">
+              <a:buFont typeface="Wingdings" pitchFamily="2" charset="2"/>
+              <a:buNone/>
+            </a:pPr>
+            <a:r>
+              <a:rPr lang="en-US" sz="2000" dirty="0">
+                <a:cs typeface="Arial" charset="0"/>
+              </a:rPr>
+              <a:t>7</a:t>
+            </a:r>
+            <a:r>
+              <a:rPr lang="en-US" sz="2000" dirty="0" smtClean="0">
+                <a:cs typeface="Arial" charset="0"/>
+              </a:rPr>
+              <a:t>.1 VPNs</a:t>
+            </a:r>
+          </a:p>
+          <a:p>
+            <a:pPr marL="0" indent="0" eaLnBrk="1" hangingPunct="1">
+              <a:buFont typeface="Wingdings" pitchFamily="2" charset="2"/>
+              <a:buNone/>
+            </a:pPr>
+            <a:r>
+              <a:rPr lang="en-US" sz="2000" dirty="0">
+                <a:cs typeface="Arial" charset="0"/>
+              </a:rPr>
+              <a:t>7</a:t>
+            </a:r>
+            <a:r>
+              <a:rPr lang="en-US" sz="2000" dirty="0" smtClean="0">
+                <a:cs typeface="Arial" charset="0"/>
+              </a:rPr>
+              <a:t>.2 Site-to-Site GRE Tunnels</a:t>
+            </a:r>
+          </a:p>
+          <a:p>
+            <a:pPr marL="0" indent="0" eaLnBrk="1" hangingPunct="1">
+              <a:buFont typeface="Wingdings" pitchFamily="2" charset="2"/>
+              <a:buNone/>
+            </a:pPr>
+            <a:r>
+              <a:rPr lang="en-US" sz="2000" dirty="0">
+                <a:cs typeface="Arial" charset="0"/>
+              </a:rPr>
+              <a:t>7</a:t>
+            </a:r>
+            <a:r>
+              <a:rPr lang="en-US" sz="2000" dirty="0" smtClean="0">
+                <a:cs typeface="Arial" charset="0"/>
+              </a:rPr>
+              <a:t>.3 Introducing IPsec</a:t>
+            </a:r>
+          </a:p>
+          <a:p>
+            <a:pPr marL="0" indent="0" eaLnBrk="1" hangingPunct="1">
+              <a:buFont typeface="Wingdings" pitchFamily="2" charset="2"/>
+              <a:buNone/>
+            </a:pPr>
+            <a:r>
+              <a:rPr lang="en-US" sz="2000" dirty="0">
+                <a:cs typeface="Arial" charset="0"/>
+              </a:rPr>
+              <a:t>7</a:t>
+            </a:r>
+            <a:r>
+              <a:rPr lang="en-US" sz="2000" dirty="0" smtClean="0">
+                <a:cs typeface="Arial" charset="0"/>
+              </a:rPr>
+              <a:t>.4 Remote Access</a:t>
+            </a:r>
+          </a:p>
+          <a:p>
+            <a:pPr marL="0" indent="0" eaLnBrk="1" hangingPunct="1">
+              <a:buFont typeface="Wingdings" pitchFamily="2" charset="2"/>
+              <a:buNone/>
+            </a:pPr>
+            <a:r>
+              <a:rPr lang="en-US" sz="2000" dirty="0" smtClean="0">
+                <a:cs typeface="Arial" charset="0"/>
+              </a:rPr>
+              <a:t>7.5 Summary</a:t>
+            </a:r>
+          </a:p>
+        </p:txBody>
+      </p:sp>
+    </p:spTree>
+  </p:cSld>
+  <p:clrMapOvr>
+    <a:masterClrMapping/>
+  </p:clrMapOvr>
+  <p:timing>
+    <p:tnLst>
+      <p:par>
+        <p:cTn id="1" dur="indefinite" restart="never" nodeType="tmRoot"/>
+      </p:par>
+    </p:tnLst>
+  </p:timing>
+</p:sld>
+</file>
+
+<file path=ppt/slides/slide20.xml><?xml version="1.0" encoding="utf-8"?>
 <p:sld xmlns:a="http://schemas.openxmlformats.org/drawingml/2006/main" xmlns:r="http://schemas.openxmlformats.org/officeDocument/2006/relationships" xmlns:p="http://schemas.openxmlformats.org/presentationml/2006/main">
   <p:cSld>
     <p:spTree>
@@ -14608,7 +14427,7 @@
 </p:sld>
 </file>
 
-<file path=ppt/slides/slide22.xml><?xml version="1.0" encoding="utf-8"?>
+<file path=ppt/slides/slide21.xml><?xml version="1.0" encoding="utf-8"?>
 <p:sld xmlns:a="http://schemas.openxmlformats.org/drawingml/2006/main" xmlns:r="http://schemas.openxmlformats.org/officeDocument/2006/relationships" xmlns:p="http://schemas.openxmlformats.org/presentationml/2006/main">
   <p:cSld>
     <p:spTree>
@@ -14681,7 +14500,7 @@
 </p:sld>
 </file>
 
-<file path=ppt/slides/slide23.xml><?xml version="1.0" encoding="utf-8"?>
+<file path=ppt/slides/slide22.xml><?xml version="1.0" encoding="utf-8"?>
 <p:sld xmlns:a="http://schemas.openxmlformats.org/drawingml/2006/main" xmlns:r="http://schemas.openxmlformats.org/officeDocument/2006/relationships" xmlns:p="http://schemas.openxmlformats.org/presentationml/2006/main">
   <p:cSld>
     <p:spTree>
@@ -14927,6 +14746,347 @@
 </p:sld>
 </file>
 
+<file path=ppt/slides/slide23.xml><?xml version="1.0" encoding="utf-8"?>
+<p:sld xmlns:a="http://schemas.openxmlformats.org/drawingml/2006/main" xmlns:r="http://schemas.openxmlformats.org/officeDocument/2006/relationships" xmlns:p="http://schemas.openxmlformats.org/presentationml/2006/main">
+  <p:cSld>
+    <p:spTree>
+      <p:nvGrpSpPr>
+        <p:cNvPr id="1" name=""/>
+        <p:cNvGrpSpPr/>
+        <p:nvPr/>
+      </p:nvGrpSpPr>
+      <p:grpSpPr>
+        <a:xfrm>
+          <a:off x="0" y="0"/>
+          <a:ext cx="0" cy="0"/>
+          <a:chOff x="0" y="0"/>
+          <a:chExt cx="0" cy="0"/>
+        </a:xfrm>
+      </p:grpSpPr>
+      <p:sp>
+        <p:nvSpPr>
+          <p:cNvPr id="7170" name="Rectangle 2"/>
+          <p:cNvSpPr>
+            <a:spLocks noGrp="1" noChangeArrowheads="1"/>
+          </p:cNvSpPr>
+          <p:nvPr>
+            <p:ph type="title"/>
+          </p:nvPr>
+        </p:nvSpPr>
+        <p:spPr>
+          <a:xfrm>
+            <a:off x="396815" y="332577"/>
+            <a:ext cx="8145462" cy="838200"/>
+          </a:xfrm>
+        </p:spPr>
+        <p:txBody>
+          <a:bodyPr/>
+          <a:lstStyle/>
+          <a:p>
+            <a:pPr eaLnBrk="1" hangingPunct="1"/>
+            <a:r>
+              <a:rPr lang="en-US" sz="1800" dirty="0" smtClean="0">
+                <a:ea typeface="ＭＳ Ｐゴシック" pitchFamily="34" charset="-128"/>
+              </a:rPr>
+              <a:t>Internet Protocol Security</a:t>
+            </a:r>
+            <a:br>
+              <a:rPr lang="en-US" sz="1800" dirty="0" smtClean="0">
+                <a:ea typeface="ＭＳ Ｐゴシック" pitchFamily="34" charset="-128"/>
+              </a:rPr>
+            </a:br>
+            <a:r>
+              <a:rPr lang="en-US" dirty="0" smtClean="0">
+                <a:ea typeface="ＭＳ Ｐゴシック" pitchFamily="34" charset="-128"/>
+              </a:rPr>
+              <a:t>IPsec Functions</a:t>
+            </a:r>
+          </a:p>
+        </p:txBody>
+      </p:sp>
+      <p:sp>
+        <p:nvSpPr>
+          <p:cNvPr id="3" name="TextBox 2"/>
+          <p:cNvSpPr txBox="1"/>
+          <p:nvPr/>
+        </p:nvSpPr>
+        <p:spPr>
+          <a:xfrm>
+            <a:off x="396815" y="1170777"/>
+            <a:ext cx="8471140" cy="5262979"/>
+          </a:xfrm>
+          <a:prstGeom prst="rect">
+            <a:avLst/>
+          </a:prstGeom>
+          <a:noFill/>
+        </p:spPr>
+        <p:txBody>
+          <a:bodyPr wrap="square" rtlCol="0">
+            <a:spAutoFit/>
+          </a:bodyPr>
+          <a:lstStyle/>
+          <a:p>
+            <a:pPr marL="236538" indent="-236538" algn="l" defTabSz="814388">
+              <a:lnSpc>
+                <a:spcPct val="95000"/>
+              </a:lnSpc>
+              <a:spcBef>
+                <a:spcPct val="50000"/>
+              </a:spcBef>
+              <a:buClr>
+                <a:srgbClr val="708CA1"/>
+              </a:buClr>
+              <a:buFont typeface="Wingdings" pitchFamily="2" charset="2"/>
+              <a:buChar char="§"/>
+            </a:pPr>
+            <a:r>
+              <a:rPr lang="en-US" sz="2000" dirty="0">
+                <a:latin typeface="+mn-lt"/>
+              </a:rPr>
+              <a:t>Defines how a VPN can be configured in a secure manner using </a:t>
+            </a:r>
+            <a:r>
+              <a:rPr lang="en-US" sz="2000" dirty="0" smtClean="0">
+                <a:latin typeface="+mn-lt"/>
+              </a:rPr>
+              <a:t>IP.</a:t>
+            </a:r>
+            <a:endParaRPr lang="en-US" sz="2000" dirty="0">
+              <a:latin typeface="+mn-lt"/>
+            </a:endParaRPr>
+          </a:p>
+          <a:p>
+            <a:pPr marL="236538" indent="-236538" algn="l" defTabSz="814388">
+              <a:lnSpc>
+                <a:spcPct val="95000"/>
+              </a:lnSpc>
+              <a:spcBef>
+                <a:spcPct val="50000"/>
+              </a:spcBef>
+              <a:buClr>
+                <a:srgbClr val="708CA1"/>
+              </a:buClr>
+              <a:buFont typeface="Wingdings" pitchFamily="2" charset="2"/>
+              <a:buChar char="§"/>
+            </a:pPr>
+            <a:r>
+              <a:rPr lang="en-US" sz="2000" dirty="0">
+                <a:latin typeface="+mn-lt"/>
+              </a:rPr>
+              <a:t>Framework of open standards that spells out the rules for secure </a:t>
+            </a:r>
+            <a:r>
+              <a:rPr lang="en-US" sz="2000" dirty="0" smtClean="0">
+                <a:latin typeface="+mn-lt"/>
+              </a:rPr>
+              <a:t>communications.</a:t>
+            </a:r>
+            <a:endParaRPr lang="en-US" sz="2000" dirty="0">
+              <a:latin typeface="+mn-lt"/>
+            </a:endParaRPr>
+          </a:p>
+          <a:p>
+            <a:pPr marL="236538" indent="-236538" algn="l" defTabSz="814388">
+              <a:lnSpc>
+                <a:spcPct val="95000"/>
+              </a:lnSpc>
+              <a:spcBef>
+                <a:spcPct val="50000"/>
+              </a:spcBef>
+              <a:buClr>
+                <a:srgbClr val="708CA1"/>
+              </a:buClr>
+              <a:buFont typeface="Wingdings" pitchFamily="2" charset="2"/>
+              <a:buChar char="§"/>
+            </a:pPr>
+            <a:r>
+              <a:rPr lang="en-US" sz="2000" dirty="0">
+                <a:latin typeface="+mn-lt"/>
+              </a:rPr>
+              <a:t>Not bound to any specific encryption, authentication, security algorithms, or keying </a:t>
+            </a:r>
+            <a:r>
+              <a:rPr lang="en-US" sz="2000" dirty="0" smtClean="0">
+                <a:latin typeface="+mn-lt"/>
+              </a:rPr>
+              <a:t>technology.</a:t>
+            </a:r>
+            <a:endParaRPr lang="en-US" sz="2000" dirty="0">
+              <a:latin typeface="+mn-lt"/>
+            </a:endParaRPr>
+          </a:p>
+          <a:p>
+            <a:pPr marL="236538" indent="-236538" algn="l" defTabSz="814388">
+              <a:lnSpc>
+                <a:spcPct val="95000"/>
+              </a:lnSpc>
+              <a:spcBef>
+                <a:spcPct val="50000"/>
+              </a:spcBef>
+              <a:buClr>
+                <a:srgbClr val="708CA1"/>
+              </a:buClr>
+              <a:buFont typeface="Wingdings" pitchFamily="2" charset="2"/>
+              <a:buChar char="§"/>
+            </a:pPr>
+            <a:r>
+              <a:rPr lang="en-US" sz="2000" dirty="0">
+                <a:latin typeface="+mn-lt"/>
+              </a:rPr>
+              <a:t>Relies on existing algorithms to implement secure </a:t>
+            </a:r>
+            <a:r>
+              <a:rPr lang="en-US" sz="2000" dirty="0" smtClean="0">
+                <a:latin typeface="+mn-lt"/>
+              </a:rPr>
+              <a:t>communications.</a:t>
+            </a:r>
+            <a:endParaRPr lang="en-US" sz="2000" dirty="0">
+              <a:latin typeface="+mn-lt"/>
+            </a:endParaRPr>
+          </a:p>
+          <a:p>
+            <a:pPr marL="236538" indent="-236538" algn="l" defTabSz="814388">
+              <a:lnSpc>
+                <a:spcPct val="95000"/>
+              </a:lnSpc>
+              <a:spcBef>
+                <a:spcPct val="50000"/>
+              </a:spcBef>
+              <a:buClr>
+                <a:srgbClr val="708CA1"/>
+              </a:buClr>
+              <a:buFont typeface="Wingdings" pitchFamily="2" charset="2"/>
+              <a:buChar char="§"/>
+            </a:pPr>
+            <a:r>
+              <a:rPr lang="en-US" sz="2000" dirty="0">
+                <a:latin typeface="+mn-lt"/>
+              </a:rPr>
+              <a:t>Works at the network layer, protecting and authenticating IP packets between participating IPsec </a:t>
+            </a:r>
+            <a:r>
+              <a:rPr lang="en-US" sz="2000" dirty="0" smtClean="0">
+                <a:latin typeface="+mn-lt"/>
+              </a:rPr>
+              <a:t>devices.</a:t>
+            </a:r>
+            <a:endParaRPr lang="en-US" sz="2000" dirty="0">
+              <a:latin typeface="+mn-lt"/>
+            </a:endParaRPr>
+          </a:p>
+          <a:p>
+            <a:pPr marL="236538" indent="-236538" algn="l" defTabSz="814388">
+              <a:lnSpc>
+                <a:spcPct val="95000"/>
+              </a:lnSpc>
+              <a:spcBef>
+                <a:spcPct val="50000"/>
+              </a:spcBef>
+              <a:buClr>
+                <a:srgbClr val="708CA1"/>
+              </a:buClr>
+              <a:buFont typeface="Wingdings" pitchFamily="2" charset="2"/>
+              <a:buChar char="§"/>
+            </a:pPr>
+            <a:r>
+              <a:rPr lang="en-US" sz="2000" dirty="0">
+                <a:latin typeface="+mn-lt"/>
+              </a:rPr>
+              <a:t>Secures a path between a pair of gateways, a pair of hosts, or a gateway and </a:t>
+            </a:r>
+            <a:r>
+              <a:rPr lang="en-US" sz="2000" dirty="0" smtClean="0">
+                <a:latin typeface="+mn-lt"/>
+              </a:rPr>
+              <a:t>host.</a:t>
+            </a:r>
+            <a:endParaRPr lang="en-US" sz="2000" dirty="0">
+              <a:latin typeface="+mn-lt"/>
+            </a:endParaRPr>
+          </a:p>
+          <a:p>
+            <a:pPr marL="236538" indent="-236538" algn="l" defTabSz="814388">
+              <a:lnSpc>
+                <a:spcPct val="95000"/>
+              </a:lnSpc>
+              <a:spcBef>
+                <a:spcPct val="50000"/>
+              </a:spcBef>
+              <a:buClr>
+                <a:srgbClr val="708CA1"/>
+              </a:buClr>
+              <a:buFont typeface="Wingdings" pitchFamily="2" charset="2"/>
+              <a:buChar char="§"/>
+            </a:pPr>
+            <a:r>
+              <a:rPr lang="en-US" sz="2000" dirty="0">
+                <a:latin typeface="+mn-lt"/>
+              </a:rPr>
+              <a:t>All implementations of IPsec have a plaintext Layer 3 header, so there are no issues with </a:t>
+            </a:r>
+            <a:r>
+              <a:rPr lang="en-US" sz="2000" dirty="0" smtClean="0">
+                <a:latin typeface="+mn-lt"/>
+              </a:rPr>
+              <a:t>routing.</a:t>
+            </a:r>
+            <a:endParaRPr lang="en-US" sz="2000" dirty="0">
+              <a:latin typeface="+mn-lt"/>
+            </a:endParaRPr>
+          </a:p>
+          <a:p>
+            <a:pPr marL="236538" indent="-236538" algn="l" defTabSz="814388">
+              <a:lnSpc>
+                <a:spcPct val="95000"/>
+              </a:lnSpc>
+              <a:spcBef>
+                <a:spcPct val="50000"/>
+              </a:spcBef>
+              <a:buClr>
+                <a:srgbClr val="708CA1"/>
+              </a:buClr>
+              <a:buFont typeface="Wingdings" pitchFamily="2" charset="2"/>
+              <a:buChar char="§"/>
+            </a:pPr>
+            <a:r>
+              <a:rPr lang="en-US" sz="2000" dirty="0">
+                <a:latin typeface="+mn-lt"/>
+              </a:rPr>
+              <a:t>Functions over all Layer 2 protocols, such as Ethernet, ATM, or Frame </a:t>
+            </a:r>
+            <a:r>
+              <a:rPr lang="en-US" sz="2000" dirty="0" smtClean="0">
+                <a:latin typeface="+mn-lt"/>
+              </a:rPr>
+              <a:t>Relay.</a:t>
+            </a:r>
+            <a:endParaRPr lang="en-US" sz="2000" dirty="0">
+              <a:latin typeface="+mn-lt"/>
+            </a:endParaRPr>
+          </a:p>
+        </p:txBody>
+      </p:sp>
+    </p:spTree>
+    <p:extLst>
+      <p:ext uri="{BB962C8B-B14F-4D97-AF65-F5344CB8AC3E}">
+        <p14:creationId xmlns:p14="http://schemas.microsoft.com/office/powerpoint/2010/main" val="2489740841"/>
+      </p:ext>
+    </p:extLst>
+  </p:cSld>
+  <p:clrMapOvr>
+    <a:masterClrMapping/>
+  </p:clrMapOvr>
+  <p:timing>
+    <p:tnLst>
+      <p:par>
+        <p:cTn id="1" dur="indefinite" restart="never" nodeType="tmRoot"/>
+      </p:par>
+    </p:tnLst>
+  </p:timing>
+</p:sld>
+</file>
+
 <file path=ppt/slides/slide24.xml><?xml version="1.0" encoding="utf-8"?>
 <p:sld xmlns:a="http://schemas.openxmlformats.org/drawingml/2006/main" xmlns:r="http://schemas.openxmlformats.org/officeDocument/2006/relationships" xmlns:p="http://schemas.openxmlformats.org/presentationml/2006/main">
   <p:cSld>
@@ -14956,7 +15116,7 @@
         </p:nvSpPr>
         <p:spPr>
           <a:xfrm>
-            <a:off x="396815" y="332577"/>
+            <a:off x="396815" y="432918"/>
             <a:ext cx="8145462" cy="838200"/>
           </a:xfrm>
         </p:spPr>
@@ -14971,17 +15131,26 @@
               </a:rPr>
               <a:t>Internet Protocol Security</a:t>
             </a:r>
+            <a:r>
+              <a:rPr lang="en-US" sz="1800" smtClean="0">
+                <a:ea typeface="ＭＳ Ｐゴシック" pitchFamily="34" charset="-128"/>
+              </a:rPr>
+              <a:t/>
+            </a:r>
             <a:br>
-              <a:rPr lang="en-US" sz="1800" dirty="0" smtClean="0">
+              <a:rPr lang="en-US" sz="1800" smtClean="0">
                 <a:ea typeface="ＭＳ Ｐゴシック" pitchFamily="34" charset="-128"/>
               </a:rPr>
             </a:br>
             <a:r>
-              <a:rPr lang="en-US" dirty="0" smtClean="0">
+              <a:rPr lang="en-US" smtClean="0">
                 <a:ea typeface="ＭＳ Ｐゴシック" pitchFamily="34" charset="-128"/>
               </a:rPr>
-              <a:t>IPsec Functions</a:t>
-            </a:r>
+              <a:t>IPsec Characteristics</a:t>
+            </a:r>
+            <a:endParaRPr lang="en-US" dirty="0" smtClean="0">
+              <a:ea typeface="ＭＳ Ｐゴシック" pitchFamily="34" charset="-128"/>
+            </a:endParaRPr>
           </a:p>
         </p:txBody>
       </p:sp>
@@ -14993,8 +15162,8 @@
         </p:nvSpPr>
         <p:spPr>
           <a:xfrm>
-            <a:off x="396815" y="1170777"/>
-            <a:ext cx="8471140" cy="5262979"/>
+            <a:off x="396815" y="1573113"/>
+            <a:ext cx="8471140" cy="2625334"/>
           </a:xfrm>
           <a:prstGeom prst="rect">
             <a:avLst/>
@@ -15006,6 +15175,22 @@
             <a:spAutoFit/>
           </a:bodyPr>
           <a:lstStyle/>
+          <a:p>
+            <a:pPr algn="l"/>
+            <a:r>
+              <a:rPr lang="en-US" sz="2000" dirty="0" smtClean="0"/>
+              <a:t>IPsec </a:t>
+            </a:r>
+            <a:r>
+              <a:rPr lang="en-US" sz="2000" dirty="0"/>
+              <a:t>characteristics can be summarized as follows</a:t>
+            </a:r>
+            <a:r>
+              <a:rPr lang="en-US" sz="2000" dirty="0" smtClean="0"/>
+              <a:t>:</a:t>
+            </a:r>
+            <a:endParaRPr lang="en-US" dirty="0"/>
+          </a:p>
           <a:p>
             <a:pPr marL="236538" indent="-236538" algn="l" defTabSz="814388">
               <a:lnSpc>
@@ -15024,17 +15209,8 @@
               <a:rPr lang="en-US" sz="2000" dirty="0">
                 <a:latin typeface="+mn-lt"/>
               </a:rPr>
-              <a:t>Defines how a VPN can be configured in a secure manner using </a:t>
-            </a:r>
-            <a:r>
-              <a:rPr lang="en-US" sz="2000" dirty="0" smtClean="0">
-                <a:latin typeface="+mn-lt"/>
-              </a:rPr>
-              <a:t>IP.</a:t>
-            </a:r>
-            <a:endParaRPr lang="en-US" sz="2000" dirty="0">
-              <a:latin typeface="+mn-lt"/>
-            </a:endParaRPr>
+              <a:t>IPsec is a framework of open standards that is algorithm-independent.</a:t>
+            </a:r>
           </a:p>
           <a:p>
             <a:pPr marL="236538" indent="-236538" algn="l" defTabSz="814388">
@@ -15054,17 +15230,8 @@
               <a:rPr lang="en-US" sz="2000" dirty="0">
                 <a:latin typeface="+mn-lt"/>
               </a:rPr>
-              <a:t>Framework of open standards that spells out the rules for secure </a:t>
-            </a:r>
-            <a:r>
-              <a:rPr lang="en-US" sz="2000" dirty="0" smtClean="0">
-                <a:latin typeface="+mn-lt"/>
-              </a:rPr>
-              <a:t>communications.</a:t>
-            </a:r>
-            <a:endParaRPr lang="en-US" sz="2000" dirty="0">
-              <a:latin typeface="+mn-lt"/>
-            </a:endParaRPr>
+              <a:t>IPsec provides data confidentiality, data integrity, and origin authentication.</a:t>
+            </a:r>
           </a:p>
           <a:p>
             <a:pPr marL="236538" indent="-236538" algn="l" defTabSz="814388">
@@ -15084,174 +15251,19 @@
               <a:rPr lang="en-US" sz="2000" dirty="0">
                 <a:latin typeface="+mn-lt"/>
               </a:rPr>
-              <a:t>Not bound to any specific encryption, authentication, security algorithms, or keying </a:t>
-            </a:r>
-            <a:r>
-              <a:rPr lang="en-US" sz="2000" dirty="0" smtClean="0">
-                <a:latin typeface="+mn-lt"/>
-              </a:rPr>
-              <a:t>technology.</a:t>
-            </a:r>
-            <a:endParaRPr lang="en-US" sz="2000" dirty="0">
-              <a:latin typeface="+mn-lt"/>
-            </a:endParaRPr>
-          </a:p>
-          <a:p>
-            <a:pPr marL="236538" indent="-236538" algn="l" defTabSz="814388">
-              <a:lnSpc>
-                <a:spcPct val="95000"/>
-              </a:lnSpc>
-              <a:spcBef>
-                <a:spcPct val="50000"/>
-              </a:spcBef>
-              <a:buClr>
-                <a:srgbClr val="708CA1"/>
-              </a:buClr>
-              <a:buFont typeface="Wingdings" pitchFamily="2" charset="2"/>
-              <a:buChar char="§"/>
-            </a:pPr>
-            <a:r>
-              <a:rPr lang="en-US" sz="2000" dirty="0">
-                <a:latin typeface="+mn-lt"/>
-              </a:rPr>
-              <a:t>Relies on existing algorithms to implement secure </a:t>
-            </a:r>
-            <a:r>
-              <a:rPr lang="en-US" sz="2000" dirty="0" smtClean="0">
-                <a:latin typeface="+mn-lt"/>
-              </a:rPr>
-              <a:t>communications.</a:t>
-            </a:r>
-            <a:endParaRPr lang="en-US" sz="2000" dirty="0">
-              <a:latin typeface="+mn-lt"/>
-            </a:endParaRPr>
-          </a:p>
-          <a:p>
-            <a:pPr marL="236538" indent="-236538" algn="l" defTabSz="814388">
-              <a:lnSpc>
-                <a:spcPct val="95000"/>
-              </a:lnSpc>
-              <a:spcBef>
-                <a:spcPct val="50000"/>
-              </a:spcBef>
-              <a:buClr>
-                <a:srgbClr val="708CA1"/>
-              </a:buClr>
-              <a:buFont typeface="Wingdings" pitchFamily="2" charset="2"/>
-              <a:buChar char="§"/>
-            </a:pPr>
-            <a:r>
-              <a:rPr lang="en-US" sz="2000" dirty="0">
-                <a:latin typeface="+mn-lt"/>
-              </a:rPr>
-              <a:t>Works at the network layer, protecting and authenticating IP packets between participating IPsec </a:t>
-            </a:r>
-            <a:r>
-              <a:rPr lang="en-US" sz="2000" dirty="0" smtClean="0">
-                <a:latin typeface="+mn-lt"/>
-              </a:rPr>
-              <a:t>devices.</a:t>
-            </a:r>
-            <a:endParaRPr lang="en-US" sz="2000" dirty="0">
-              <a:latin typeface="+mn-lt"/>
-            </a:endParaRPr>
-          </a:p>
-          <a:p>
-            <a:pPr marL="236538" indent="-236538" algn="l" defTabSz="814388">
-              <a:lnSpc>
-                <a:spcPct val="95000"/>
-              </a:lnSpc>
-              <a:spcBef>
-                <a:spcPct val="50000"/>
-              </a:spcBef>
-              <a:buClr>
-                <a:srgbClr val="708CA1"/>
-              </a:buClr>
-              <a:buFont typeface="Wingdings" pitchFamily="2" charset="2"/>
-              <a:buChar char="§"/>
-            </a:pPr>
-            <a:r>
-              <a:rPr lang="en-US" sz="2000" dirty="0">
-                <a:latin typeface="+mn-lt"/>
-              </a:rPr>
-              <a:t>Secures a path between a pair of gateways, a pair of hosts, or a gateway and </a:t>
-            </a:r>
-            <a:r>
-              <a:rPr lang="en-US" sz="2000" dirty="0" smtClean="0">
-                <a:latin typeface="+mn-lt"/>
-              </a:rPr>
-              <a:t>host.</a:t>
-            </a:r>
-            <a:endParaRPr lang="en-US" sz="2000" dirty="0">
-              <a:latin typeface="+mn-lt"/>
-            </a:endParaRPr>
-          </a:p>
-          <a:p>
-            <a:pPr marL="236538" indent="-236538" algn="l" defTabSz="814388">
-              <a:lnSpc>
-                <a:spcPct val="95000"/>
-              </a:lnSpc>
-              <a:spcBef>
-                <a:spcPct val="50000"/>
-              </a:spcBef>
-              <a:buClr>
-                <a:srgbClr val="708CA1"/>
-              </a:buClr>
-              <a:buFont typeface="Wingdings" pitchFamily="2" charset="2"/>
-              <a:buChar char="§"/>
-            </a:pPr>
-            <a:r>
-              <a:rPr lang="en-US" sz="2000" dirty="0">
-                <a:latin typeface="+mn-lt"/>
-              </a:rPr>
-              <a:t>All implementations of IPsec have a plaintext Layer 3 header, so there are no issues with </a:t>
-            </a:r>
-            <a:r>
-              <a:rPr lang="en-US" sz="2000" dirty="0" smtClean="0">
-                <a:latin typeface="+mn-lt"/>
-              </a:rPr>
-              <a:t>routing.</a:t>
-            </a:r>
-            <a:endParaRPr lang="en-US" sz="2000" dirty="0">
-              <a:latin typeface="+mn-lt"/>
-            </a:endParaRPr>
-          </a:p>
-          <a:p>
-            <a:pPr marL="236538" indent="-236538" algn="l" defTabSz="814388">
-              <a:lnSpc>
-                <a:spcPct val="95000"/>
-              </a:lnSpc>
-              <a:spcBef>
-                <a:spcPct val="50000"/>
-              </a:spcBef>
-              <a:buClr>
-                <a:srgbClr val="708CA1"/>
-              </a:buClr>
-              <a:buFont typeface="Wingdings" pitchFamily="2" charset="2"/>
-              <a:buChar char="§"/>
-            </a:pPr>
-            <a:r>
-              <a:rPr lang="en-US" sz="2000" dirty="0">
-                <a:latin typeface="+mn-lt"/>
-              </a:rPr>
-              <a:t>Functions over all Layer 2 protocols, such as Ethernet, ATM, or Frame </a:t>
-            </a:r>
-            <a:r>
-              <a:rPr lang="en-US" sz="2000" dirty="0" smtClean="0">
-                <a:latin typeface="+mn-lt"/>
-              </a:rPr>
-              <a:t>Relay.</a:t>
-            </a:r>
-            <a:endParaRPr lang="en-US" sz="2000" dirty="0">
-              <a:latin typeface="+mn-lt"/>
-            </a:endParaRPr>
+              <a:t>IPsec acts at the network layer, protecting and authenticating IP packets.</a:t>
+            </a:r>
+          </a:p>
+          <a:p>
+            <a:pPr algn="l"/>
+            <a:endParaRPr lang="en-US" dirty="0"/>
           </a:p>
         </p:txBody>
       </p:sp>
     </p:spTree>
     <p:extLst>
       <p:ext uri="{BB962C8B-B14F-4D97-AF65-F5344CB8AC3E}">
-        <p14:creationId xmlns:p14="http://schemas.microsoft.com/office/powerpoint/2010/main" val="2489740841"/>
+        <p14:creationId xmlns:p14="http://schemas.microsoft.com/office/powerpoint/2010/main" val="1676529245"/>
       </p:ext>
     </p:extLst>
   </p:cSld>
@@ -15297,199 +15309,6 @@
         </p:nvSpPr>
         <p:spPr>
           <a:xfrm>
-            <a:off x="396815" y="432918"/>
-            <a:ext cx="8145462" cy="838200"/>
-          </a:xfrm>
-        </p:spPr>
-        <p:txBody>
-          <a:bodyPr/>
-          <a:lstStyle/>
-          <a:p>
-            <a:pPr eaLnBrk="1" hangingPunct="1"/>
-            <a:r>
-              <a:rPr lang="en-US" sz="1800" dirty="0" smtClean="0">
-                <a:ea typeface="ＭＳ Ｐゴシック" pitchFamily="34" charset="-128"/>
-              </a:rPr>
-              <a:t>Internet Protocol Security</a:t>
-            </a:r>
-            <a:r>
-              <a:rPr lang="en-US" sz="1800" smtClean="0">
-                <a:ea typeface="ＭＳ Ｐゴシック" pitchFamily="34" charset="-128"/>
-              </a:rPr>
-              <a:t/>
-            </a:r>
-            <a:br>
-              <a:rPr lang="en-US" sz="1800" smtClean="0">
-                <a:ea typeface="ＭＳ Ｐゴシック" pitchFamily="34" charset="-128"/>
-              </a:rPr>
-            </a:br>
-            <a:r>
-              <a:rPr lang="en-US" smtClean="0">
-                <a:ea typeface="ＭＳ Ｐゴシック" pitchFamily="34" charset="-128"/>
-              </a:rPr>
-              <a:t>IPsec Characteristics</a:t>
-            </a:r>
-            <a:endParaRPr lang="en-US" dirty="0" smtClean="0">
-              <a:ea typeface="ＭＳ Ｐゴシック" pitchFamily="34" charset="-128"/>
-            </a:endParaRPr>
-          </a:p>
-        </p:txBody>
-      </p:sp>
-      <p:sp>
-        <p:nvSpPr>
-          <p:cNvPr id="3" name="TextBox 2"/>
-          <p:cNvSpPr txBox="1"/>
-          <p:nvPr/>
-        </p:nvSpPr>
-        <p:spPr>
-          <a:xfrm>
-            <a:off x="396815" y="1573113"/>
-            <a:ext cx="8471140" cy="2625334"/>
-          </a:xfrm>
-          <a:prstGeom prst="rect">
-            <a:avLst/>
-          </a:prstGeom>
-          <a:noFill/>
-        </p:spPr>
-        <p:txBody>
-          <a:bodyPr wrap="square" rtlCol="0">
-            <a:spAutoFit/>
-          </a:bodyPr>
-          <a:lstStyle/>
-          <a:p>
-            <a:pPr algn="l"/>
-            <a:r>
-              <a:rPr lang="en-US" sz="2000" dirty="0" smtClean="0"/>
-              <a:t>IPsec </a:t>
-            </a:r>
-            <a:r>
-              <a:rPr lang="en-US" sz="2000" dirty="0"/>
-              <a:t>characteristics can be summarized as follows</a:t>
-            </a:r>
-            <a:r>
-              <a:rPr lang="en-US" sz="2000" dirty="0" smtClean="0"/>
-              <a:t>:</a:t>
-            </a:r>
-            <a:endParaRPr lang="en-US" dirty="0"/>
-          </a:p>
-          <a:p>
-            <a:pPr marL="236538" indent="-236538" algn="l" defTabSz="814388">
-              <a:lnSpc>
-                <a:spcPct val="95000"/>
-              </a:lnSpc>
-              <a:spcBef>
-                <a:spcPct val="50000"/>
-              </a:spcBef>
-              <a:buClr>
-                <a:srgbClr val="708CA1"/>
-              </a:buClr>
-              <a:buFont typeface="Wingdings" pitchFamily="2" charset="2"/>
-              <a:buChar char="§"/>
-            </a:pPr>
-            <a:r>
-              <a:rPr lang="en-US" sz="2000" dirty="0">
-                <a:latin typeface="+mn-lt"/>
-              </a:rPr>
-              <a:t>IPsec is a framework of open standards that is algorithm-independent.</a:t>
-            </a:r>
-          </a:p>
-          <a:p>
-            <a:pPr marL="236538" indent="-236538" algn="l" defTabSz="814388">
-              <a:lnSpc>
-                <a:spcPct val="95000"/>
-              </a:lnSpc>
-              <a:spcBef>
-                <a:spcPct val="50000"/>
-              </a:spcBef>
-              <a:buClr>
-                <a:srgbClr val="708CA1"/>
-              </a:buClr>
-              <a:buFont typeface="Wingdings" pitchFamily="2" charset="2"/>
-              <a:buChar char="§"/>
-            </a:pPr>
-            <a:r>
-              <a:rPr lang="en-US" sz="2000" dirty="0">
-                <a:latin typeface="+mn-lt"/>
-              </a:rPr>
-              <a:t>IPsec provides data confidentiality, data integrity, and origin authentication.</a:t>
-            </a:r>
-          </a:p>
-          <a:p>
-            <a:pPr marL="236538" indent="-236538" algn="l" defTabSz="814388">
-              <a:lnSpc>
-                <a:spcPct val="95000"/>
-              </a:lnSpc>
-              <a:spcBef>
-                <a:spcPct val="50000"/>
-              </a:spcBef>
-              <a:buClr>
-                <a:srgbClr val="708CA1"/>
-              </a:buClr>
-              <a:buFont typeface="Wingdings" pitchFamily="2" charset="2"/>
-              <a:buChar char="§"/>
-            </a:pPr>
-            <a:r>
-              <a:rPr lang="en-US" sz="2000" dirty="0">
-                <a:latin typeface="+mn-lt"/>
-              </a:rPr>
-              <a:t>IPsec acts at the network layer, protecting and authenticating IP packets.</a:t>
-            </a:r>
-          </a:p>
-          <a:p>
-            <a:pPr algn="l"/>
-            <a:endParaRPr lang="en-US" dirty="0"/>
-          </a:p>
-        </p:txBody>
-      </p:sp>
-    </p:spTree>
-    <p:extLst>
-      <p:ext uri="{BB962C8B-B14F-4D97-AF65-F5344CB8AC3E}">
-        <p14:creationId xmlns:p14="http://schemas.microsoft.com/office/powerpoint/2010/main" val="1676529245"/>
-      </p:ext>
-    </p:extLst>
-  </p:cSld>
-  <p:clrMapOvr>
-    <a:masterClrMapping/>
-  </p:clrMapOvr>
-  <p:timing>
-    <p:tnLst>
-      <p:par>
-        <p:cTn id="1" dur="indefinite" restart="never" nodeType="tmRoot"/>
-      </p:par>
-    </p:tnLst>
-  </p:timing>
-</p:sld>
-</file>
-
-<file path=ppt/slides/slide26.xml><?xml version="1.0" encoding="utf-8"?>
-<p:sld xmlns:a="http://schemas.openxmlformats.org/drawingml/2006/main" xmlns:r="http://schemas.openxmlformats.org/officeDocument/2006/relationships" xmlns:p="http://schemas.openxmlformats.org/presentationml/2006/main">
-  <p:cSld>
-    <p:spTree>
-      <p:nvGrpSpPr>
-        <p:cNvPr id="1" name=""/>
-        <p:cNvGrpSpPr/>
-        <p:nvPr/>
-      </p:nvGrpSpPr>
-      <p:grpSpPr>
-        <a:xfrm>
-          <a:off x="0" y="0"/>
-          <a:ext cx="0" cy="0"/>
-          <a:chOff x="0" y="0"/>
-          <a:chExt cx="0" cy="0"/>
-        </a:xfrm>
-      </p:grpSpPr>
-      <p:sp>
-        <p:nvSpPr>
-          <p:cNvPr id="7170" name="Rectangle 2"/>
-          <p:cNvSpPr>
-            <a:spLocks noGrp="1" noChangeArrowheads="1"/>
-          </p:cNvSpPr>
-          <p:nvPr>
-            <p:ph type="title"/>
-          </p:nvPr>
-        </p:nvSpPr>
-        <p:spPr>
-          <a:xfrm>
             <a:off x="480981" y="466267"/>
             <a:ext cx="8145462" cy="838200"/>
           </a:xfrm>
@@ -15731,7 +15550,7 @@
 </p:sld>
 </file>
 
-<file path=ppt/slides/slide27.xml><?xml version="1.0" encoding="utf-8"?>
+<file path=ppt/slides/slide26.xml><?xml version="1.0" encoding="utf-8"?>
 <p:sld xmlns:a="http://schemas.openxmlformats.org/drawingml/2006/main" xmlns:r="http://schemas.openxmlformats.org/officeDocument/2006/relationships" xmlns:p="http://schemas.openxmlformats.org/presentationml/2006/main">
   <p:cSld>
     <p:spTree>
@@ -15973,7 +15792,7 @@
 </p:sld>
 </file>
 
-<file path=ppt/slides/slide28.xml><?xml version="1.0" encoding="utf-8"?>
+<file path=ppt/slides/slide27.xml><?xml version="1.0" encoding="utf-8"?>
 <p:sld xmlns:a="http://schemas.openxmlformats.org/drawingml/2006/main" xmlns:r="http://schemas.openxmlformats.org/officeDocument/2006/relationships" xmlns:p="http://schemas.openxmlformats.org/presentationml/2006/main">
   <p:cSld>
     <p:spTree>
@@ -16189,7 +16008,7 @@
 </p:sld>
 </file>
 
-<file path=ppt/slides/slide29.xml><?xml version="1.0" encoding="utf-8"?>
+<file path=ppt/slides/slide28.xml><?xml version="1.0" encoding="utf-8"?>
 <p:sld xmlns:a="http://schemas.openxmlformats.org/drawingml/2006/main" xmlns:r="http://schemas.openxmlformats.org/officeDocument/2006/relationships" xmlns:p="http://schemas.openxmlformats.org/presentationml/2006/main">
   <p:cSld>
     <p:spTree>
@@ -16439,174 +16258,7 @@
 </p:sld>
 </file>
 
-<file path=ppt/slides/slide3.xml><?xml version="1.0" encoding="utf-8"?>
-<p:sld xmlns:a="http://schemas.openxmlformats.org/drawingml/2006/main" xmlns:r="http://schemas.openxmlformats.org/officeDocument/2006/relationships" xmlns:p="http://schemas.openxmlformats.org/presentationml/2006/main">
-  <p:cSld>
-    <p:spTree>
-      <p:nvGrpSpPr>
-        <p:cNvPr id="1" name=""/>
-        <p:cNvGrpSpPr/>
-        <p:nvPr/>
-      </p:nvGrpSpPr>
-      <p:grpSpPr>
-        <a:xfrm>
-          <a:off x="0" y="0"/>
-          <a:ext cx="0" cy="0"/>
-          <a:chOff x="0" y="0"/>
-          <a:chExt cx="0" cy="0"/>
-        </a:xfrm>
-      </p:grpSpPr>
-      <p:sp>
-        <p:nvSpPr>
-          <p:cNvPr id="6146" name="Rectangle 2"/>
-          <p:cNvSpPr>
-            <a:spLocks noGrp="1" noChangeArrowheads="1"/>
-          </p:cNvSpPr>
-          <p:nvPr>
-            <p:ph type="title"/>
-          </p:nvPr>
-        </p:nvSpPr>
-        <p:spPr>
-          <a:xfrm>
-            <a:off x="434295" y="363085"/>
-            <a:ext cx="8709705" cy="798058"/>
-          </a:xfrm>
-        </p:spPr>
-        <p:txBody>
-          <a:bodyPr/>
-          <a:lstStyle/>
-          <a:p>
-            <a:pPr eaLnBrk="1" hangingPunct="1"/>
-            <a:r>
-              <a:rPr lang="en-US" sz="2800" dirty="0" smtClean="0">
-                <a:ea typeface="ＭＳ Ｐゴシック" pitchFamily="34" charset="-128"/>
-              </a:rPr>
-              <a:t>Chapter 7: Securing Site-to-Site Connectivity</a:t>
-            </a:r>
-          </a:p>
-        </p:txBody>
-      </p:sp>
-      <p:sp>
-        <p:nvSpPr>
-          <p:cNvPr id="6147" name="Rectangle 3"/>
-          <p:cNvSpPr>
-            <a:spLocks noGrp="1" noChangeArrowheads="1"/>
-          </p:cNvSpPr>
-          <p:nvPr>
-            <p:ph idx="1"/>
-          </p:nvPr>
-        </p:nvSpPr>
-        <p:spPr>
-          <a:xfrm>
-            <a:off x="566057" y="1349829"/>
-            <a:ext cx="8312831" cy="4689021"/>
-          </a:xfrm>
-        </p:spPr>
-        <p:txBody>
-          <a:bodyPr/>
-          <a:lstStyle/>
-          <a:p>
-            <a:pPr marL="0" indent="0" eaLnBrk="1" hangingPunct="1">
-              <a:buFont typeface="Wingdings" pitchFamily="2" charset="2"/>
-              <a:buNone/>
-            </a:pPr>
-            <a:r>
-              <a:rPr lang="en-US" sz="2000" dirty="0">
-                <a:cs typeface="Arial" charset="0"/>
-              </a:rPr>
-              <a:t>7</a:t>
-            </a:r>
-            <a:r>
-              <a:rPr lang="en-US" sz="2000" dirty="0" smtClean="0">
-                <a:cs typeface="Arial" charset="0"/>
-              </a:rPr>
-              <a:t>.1 VPNs</a:t>
-            </a:r>
-          </a:p>
-          <a:p>
-            <a:pPr marL="0" indent="0" eaLnBrk="1" hangingPunct="1">
-              <a:buFont typeface="Wingdings" pitchFamily="2" charset="2"/>
-              <a:buNone/>
-            </a:pPr>
-            <a:r>
-              <a:rPr lang="en-US" sz="2000" dirty="0">
-                <a:cs typeface="Arial" charset="0"/>
-              </a:rPr>
-              <a:t>7</a:t>
-            </a:r>
-            <a:r>
-              <a:rPr lang="en-US" sz="2000" dirty="0" smtClean="0">
-                <a:cs typeface="Arial" charset="0"/>
-              </a:rPr>
-              <a:t>.2 Site-to-Site GRE Tunnels</a:t>
-            </a:r>
-          </a:p>
-          <a:p>
-            <a:pPr marL="0" indent="0" eaLnBrk="1" hangingPunct="1">
-              <a:buFont typeface="Wingdings" pitchFamily="2" charset="2"/>
-              <a:buNone/>
-            </a:pPr>
-            <a:r>
-              <a:rPr lang="en-US" sz="2000" dirty="0">
-                <a:cs typeface="Arial" charset="0"/>
-              </a:rPr>
-              <a:t>7</a:t>
-            </a:r>
-            <a:r>
-              <a:rPr lang="en-US" sz="2000" dirty="0" smtClean="0">
-                <a:cs typeface="Arial" charset="0"/>
-              </a:rPr>
-              <a:t>.3 Introducing IPsec</a:t>
-            </a:r>
-          </a:p>
-          <a:p>
-            <a:pPr marL="0" indent="0" eaLnBrk="1" hangingPunct="1">
-              <a:buFont typeface="Wingdings" pitchFamily="2" charset="2"/>
-              <a:buNone/>
-            </a:pPr>
-            <a:r>
-              <a:rPr lang="en-US" sz="2000" dirty="0">
-                <a:cs typeface="Arial" charset="0"/>
-              </a:rPr>
-              <a:t>7</a:t>
-            </a:r>
-            <a:r>
-              <a:rPr lang="en-US" sz="2000" dirty="0" smtClean="0">
-                <a:cs typeface="Arial" charset="0"/>
-              </a:rPr>
-              <a:t>.4 Remote Access</a:t>
-            </a:r>
-          </a:p>
-          <a:p>
-            <a:pPr marL="0" indent="0" eaLnBrk="1" hangingPunct="1">
-              <a:buFont typeface="Wingdings" pitchFamily="2" charset="2"/>
-              <a:buNone/>
-            </a:pPr>
-            <a:r>
-              <a:rPr lang="en-US" sz="2000" dirty="0" smtClean="0">
-                <a:cs typeface="Arial" charset="0"/>
-              </a:rPr>
-              <a:t>7.5 Summary</a:t>
-            </a:r>
-          </a:p>
-        </p:txBody>
-      </p:sp>
-    </p:spTree>
-  </p:cSld>
-  <p:clrMapOvr>
-    <a:masterClrMapping/>
-  </p:clrMapOvr>
-  <p:timing>
-    <p:tnLst>
-      <p:par>
-        <p:cTn id="1" dur="indefinite" restart="never" nodeType="tmRoot"/>
-      </p:par>
-    </p:tnLst>
-  </p:timing>
-</p:sld>
-</file>
-
-<file path=ppt/slides/slide30.xml><?xml version="1.0" encoding="utf-8"?>
+<file path=ppt/slides/slide29.xml><?xml version="1.0" encoding="utf-8"?>
 <p:sld xmlns:a="http://schemas.openxmlformats.org/drawingml/2006/main" xmlns:r="http://schemas.openxmlformats.org/officeDocument/2006/relationships" xmlns:p="http://schemas.openxmlformats.org/presentationml/2006/main">
   <p:cSld>
     <p:spTree>
@@ -16935,7 +16587,168 @@
 </p:sld>
 </file>
 
-<file path=ppt/slides/slide31.xml><?xml version="1.0" encoding="utf-8"?>
+<file path=ppt/slides/slide3.xml><?xml version="1.0" encoding="utf-8"?>
+<p:sld xmlns:a="http://schemas.openxmlformats.org/drawingml/2006/main" xmlns:r="http://schemas.openxmlformats.org/officeDocument/2006/relationships" xmlns:p="http://schemas.openxmlformats.org/presentationml/2006/main">
+  <p:cSld>
+    <p:spTree>
+      <p:nvGrpSpPr>
+        <p:cNvPr id="1" name=""/>
+        <p:cNvGrpSpPr/>
+        <p:nvPr/>
+      </p:nvGrpSpPr>
+      <p:grpSpPr>
+        <a:xfrm>
+          <a:off x="0" y="0"/>
+          <a:ext cx="0" cy="0"/>
+          <a:chOff x="0" y="0"/>
+          <a:chExt cx="0" cy="0"/>
+        </a:xfrm>
+      </p:grpSpPr>
+      <p:sp>
+        <p:nvSpPr>
+          <p:cNvPr id="7170" name="Rectangle 2"/>
+          <p:cNvSpPr>
+            <a:spLocks noGrp="1" noChangeArrowheads="1"/>
+          </p:cNvSpPr>
+          <p:nvPr>
+            <p:ph type="title"/>
+          </p:nvPr>
+        </p:nvSpPr>
+        <p:spPr>
+          <a:xfrm>
+            <a:off x="419781" y="406401"/>
+            <a:ext cx="8145462" cy="827314"/>
+          </a:xfrm>
+        </p:spPr>
+        <p:txBody>
+          <a:bodyPr/>
+          <a:lstStyle/>
+          <a:p>
+            <a:pPr eaLnBrk="1" hangingPunct="1"/>
+            <a:r>
+              <a:rPr lang="en-US" dirty="0" smtClean="0">
+                <a:ea typeface="ＭＳ Ｐゴシック" pitchFamily="34" charset="-128"/>
+              </a:rPr>
+              <a:t>Chapter </a:t>
+            </a:r>
+            <a:r>
+              <a:rPr lang="en-US" dirty="0">
+                <a:ea typeface="ＭＳ Ｐゴシック" pitchFamily="34" charset="-128"/>
+              </a:rPr>
+              <a:t>7</a:t>
+            </a:r>
+            <a:r>
+              <a:rPr lang="en-US" dirty="0" smtClean="0">
+                <a:ea typeface="ＭＳ Ｐゴシック" pitchFamily="34" charset="-128"/>
+              </a:rPr>
+              <a:t>: Objectives</a:t>
+            </a:r>
+          </a:p>
+        </p:txBody>
+      </p:sp>
+      <p:sp>
+        <p:nvSpPr>
+          <p:cNvPr id="3" name="Content Placeholder 2"/>
+          <p:cNvSpPr>
+            <a:spLocks noGrp="1"/>
+          </p:cNvSpPr>
+          <p:nvPr>
+            <p:ph idx="1"/>
+          </p:nvPr>
+        </p:nvSpPr>
+        <p:spPr>
+          <a:xfrm>
+            <a:off x="466953" y="1492024"/>
+            <a:ext cx="7994876" cy="4633005"/>
+          </a:xfrm>
+        </p:spPr>
+        <p:txBody>
+          <a:bodyPr/>
+          <a:lstStyle/>
+          <a:p>
+            <a:pPr marL="0" indent="0">
+              <a:buNone/>
+            </a:pPr>
+            <a:r>
+              <a:rPr lang="en-US" sz="2000" dirty="0" smtClean="0"/>
+              <a:t>After completing this chapter, students will be able to:</a:t>
+            </a:r>
+          </a:p>
+          <a:p>
+            <a:r>
+              <a:rPr lang="en-US" sz="2000" dirty="0" smtClean="0"/>
+              <a:t>Describe benefits of VPN technology.</a:t>
+            </a:r>
+          </a:p>
+          <a:p>
+            <a:r>
+              <a:rPr lang="en-US" sz="2000" dirty="0" smtClean="0"/>
+              <a:t>Describe site-to-site and remote access VPNs.</a:t>
+            </a:r>
+          </a:p>
+          <a:p>
+            <a:r>
+              <a:rPr lang="en-US" sz="2000" dirty="0" smtClean="0"/>
+              <a:t>Describe the purpose and benefits of GRE tunnels.</a:t>
+            </a:r>
+          </a:p>
+          <a:p>
+            <a:r>
+              <a:rPr lang="en-US" sz="2000" dirty="0" smtClean="0"/>
+              <a:t>Configure a site-to-site GRE tunnel.</a:t>
+            </a:r>
+          </a:p>
+          <a:p>
+            <a:r>
+              <a:rPr lang="en-US" sz="2000" dirty="0" smtClean="0"/>
+              <a:t>Describe the characteristics of IPsec.</a:t>
+            </a:r>
+          </a:p>
+          <a:p>
+            <a:r>
+              <a:rPr lang="en-US" sz="2000" dirty="0" smtClean="0"/>
+              <a:t>Explain how IPsec is implemented using the IPsec protocol framework.</a:t>
+            </a:r>
+          </a:p>
+          <a:p>
+            <a:r>
+              <a:rPr lang="en-US" sz="2000" dirty="0" smtClean="0"/>
+              <a:t>Explain how the </a:t>
+            </a:r>
+            <a:r>
+              <a:rPr lang="en-US" sz="2000" dirty="0" err="1" smtClean="0"/>
+              <a:t>Anyconnect</a:t>
+            </a:r>
+            <a:r>
+              <a:rPr lang="en-US" sz="2000" dirty="0" smtClean="0"/>
+              <a:t> client and clientless SSL remote access VPN implementations support business requirements.</a:t>
+            </a:r>
+          </a:p>
+          <a:p>
+            <a:r>
+              <a:rPr lang="en-US" sz="2000" dirty="0" smtClean="0"/>
+              <a:t>Compare IPsec and SSL remote access VPNs.</a:t>
+            </a:r>
+            <a:endParaRPr lang="en-US" sz="2000" dirty="0"/>
+          </a:p>
+        </p:txBody>
+      </p:sp>
+    </p:spTree>
+  </p:cSld>
+  <p:clrMapOvr>
+    <a:masterClrMapping/>
+  </p:clrMapOvr>
+  <p:timing>
+    <p:tnLst>
+      <p:par>
+        <p:cTn id="1" dur="indefinite" restart="never" nodeType="tmRoot"/>
+      </p:par>
+    </p:tnLst>
+  </p:timing>
+</p:sld>
+</file>
+
+<file path=ppt/slides/slide30.xml><?xml version="1.0" encoding="utf-8"?>
 <p:sld xmlns:a="http://schemas.openxmlformats.org/drawingml/2006/main" xmlns:r="http://schemas.openxmlformats.org/officeDocument/2006/relationships" xmlns:p="http://schemas.openxmlformats.org/presentationml/2006/main">
   <p:cSld>
     <p:spTree>
@@ -17263,7 +17076,7 @@
 </p:sld>
 </file>
 
-<file path=ppt/slides/slide32.xml><?xml version="1.0" encoding="utf-8"?>
+<file path=ppt/slides/slide31.xml><?xml version="1.0" encoding="utf-8"?>
 <p:sld xmlns:a="http://schemas.openxmlformats.org/drawingml/2006/main" xmlns:r="http://schemas.openxmlformats.org/officeDocument/2006/relationships" xmlns:p="http://schemas.openxmlformats.org/presentationml/2006/main">
   <p:cSld>
     <p:spTree>
@@ -17390,7 +17203,7 @@
 </p:sld>
 </file>
 
-<file path=ppt/slides/slide33.xml><?xml version="1.0" encoding="utf-8"?>
+<file path=ppt/slides/slide32.xml><?xml version="1.0" encoding="utf-8"?>
 <p:sld xmlns:a="http://schemas.openxmlformats.org/drawingml/2006/main" xmlns:r="http://schemas.openxmlformats.org/officeDocument/2006/relationships" xmlns:p="http://schemas.openxmlformats.org/presentationml/2006/main">
   <p:cSld>
     <p:spTree>
@@ -17562,7 +17375,7 @@
 </p:sld>
 </file>
 
-<file path=ppt/slides/slide34.xml><?xml version="1.0" encoding="utf-8"?>
+<file path=ppt/slides/slide33.xml><?xml version="1.0" encoding="utf-8"?>
 <p:sld xmlns:a="http://schemas.openxmlformats.org/drawingml/2006/main" xmlns:r="http://schemas.openxmlformats.org/officeDocument/2006/relationships" xmlns:p="http://schemas.openxmlformats.org/presentationml/2006/main">
   <p:cSld>
     <p:spTree>
@@ -17689,7 +17502,7 @@
 </p:sld>
 </file>
 
-<file path=ppt/slides/slide35.xml><?xml version="1.0" encoding="utf-8"?>
+<file path=ppt/slides/slide34.xml><?xml version="1.0" encoding="utf-8"?>
 <p:sld xmlns:a="http://schemas.openxmlformats.org/drawingml/2006/main" xmlns:r="http://schemas.openxmlformats.org/officeDocument/2006/relationships" xmlns:p="http://schemas.openxmlformats.org/presentationml/2006/main">
   <p:cSld>
     <p:spTree>
@@ -18017,7 +17830,7 @@
 </p:sld>
 </file>
 
-<file path=ppt/slides/slide36.xml><?xml version="1.0" encoding="utf-8"?>
+<file path=ppt/slides/slide35.xml><?xml version="1.0" encoding="utf-8"?>
 <p:sld xmlns:a="http://schemas.openxmlformats.org/drawingml/2006/main" xmlns:r="http://schemas.openxmlformats.org/officeDocument/2006/relationships" xmlns:p="http://schemas.openxmlformats.org/presentationml/2006/main">
   <p:cSld>
     <p:spTree>
@@ -18178,7 +17991,7 @@
 </p:sld>
 </file>
 
-<file path=ppt/slides/slide37.xml><?xml version="1.0" encoding="utf-8"?>
+<file path=ppt/slides/slide36.xml><?xml version="1.0" encoding="utf-8"?>
 <p:sld xmlns:a="http://schemas.openxmlformats.org/drawingml/2006/main" xmlns:r="http://schemas.openxmlformats.org/officeDocument/2006/relationships" xmlns:p="http://schemas.openxmlformats.org/presentationml/2006/main">
   <p:cSld>
     <p:spTree>
@@ -18387,6 +18200,259 @@
 </p:sld>
 </file>
 
+<file path=ppt/slides/slide37.xml><?xml version="1.0" encoding="utf-8"?>
+<p:sld xmlns:a="http://schemas.openxmlformats.org/drawingml/2006/main" xmlns:r="http://schemas.openxmlformats.org/officeDocument/2006/relationships" xmlns:p="http://schemas.openxmlformats.org/presentationml/2006/main">
+  <p:cSld>
+    <p:spTree>
+      <p:nvGrpSpPr>
+        <p:cNvPr id="1" name=""/>
+        <p:cNvGrpSpPr/>
+        <p:nvPr/>
+      </p:nvGrpSpPr>
+      <p:grpSpPr>
+        <a:xfrm>
+          <a:off x="0" y="0"/>
+          <a:ext cx="0" cy="0"/>
+          <a:chOff x="0" y="0"/>
+          <a:chExt cx="0" cy="0"/>
+        </a:xfrm>
+      </p:grpSpPr>
+      <p:sp>
+        <p:nvSpPr>
+          <p:cNvPr id="7170" name="Rectangle 2"/>
+          <p:cNvSpPr>
+            <a:spLocks noGrp="1" noChangeArrowheads="1"/>
+          </p:cNvSpPr>
+          <p:nvPr>
+            <p:ph type="title"/>
+          </p:nvPr>
+        </p:nvSpPr>
+        <p:spPr>
+          <a:xfrm>
+            <a:off x="280937" y="374861"/>
+            <a:ext cx="8145462" cy="838200"/>
+          </a:xfrm>
+        </p:spPr>
+        <p:txBody>
+          <a:bodyPr/>
+          <a:lstStyle/>
+          <a:p>
+            <a:pPr eaLnBrk="1" hangingPunct="1"/>
+            <a:r>
+              <a:rPr lang="en-US" sz="1800" dirty="0" smtClean="0">
+                <a:ea typeface="ＭＳ Ｐゴシック" pitchFamily="34" charset="-128"/>
+              </a:rPr>
+              <a:t>IPsec Framework</a:t>
+            </a:r>
+            <a:br>
+              <a:rPr lang="en-US" sz="1800" dirty="0" smtClean="0">
+                <a:ea typeface="ＭＳ Ｐゴシック" pitchFamily="34" charset="-128"/>
+              </a:rPr>
+            </a:br>
+            <a:r>
+              <a:rPr lang="en-US" dirty="0" smtClean="0">
+                <a:ea typeface="ＭＳ Ｐゴシック" pitchFamily="34" charset="-128"/>
+              </a:rPr>
+              <a:t>IPsec Authentication (cont.)</a:t>
+            </a:r>
+          </a:p>
+        </p:txBody>
+      </p:sp>
+      <p:sp>
+        <p:nvSpPr>
+          <p:cNvPr id="2" name="Rectangle 1"/>
+          <p:cNvSpPr/>
+          <p:nvPr/>
+        </p:nvSpPr>
+        <p:spPr>
+          <a:xfrm>
+            <a:off x="327379" y="1335569"/>
+            <a:ext cx="8395707" cy="2739211"/>
+          </a:xfrm>
+          <a:prstGeom prst="rect">
+            <a:avLst/>
+          </a:prstGeom>
+        </p:spPr>
+        <p:txBody>
+          <a:bodyPr wrap="square">
+            <a:spAutoFit/>
+          </a:bodyPr>
+          <a:lstStyle/>
+          <a:p>
+            <a:pPr algn="l"/>
+            <a:r>
+              <a:rPr lang="en-US" sz="2000" dirty="0" smtClean="0">
+                <a:latin typeface="+mn-lt"/>
+              </a:rPr>
+              <a:t>There </a:t>
+            </a:r>
+            <a:r>
+              <a:rPr lang="en-US" sz="2000" dirty="0">
+                <a:latin typeface="+mn-lt"/>
+              </a:rPr>
+              <a:t>are two peer authentication </a:t>
+            </a:r>
+            <a:r>
+              <a:rPr lang="en-US" sz="2000" dirty="0" smtClean="0">
+                <a:latin typeface="+mn-lt"/>
+              </a:rPr>
+              <a:t>methods, PSK and RSA signatures:</a:t>
+            </a:r>
+            <a:endParaRPr lang="en-US" sz="2000" dirty="0">
+              <a:latin typeface="+mn-lt"/>
+            </a:endParaRPr>
+          </a:p>
+          <a:p>
+            <a:pPr marL="236538" indent="-236538" algn="l" defTabSz="814388">
+              <a:lnSpc>
+                <a:spcPct val="95000"/>
+              </a:lnSpc>
+              <a:spcBef>
+                <a:spcPct val="50000"/>
+              </a:spcBef>
+              <a:buClr>
+                <a:srgbClr val="708CA1"/>
+              </a:buClr>
+              <a:buFont typeface="Wingdings" pitchFamily="2" charset="2"/>
+              <a:buChar char="§"/>
+            </a:pPr>
+            <a:r>
+              <a:rPr lang="en-US" sz="2000" b="1" dirty="0">
+                <a:latin typeface="+mn-lt"/>
+              </a:rPr>
+              <a:t>PSK</a:t>
+            </a:r>
+            <a:r>
+              <a:rPr lang="en-US" sz="2000" dirty="0">
+                <a:latin typeface="+mn-lt"/>
+              </a:rPr>
+              <a:t> </a:t>
+            </a:r>
+          </a:p>
+          <a:p>
+            <a:pPr marL="693738" lvl="2" indent="-236538" algn="l" defTabSz="814388">
+              <a:lnSpc>
+                <a:spcPct val="95000"/>
+              </a:lnSpc>
+              <a:spcBef>
+                <a:spcPct val="50000"/>
+              </a:spcBef>
+              <a:buClr>
+                <a:srgbClr val="708CA1"/>
+              </a:buClr>
+              <a:buFont typeface="Wingdings" pitchFamily="2" charset="2"/>
+              <a:buChar char="§"/>
+            </a:pPr>
+            <a:r>
+              <a:rPr lang="en-US" sz="2000" dirty="0">
+                <a:latin typeface="+mn-lt"/>
+              </a:rPr>
+              <a:t>A secret key </a:t>
+            </a:r>
+            <a:r>
+              <a:rPr lang="en-US" sz="2000" dirty="0" smtClean="0">
+                <a:latin typeface="+mn-lt"/>
+              </a:rPr>
+              <a:t>shared </a:t>
+            </a:r>
+            <a:r>
+              <a:rPr lang="en-US" sz="2000" dirty="0">
+                <a:latin typeface="+mn-lt"/>
+              </a:rPr>
+              <a:t>between the two parties using a secure channel before it needs to be </a:t>
+            </a:r>
+            <a:r>
+              <a:rPr lang="en-US" sz="2000" dirty="0" smtClean="0">
+                <a:latin typeface="+mn-lt"/>
+              </a:rPr>
+              <a:t>used.</a:t>
+            </a:r>
+            <a:endParaRPr lang="en-US" sz="2000" dirty="0">
+              <a:latin typeface="+mn-lt"/>
+            </a:endParaRPr>
+          </a:p>
+          <a:p>
+            <a:pPr marL="693738" lvl="2" indent="-236538" algn="l" defTabSz="814388">
+              <a:lnSpc>
+                <a:spcPct val="95000"/>
+              </a:lnSpc>
+              <a:spcBef>
+                <a:spcPct val="50000"/>
+              </a:spcBef>
+              <a:buClr>
+                <a:srgbClr val="708CA1"/>
+              </a:buClr>
+              <a:buFont typeface="Wingdings" pitchFamily="2" charset="2"/>
+              <a:buChar char="§"/>
+            </a:pPr>
+            <a:r>
+              <a:rPr lang="en-US" sz="2000" dirty="0">
+                <a:latin typeface="+mn-lt"/>
+              </a:rPr>
+              <a:t>Use symmetric key cryptographic </a:t>
+            </a:r>
+            <a:r>
+              <a:rPr lang="en-US" sz="2000" dirty="0" smtClean="0">
+                <a:latin typeface="+mn-lt"/>
+              </a:rPr>
+              <a:t>algorithms.</a:t>
+            </a:r>
+            <a:endParaRPr lang="en-US" sz="2000" dirty="0">
+              <a:latin typeface="+mn-lt"/>
+            </a:endParaRPr>
+          </a:p>
+          <a:p>
+            <a:pPr marL="693738" lvl="2" indent="-236538" algn="l" defTabSz="814388">
+              <a:lnSpc>
+                <a:spcPct val="95000"/>
+              </a:lnSpc>
+              <a:spcBef>
+                <a:spcPct val="50000"/>
+              </a:spcBef>
+              <a:buClr>
+                <a:srgbClr val="708CA1"/>
+              </a:buClr>
+              <a:buFont typeface="Wingdings" pitchFamily="2" charset="2"/>
+              <a:buChar char="§"/>
+            </a:pPr>
+            <a:r>
+              <a:rPr lang="en-US" sz="2000" dirty="0">
+                <a:latin typeface="+mn-lt"/>
+              </a:rPr>
+              <a:t>A PSK is entered into each peer manually and is used to authenticate the </a:t>
+            </a:r>
+            <a:r>
+              <a:rPr lang="en-US" sz="2000" dirty="0" smtClean="0">
+                <a:latin typeface="+mn-lt"/>
+              </a:rPr>
+              <a:t>peer.</a:t>
+            </a:r>
+            <a:endParaRPr lang="en-US" sz="2000" dirty="0">
+              <a:latin typeface="+mn-lt"/>
+            </a:endParaRPr>
+          </a:p>
+        </p:txBody>
+      </p:sp>
+    </p:spTree>
+    <p:extLst>
+      <p:ext uri="{BB962C8B-B14F-4D97-AF65-F5344CB8AC3E}">
+        <p14:creationId xmlns:p14="http://schemas.microsoft.com/office/powerpoint/2010/main" val="121409177"/>
+      </p:ext>
+    </p:extLst>
+  </p:cSld>
+  <p:clrMapOvr>
+    <a:masterClrMapping/>
+  </p:clrMapOvr>
+  <p:timing>
+    <p:tnLst>
+      <p:par>
+        <p:cTn id="1" dur="indefinite" restart="never" nodeType="tmRoot"/>
+      </p:par>
+    </p:tnLst>
+  </p:timing>
+</p:sld>
+</file>
+
 <file path=ppt/slides/slide38.xml><?xml version="1.0" encoding="utf-8"?>
 <p:sld xmlns:a="http://schemas.openxmlformats.org/drawingml/2006/main" xmlns:r="http://schemas.openxmlformats.org/officeDocument/2006/relationships" xmlns:p="http://schemas.openxmlformats.org/presentationml/2006/main">
   <p:cSld>
@@ -18416,7 +18482,7 @@
         </p:nvSpPr>
         <p:spPr>
           <a:xfrm>
-            <a:off x="280937" y="374861"/>
+            <a:off x="327379" y="468213"/>
             <a:ext cx="8145462" cy="838200"/>
           </a:xfrm>
         </p:spPr>
@@ -18453,8 +18519,8 @@
         </p:nvSpPr>
         <p:spPr>
           <a:xfrm>
-            <a:off x="327379" y="1335569"/>
-            <a:ext cx="8395707" cy="2739211"/>
+            <a:off x="327379" y="1408011"/>
+            <a:ext cx="8337650" cy="3493264"/>
           </a:xfrm>
           <a:prstGeom prst="rect">
             <a:avLst/>
@@ -18465,30 +18531,6 @@
             <a:spAutoFit/>
           </a:bodyPr>
           <a:lstStyle/>
-          <a:p>
-            <a:pPr algn="l"/>
-            <a:r>
-              <a:rPr lang="en-US" sz="2000" dirty="0" smtClean="0">
-                <a:latin typeface="+mn-lt"/>
-              </a:rPr>
-              <a:t>There </a:t>
-            </a:r>
-            <a:r>
-              <a:rPr lang="en-US" sz="2000" dirty="0">
-                <a:latin typeface="+mn-lt"/>
-              </a:rPr>
-              <a:t>are two peer authentication </a:t>
-            </a:r>
-            <a:r>
-              <a:rPr lang="en-US" sz="2000" dirty="0" smtClean="0">
-                <a:latin typeface="+mn-lt"/>
-              </a:rPr>
-              <a:t>methods, PSK and RSA signatures:</a:t>
-            </a:r>
-            <a:endParaRPr lang="en-US" sz="2000" dirty="0">
-              <a:latin typeface="+mn-lt"/>
-            </a:endParaRPr>
-          </a:p>
           <a:p>
             <a:pPr marL="236538" indent="-236538" algn="l" defTabSz="814388">
               <a:lnSpc>
@@ -18504,10 +18546,16 @@
               <a:buChar char="§"/>
             </a:pPr>
             <a:r>
+              <a:rPr lang="en-US" sz="2000" b="1" dirty="0" smtClean="0">
+                <a:latin typeface="+mn-lt"/>
+              </a:rPr>
+              <a:t>RSA </a:t>
+            </a:r>
+            <a:r>
               <a:rPr lang="en-US" sz="2000" b="1" dirty="0">
                 <a:latin typeface="+mn-lt"/>
               </a:rPr>
-              <a:t>PSK</a:t>
+              <a:t>signatures</a:t>
             </a:r>
             <a:r>
               <a:rPr lang="en-US" sz="2000" dirty="0">
@@ -18534,25 +18582,13 @@
               <a:rPr lang="en-US" sz="2000" dirty="0">
                 <a:latin typeface="+mn-lt"/>
               </a:rPr>
-              <a:t>A secret key </a:t>
+              <a:t>Digital certificates are exchanged to authenticate </a:t>
             </a:r>
             <a:r>
               <a:rPr lang="en-US" sz="2000" dirty="0" smtClean="0">
                 <a:latin typeface="+mn-lt"/>
               </a:rPr>
-              <a:t>shared </a:t>
-            </a:r>
-            <a:r>
-              <a:rPr lang="en-US" sz="2000" dirty="0">
-                <a:latin typeface="+mn-lt"/>
-              </a:rPr>
-              <a:t>between the two parties using a secure channel before it needs to be </a:t>
-            </a:r>
-            <a:r>
-              <a:rPr lang="en-US" sz="2000" dirty="0" smtClean="0">
-                <a:latin typeface="+mn-lt"/>
-              </a:rPr>
-              <a:t>used.</a:t>
+              <a:t>peers.</a:t>
             </a:r>
             <a:endParaRPr lang="en-US" sz="2000" dirty="0">
               <a:latin typeface="+mn-lt"/>
@@ -18576,13 +18612,25 @@
               <a:rPr lang="en-US" sz="2000" dirty="0">
                 <a:latin typeface="+mn-lt"/>
               </a:rPr>
-              <a:t>Use symmetric key cryptographic </a:t>
+              <a:t>Local device derives a hash </a:t>
             </a:r>
             <a:r>
               <a:rPr lang="en-US" sz="2000" dirty="0" smtClean="0">
                 <a:latin typeface="+mn-lt"/>
               </a:rPr>
-              <a:t>algorithms.</a:t>
+              <a:t>and </a:t>
+            </a:r>
+            <a:r>
+              <a:rPr lang="en-US" sz="2000" dirty="0">
+                <a:latin typeface="+mn-lt"/>
+              </a:rPr>
+              <a:t>encrypts it with its private </a:t>
+            </a:r>
+            <a:r>
+              <a:rPr lang="en-US" sz="2000" dirty="0" smtClean="0">
+                <a:latin typeface="+mn-lt"/>
+              </a:rPr>
+              <a:t>key.</a:t>
             </a:r>
             <a:endParaRPr lang="en-US" sz="2000" dirty="0">
               <a:latin typeface="+mn-lt"/>
@@ -18606,24 +18654,75 @@
               <a:rPr lang="en-US" sz="2000" dirty="0">
                 <a:latin typeface="+mn-lt"/>
               </a:rPr>
-              <a:t>A PSK is entered into each peer manually and is used to authenticate the </a:t>
+              <a:t>Encrypted hash, or digital signature, is attached to the message and forwarded to the remote </a:t>
             </a:r>
             <a:r>
               <a:rPr lang="en-US" sz="2000" dirty="0" smtClean="0">
                 <a:latin typeface="+mn-lt"/>
               </a:rPr>
-              <a:t>peer.</a:t>
+              <a:t>end.</a:t>
             </a:r>
             <a:endParaRPr lang="en-US" sz="2000" dirty="0">
               <a:latin typeface="+mn-lt"/>
             </a:endParaRPr>
           </a:p>
+          <a:p>
+            <a:pPr marL="693738" lvl="2" indent="-236538" algn="l" defTabSz="814388">
+              <a:lnSpc>
+                <a:spcPct val="95000"/>
+              </a:lnSpc>
+              <a:spcBef>
+                <a:spcPct val="50000"/>
+              </a:spcBef>
+              <a:buClr>
+                <a:srgbClr val="708CA1"/>
+              </a:buClr>
+              <a:buFont typeface="Wingdings" pitchFamily="2" charset="2"/>
+              <a:buChar char="§"/>
+            </a:pPr>
+            <a:r>
+              <a:rPr lang="en-US" sz="2000" dirty="0">
+                <a:latin typeface="+mn-lt"/>
+              </a:rPr>
+              <a:t>At the remote end, the encrypted hash is decrypted using the public key of the local </a:t>
+            </a:r>
+            <a:r>
+              <a:rPr lang="en-US" sz="2000" dirty="0" smtClean="0">
+                <a:latin typeface="+mn-lt"/>
+              </a:rPr>
+              <a:t>end.</a:t>
+            </a:r>
+            <a:endParaRPr lang="en-US" sz="2000" dirty="0">
+              <a:latin typeface="+mn-lt"/>
+            </a:endParaRPr>
+          </a:p>
+          <a:p>
+            <a:pPr marL="693738" lvl="2" indent="-236538" algn="l" defTabSz="814388">
+              <a:lnSpc>
+                <a:spcPct val="95000"/>
+              </a:lnSpc>
+              <a:spcBef>
+                <a:spcPct val="50000"/>
+              </a:spcBef>
+              <a:buClr>
+                <a:srgbClr val="708CA1"/>
+              </a:buClr>
+              <a:buFont typeface="Wingdings" pitchFamily="2" charset="2"/>
+              <a:buChar char="§"/>
+            </a:pPr>
+            <a:r>
+              <a:rPr lang="en-US" sz="2000" dirty="0">
+                <a:latin typeface="+mn-lt"/>
+              </a:rPr>
+              <a:t>If the decrypted hash matches the recomputed hash, the signature is genuine.</a:t>
+            </a:r>
+          </a:p>
         </p:txBody>
       </p:sp>
     </p:spTree>
     <p:extLst>
       <p:ext uri="{BB962C8B-B14F-4D97-AF65-F5344CB8AC3E}">
-        <p14:creationId xmlns:p14="http://schemas.microsoft.com/office/powerpoint/2010/main" val="121409177"/>
+        <p14:creationId xmlns:p14="http://schemas.microsoft.com/office/powerpoint/2010/main" val="3553001475"/>
       </p:ext>
     </p:extLst>
   </p:cSld>
@@ -18669,7 +18768,7 @@
         </p:nvSpPr>
         <p:spPr>
           <a:xfrm>
-            <a:off x="327379" y="468213"/>
+            <a:off x="342900" y="432919"/>
             <a:ext cx="8145462" cy="838200"/>
           </a:xfrm>
         </p:spPr>
@@ -18693,21 +18792,21 @@
               <a:rPr lang="en-US" dirty="0" smtClean="0">
                 <a:ea typeface="ＭＳ Ｐゴシック" pitchFamily="34" charset="-128"/>
               </a:rPr>
-              <a:t>IPsec Authentication (cont.)</a:t>
-            </a:r>
-          </a:p>
-        </p:txBody>
-      </p:sp>
-      <p:sp>
-        <p:nvSpPr>
-          <p:cNvPr id="2" name="Rectangle 1"/>
+              <a:t>IPsec Protocol Framework</a:t>
+            </a:r>
+          </a:p>
+        </p:txBody>
+      </p:sp>
+      <p:sp>
+        <p:nvSpPr>
+          <p:cNvPr id="3" name="Rectangle 2"/>
           <p:cNvSpPr/>
           <p:nvPr/>
         </p:nvSpPr>
         <p:spPr>
           <a:xfrm>
-            <a:off x="327379" y="1408011"/>
-            <a:ext cx="8337650" cy="3493264"/>
+            <a:off x="342900" y="1380860"/>
+            <a:ext cx="8389620" cy="4770537"/>
           </a:xfrm>
           <a:prstGeom prst="rect">
             <a:avLst/>
@@ -18718,6 +18817,18 @@
             <a:spAutoFit/>
           </a:bodyPr>
           <a:lstStyle/>
+          <a:p>
+            <a:pPr algn="l"/>
+            <a:r>
+              <a:rPr lang="en-US" sz="2000" b="1" dirty="0" smtClean="0"/>
+              <a:t>Authentication </a:t>
+            </a:r>
+            <a:r>
+              <a:rPr lang="en-US" sz="2000" b="1" dirty="0"/>
+              <a:t>Header (AH) </a:t>
+            </a:r>
+            <a:endParaRPr lang="en-US" sz="2000" dirty="0"/>
+          </a:p>
           <a:p>
             <a:pPr marL="236538" indent="-236538" algn="l" defTabSz="814388">
               <a:lnSpc>
@@ -18733,26 +18844,23 @@
               <a:buChar char="§"/>
             </a:pPr>
             <a:r>
-              <a:rPr lang="en-US" sz="2000" b="1" dirty="0" smtClean="0">
-                <a:latin typeface="+mn-lt"/>
-              </a:rPr>
-              <a:t>RSA </a:t>
-            </a:r>
-            <a:r>
-              <a:rPr lang="en-US" sz="2000" b="1" dirty="0">
-                <a:latin typeface="+mn-lt"/>
-              </a:rPr>
-              <a:t>signatures</a:t>
-            </a:r>
-            <a:r>
               <a:rPr lang="en-US" sz="2000" dirty="0">
                 <a:latin typeface="+mn-lt"/>
               </a:rPr>
-              <a:t> </a:t>
-            </a:r>
-          </a:p>
-          <a:p>
-            <a:pPr marL="693738" lvl="2" indent="-236538" algn="l" defTabSz="814388">
+              <a:t>Appropriate protocol to use when confidentiality is not required or </a:t>
+            </a:r>
+            <a:r>
+              <a:rPr lang="en-US" sz="2000" dirty="0" smtClean="0">
+                <a:latin typeface="+mn-lt"/>
+              </a:rPr>
+              <a:t>permitted.</a:t>
+            </a:r>
+            <a:endParaRPr lang="en-US" sz="2000" dirty="0">
+              <a:latin typeface="+mn-lt"/>
+            </a:endParaRPr>
+          </a:p>
+          <a:p>
+            <a:pPr marL="236538" indent="-236538" algn="l" defTabSz="814388">
               <a:lnSpc>
                 <a:spcPct val="95000"/>
               </a:lnSpc>
@@ -18769,20 +18877,20 @@
               <a:rPr lang="en-US" sz="2000" dirty="0">
                 <a:latin typeface="+mn-lt"/>
               </a:rPr>
-              <a:t>Digital certificates are exchanged to authenticate </a:t>
+              <a:t>Provides data authentication and integrity for IP packets that are passed between two </a:t>
             </a:r>
             <a:r>
               <a:rPr lang="en-US" sz="2000" dirty="0" smtClean="0">
                 <a:latin typeface="+mn-lt"/>
               </a:rPr>
-              <a:t>peers.</a:t>
+              <a:t>systems.</a:t>
             </a:r>
             <a:endParaRPr lang="en-US" sz="2000" dirty="0">
               <a:latin typeface="+mn-lt"/>
             </a:endParaRPr>
           </a:p>
           <a:p>
-            <a:pPr marL="693738" lvl="2" indent="-236538" algn="l" defTabSz="814388">
+            <a:pPr marL="236538" indent="-236538" algn="l" defTabSz="814388">
               <a:lnSpc>
                 <a:spcPct val="95000"/>
               </a:lnSpc>
@@ -18799,32 +18907,36 @@
               <a:rPr lang="en-US" sz="2000" dirty="0">
                 <a:latin typeface="+mn-lt"/>
               </a:rPr>
-              <a:t>Local device derives a hash </a:t>
+              <a:t>Does not provide data confidentiality (encryption) of </a:t>
             </a:r>
             <a:r>
               <a:rPr lang="en-US" sz="2000" dirty="0" smtClean="0">
                 <a:latin typeface="+mn-lt"/>
               </a:rPr>
-              <a:t>and </a:t>
-            </a:r>
-            <a:r>
-              <a:rPr lang="en-US" sz="2000" dirty="0">
-                <a:latin typeface="+mn-lt"/>
-              </a:rPr>
-              <a:t>encrypts it with its private </a:t>
-            </a:r>
-            <a:r>
-              <a:rPr lang="en-US" sz="2000" dirty="0" smtClean="0">
-                <a:latin typeface="+mn-lt"/>
-              </a:rPr>
-              <a:t>key.</a:t>
+              <a:t>packets.</a:t>
             </a:r>
             <a:endParaRPr lang="en-US" sz="2000" dirty="0">
               <a:latin typeface="+mn-lt"/>
             </a:endParaRPr>
           </a:p>
           <a:p>
-            <a:pPr marL="693738" lvl="2" indent="-236538" algn="l" defTabSz="814388">
+            <a:pPr algn="l"/>
+            <a:endParaRPr lang="en-US" sz="2000" b="1" dirty="0" smtClean="0"/>
+          </a:p>
+          <a:p>
+            <a:pPr algn="l"/>
+            <a:r>
+              <a:rPr lang="en-US" sz="2000" b="1" dirty="0" smtClean="0"/>
+              <a:t>Encapsulating </a:t>
+            </a:r>
+            <a:r>
+              <a:rPr lang="en-US" sz="2000" b="1" dirty="0"/>
+              <a:t>Security Payload (ESP) </a:t>
+            </a:r>
+            <a:endParaRPr lang="en-US" sz="2000" dirty="0"/>
+          </a:p>
+          <a:p>
+            <a:pPr marL="236538" indent="-236538" algn="l" defTabSz="814388">
               <a:lnSpc>
                 <a:spcPct val="95000"/>
               </a:lnSpc>
@@ -18841,20 +18953,20 @@
               <a:rPr lang="en-US" sz="2000" dirty="0">
                 <a:latin typeface="+mn-lt"/>
               </a:rPr>
-              <a:t>Encrypted hash, or digital signature, is attached to the message and forwarded to the remote </a:t>
+              <a:t>A security protocol that provides confidentiality and authentication by encrypting the IP </a:t>
             </a:r>
             <a:r>
               <a:rPr lang="en-US" sz="2000" dirty="0" smtClean="0">
                 <a:latin typeface="+mn-lt"/>
               </a:rPr>
-              <a:t>end.</a:t>
+              <a:t>packet.</a:t>
             </a:r>
             <a:endParaRPr lang="en-US" sz="2000" dirty="0">
               <a:latin typeface="+mn-lt"/>
             </a:endParaRPr>
           </a:p>
           <a:p>
-            <a:pPr marL="693738" lvl="2" indent="-236538" algn="l" defTabSz="814388">
+            <a:pPr marL="236538" indent="-236538" algn="l" defTabSz="814388">
               <a:lnSpc>
                 <a:spcPct val="95000"/>
               </a:lnSpc>
@@ -18871,20 +18983,20 @@
               <a:rPr lang="en-US" sz="2000" dirty="0">
                 <a:latin typeface="+mn-lt"/>
               </a:rPr>
-              <a:t>At the remote end, the encrypted hash is decrypted using the public key of the local </a:t>
+              <a:t>Authenticates the inner IP packet and ESP </a:t>
             </a:r>
             <a:r>
               <a:rPr lang="en-US" sz="2000" dirty="0" smtClean="0">
                 <a:latin typeface="+mn-lt"/>
               </a:rPr>
-              <a:t>end.</a:t>
+              <a:t>header. </a:t>
             </a:r>
             <a:endParaRPr lang="en-US" sz="2000" dirty="0">
               <a:latin typeface="+mn-lt"/>
             </a:endParaRPr>
           </a:p>
           <a:p>
-            <a:pPr marL="693738" lvl="2" indent="-236538" algn="l" defTabSz="814388">
+            <a:pPr marL="236538" indent="-236538" algn="l" defTabSz="814388">
               <a:lnSpc>
                 <a:spcPct val="95000"/>
               </a:lnSpc>
@@ -18901,15 +19013,24 @@
               <a:rPr lang="en-US" sz="2000" dirty="0">
                 <a:latin typeface="+mn-lt"/>
               </a:rPr>
-              <a:t>If the decrypted hash matches the recomputed hash, the signature is genuine.</a:t>
-            </a:r>
+              <a:t>Both encryption and authentication are optional in ESP, at a minimum, one of them must be </a:t>
+            </a:r>
+            <a:r>
+              <a:rPr lang="en-US" sz="2000" dirty="0" smtClean="0">
+                <a:latin typeface="+mn-lt"/>
+              </a:rPr>
+              <a:t>selected.</a:t>
+            </a:r>
+            <a:endParaRPr lang="en-US" sz="2000" dirty="0">
+              <a:latin typeface="+mn-lt"/>
+            </a:endParaRPr>
           </a:p>
         </p:txBody>
       </p:sp>
     </p:spTree>
     <p:extLst>
       <p:ext uri="{BB962C8B-B14F-4D97-AF65-F5344CB8AC3E}">
-        <p14:creationId xmlns:p14="http://schemas.microsoft.com/office/powerpoint/2010/main" val="3553001475"/>
+        <p14:creationId xmlns:p14="http://schemas.microsoft.com/office/powerpoint/2010/main" val="3372269653"/>
       </p:ext>
     </p:extLst>
   </p:cSld>
@@ -18955,7 +19076,7 @@
         </p:nvSpPr>
         <p:spPr>
           <a:xfrm>
-            <a:off x="419781" y="406401"/>
+            <a:off x="390753" y="348345"/>
             <a:ext cx="8145462" cy="827314"/>
           </a:xfrm>
         </p:spPr>
@@ -18980,16 +19101,16 @@
               <a:rPr lang="en-US" dirty="0" smtClean="0">
                 <a:ea typeface="ＭＳ Ｐゴシック" pitchFamily="34" charset="-128"/>
               </a:rPr>
-              <a:t>: Objectives</a:t>
-            </a:r>
-          </a:p>
-        </p:txBody>
-      </p:sp>
-      <p:sp>
-        <p:nvSpPr>
-          <p:cNvPr id="3" name="Content Placeholder 2"/>
-          <p:cNvSpPr>
-            <a:spLocks noGrp="1"/>
+              <a:t>: Introduction</a:t>
+            </a:r>
+          </a:p>
+        </p:txBody>
+      </p:sp>
+      <p:sp>
+        <p:nvSpPr>
+          <p:cNvPr id="6147" name="Rectangle 3"/>
+          <p:cNvSpPr>
+            <a:spLocks noGrp="1" noChangeArrowheads="1"/>
           </p:cNvSpPr>
           <p:nvPr>
             <p:ph idx="1"/>
@@ -18997,388 +19118,81 @@
         </p:nvSpPr>
         <p:spPr>
           <a:xfrm>
-            <a:off x="466953" y="1492024"/>
-            <a:ext cx="7994876" cy="4633005"/>
+            <a:off x="508000" y="1349829"/>
+            <a:ext cx="8171543" cy="5297714"/>
           </a:xfrm>
         </p:spPr>
         <p:txBody>
           <a:bodyPr/>
           <a:lstStyle/>
           <a:p>
-            <a:pPr marL="0" indent="0">
-              <a:buNone/>
-            </a:pPr>
+            <a:r>
+              <a:rPr lang="en-US" sz="2000" dirty="0"/>
+              <a:t>Security is a concern when using the public Internet to conduct business. </a:t>
+            </a:r>
+            <a:endParaRPr lang="en-US" sz="2000" dirty="0" smtClean="0"/>
+          </a:p>
+          <a:p>
             <a:r>
               <a:rPr lang="en-US" sz="2000" dirty="0" smtClean="0"/>
-              <a:t>After completing this chapter, students will be able to:</a:t>
-            </a:r>
+              <a:t>Virtual </a:t>
+            </a:r>
+            <a:r>
+              <a:rPr lang="en-US" sz="2000" dirty="0"/>
+              <a:t>Private Networks (VPNs) are used to ensure the security of data across the Internet. </a:t>
+            </a:r>
+            <a:endParaRPr lang="en-US" sz="2000" dirty="0" smtClean="0"/>
           </a:p>
           <a:p>
             <a:r>
               <a:rPr lang="en-US" sz="2000" dirty="0" smtClean="0"/>
-              <a:t>Describe benefits of VPN technology.</a:t>
-            </a:r>
+              <a:t>A </a:t>
+            </a:r>
+            <a:r>
+              <a:rPr lang="en-US" sz="2000" dirty="0"/>
+              <a:t>VPN is used to create a private tunnel over a public network. </a:t>
+            </a:r>
+            <a:endParaRPr lang="en-US" sz="2000" dirty="0" smtClean="0"/>
           </a:p>
           <a:p>
             <a:r>
               <a:rPr lang="en-US" sz="2000" dirty="0" smtClean="0"/>
-              <a:t>Describe site-to-site and remote access VPNs.</a:t>
-            </a:r>
-          </a:p>
-          <a:p>
+              <a:t>Data </a:t>
+            </a:r>
+            <a:r>
+              <a:rPr lang="en-US" sz="2000" dirty="0"/>
+              <a:t>can be secured by using encryption in this tunnel through the Internet and by using authentication to protect data from unauthorized access.</a:t>
+            </a:r>
+          </a:p>
+          <a:p>
+            <a:r>
+              <a:rPr lang="en-US" sz="2000" dirty="0"/>
+              <a:t>This chapter explains the concepts and processes related to VPNs, as well as the benefits of VPN </a:t>
+            </a:r>
             <a:r>
               <a:rPr lang="en-US" sz="2000" dirty="0" smtClean="0"/>
-              <a:t>Describe the purpose and benefits of GRE tunnels.</a:t>
-            </a:r>
-          </a:p>
-          <a:p>
-            <a:r>
-              <a:rPr lang="en-US" sz="2000" dirty="0" smtClean="0"/>
-              <a:t>Configure a site-to-site GRE tunnel.</a:t>
-            </a:r>
-          </a:p>
-          <a:p>
-            <a:r>
-              <a:rPr lang="en-US" sz="2000" dirty="0" smtClean="0"/>
-              <a:t>Describe the characteristics of IPsec.</a:t>
-            </a:r>
-          </a:p>
-          <a:p>
-            <a:r>
-              <a:rPr lang="en-US" sz="2000" dirty="0" smtClean="0"/>
-              <a:t>Explain how IPsec is implemented using the IPsec protocol framework.</a:t>
-            </a:r>
-          </a:p>
-          <a:p>
-            <a:r>
-              <a:rPr lang="en-US" sz="2000" dirty="0" smtClean="0"/>
-              <a:t>Explain how the </a:t>
-            </a:r>
-            <a:r>
-              <a:rPr lang="en-US" sz="2000" dirty="0" err="1" smtClean="0"/>
-              <a:t>Anyconnect</a:t>
-            </a:r>
-            <a:r>
-              <a:rPr lang="en-US" sz="2000" dirty="0" smtClean="0"/>
-              <a:t> client and clientless SSL remote access VPN implementations support business requirements.</a:t>
-            </a:r>
-          </a:p>
-          <a:p>
-            <a:r>
-              <a:rPr lang="en-US" sz="2000" dirty="0" smtClean="0"/>
-              <a:t>Compare IPsec and SSL remote access VPNs.</a:t>
-            </a:r>
-            <a:endParaRPr lang="en-US" sz="2000" dirty="0"/>
-          </a:p>
-        </p:txBody>
-      </p:sp>
-    </p:spTree>
-  </p:cSld>
-  <p:clrMapOvr>
-    <a:masterClrMapping/>
-  </p:clrMapOvr>
-  <p:timing>
-    <p:tnLst>
-      <p:par>
-        <p:cTn id="1" dur="indefinite" restart="never" nodeType="tmRoot"/>
-      </p:par>
-    </p:tnLst>
-  </p:timing>
-</p:sld>
-</file>
-
-<file path=ppt/slides/slide40.xml><?xml version="1.0" encoding="utf-8"?>
-<p:sld xmlns:a="http://schemas.openxmlformats.org/drawingml/2006/main" xmlns:r="http://schemas.openxmlformats.org/officeDocument/2006/relationships" xmlns:p="http://schemas.openxmlformats.org/presentationml/2006/main">
-  <p:cSld>
-    <p:spTree>
-      <p:nvGrpSpPr>
-        <p:cNvPr id="1" name=""/>
-        <p:cNvGrpSpPr/>
-        <p:nvPr/>
-      </p:nvGrpSpPr>
-      <p:grpSpPr>
-        <a:xfrm>
-          <a:off x="0" y="0"/>
-          <a:ext cx="0" cy="0"/>
-          <a:chOff x="0" y="0"/>
-          <a:chExt cx="0" cy="0"/>
-        </a:xfrm>
-      </p:grpSpPr>
-      <p:sp>
-        <p:nvSpPr>
-          <p:cNvPr id="7170" name="Rectangle 2"/>
-          <p:cNvSpPr>
-            <a:spLocks noGrp="1" noChangeArrowheads="1"/>
-          </p:cNvSpPr>
-          <p:nvPr>
-            <p:ph type="title"/>
-          </p:nvPr>
-        </p:nvSpPr>
-        <p:spPr>
-          <a:xfrm>
-            <a:off x="342900" y="432919"/>
-            <a:ext cx="8145462" cy="838200"/>
-          </a:xfrm>
-        </p:spPr>
-        <p:txBody>
-          <a:bodyPr/>
-          <a:lstStyle/>
-          <a:p>
-            <a:pPr eaLnBrk="1" hangingPunct="1"/>
-            <a:r>
-              <a:rPr lang="en-US" sz="1800" dirty="0" smtClean="0">
-                <a:ea typeface="ＭＳ Ｐゴシック" pitchFamily="34" charset="-128"/>
-              </a:rPr>
-              <a:t>IPsec Framework</a:t>
-            </a:r>
-            <a:br>
-              <a:rPr lang="en-US" sz="1800" dirty="0" smtClean="0">
-                <a:ea typeface="ＭＳ Ｐゴシック" pitchFamily="34" charset="-128"/>
-              </a:rPr>
-            </a:br>
-            <a:r>
-              <a:rPr lang="en-US" dirty="0" smtClean="0">
-                <a:ea typeface="ＭＳ Ｐゴシック" pitchFamily="34" charset="-128"/>
-              </a:rPr>
-              <a:t>IPsec Protocol Framework</a:t>
-            </a:r>
-          </a:p>
-        </p:txBody>
-      </p:sp>
-      <p:sp>
-        <p:nvSpPr>
-          <p:cNvPr id="3" name="Rectangle 2"/>
-          <p:cNvSpPr/>
-          <p:nvPr/>
-        </p:nvSpPr>
-        <p:spPr>
-          <a:xfrm>
-            <a:off x="342900" y="1380860"/>
-            <a:ext cx="8389620" cy="4770537"/>
-          </a:xfrm>
-          <a:prstGeom prst="rect">
-            <a:avLst/>
-          </a:prstGeom>
-        </p:spPr>
-        <p:txBody>
-          <a:bodyPr wrap="square">
-            <a:spAutoFit/>
-          </a:bodyPr>
-          <a:lstStyle/>
-          <a:p>
-            <a:pPr algn="l"/>
-            <a:r>
-              <a:rPr lang="en-US" sz="2000" b="1" dirty="0" smtClean="0"/>
-              <a:t>Authentication </a:t>
-            </a:r>
-            <a:r>
-              <a:rPr lang="en-US" sz="2000" b="1" dirty="0"/>
-              <a:t>Header (AH) </a:t>
-            </a:r>
-            <a:endParaRPr lang="en-US" sz="2000" dirty="0"/>
-          </a:p>
-          <a:p>
-            <a:pPr marL="236538" indent="-236538" algn="l" defTabSz="814388">
-              <a:lnSpc>
-                <a:spcPct val="95000"/>
-              </a:lnSpc>
-              <a:spcBef>
-                <a:spcPct val="50000"/>
-              </a:spcBef>
-              <a:buClr>
-                <a:srgbClr val="708CA1"/>
-              </a:buClr>
-              <a:buFont typeface="Wingdings" pitchFamily="2" charset="2"/>
-              <a:buChar char="§"/>
-            </a:pPr>
-            <a:r>
-              <a:rPr lang="en-US" sz="2000" dirty="0">
-                <a:latin typeface="+mn-lt"/>
-              </a:rPr>
-              <a:t>Appropriate protocol to use when confidentiality is not required or </a:t>
-            </a:r>
-            <a:r>
-              <a:rPr lang="en-US" sz="2000" dirty="0" smtClean="0">
-                <a:latin typeface="+mn-lt"/>
-              </a:rPr>
-              <a:t>permitted.</a:t>
-            </a:r>
-            <a:endParaRPr lang="en-US" sz="2000" dirty="0">
-              <a:latin typeface="+mn-lt"/>
-            </a:endParaRPr>
-          </a:p>
-          <a:p>
-            <a:pPr marL="236538" indent="-236538" algn="l" defTabSz="814388">
-              <a:lnSpc>
-                <a:spcPct val="95000"/>
-              </a:lnSpc>
-              <a:spcBef>
-                <a:spcPct val="50000"/>
-              </a:spcBef>
-              <a:buClr>
-                <a:srgbClr val="708CA1"/>
-              </a:buClr>
-              <a:buFont typeface="Wingdings" pitchFamily="2" charset="2"/>
-              <a:buChar char="§"/>
-            </a:pPr>
-            <a:r>
-              <a:rPr lang="en-US" sz="2000" dirty="0">
-                <a:latin typeface="+mn-lt"/>
-              </a:rPr>
-              <a:t>Provides data authentication and integrity for IP packets that are passed between two </a:t>
-            </a:r>
-            <a:r>
-              <a:rPr lang="en-US" sz="2000" dirty="0" smtClean="0">
-                <a:latin typeface="+mn-lt"/>
-              </a:rPr>
-              <a:t>systems.</a:t>
-            </a:r>
-            <a:endParaRPr lang="en-US" sz="2000" dirty="0">
-              <a:latin typeface="+mn-lt"/>
-            </a:endParaRPr>
-          </a:p>
-          <a:p>
-            <a:pPr marL="236538" indent="-236538" algn="l" defTabSz="814388">
-              <a:lnSpc>
-                <a:spcPct val="95000"/>
-              </a:lnSpc>
-              <a:spcBef>
-                <a:spcPct val="50000"/>
-              </a:spcBef>
-              <a:buClr>
-                <a:srgbClr val="708CA1"/>
-              </a:buClr>
-              <a:buFont typeface="Wingdings" pitchFamily="2" charset="2"/>
-              <a:buChar char="§"/>
-            </a:pPr>
-            <a:r>
-              <a:rPr lang="en-US" sz="2000" dirty="0">
-                <a:latin typeface="+mn-lt"/>
-              </a:rPr>
-              <a:t>Does not provide data confidentiality (encryption) of </a:t>
-            </a:r>
-            <a:r>
-              <a:rPr lang="en-US" sz="2000" dirty="0" smtClean="0">
-                <a:latin typeface="+mn-lt"/>
-              </a:rPr>
-              <a:t>packets.</a:t>
-            </a:r>
-            <a:endParaRPr lang="en-US" sz="2000" dirty="0">
-              <a:latin typeface="+mn-lt"/>
-            </a:endParaRPr>
-          </a:p>
-          <a:p>
-            <a:pPr algn="l"/>
-            <a:endParaRPr lang="en-US" sz="2000" b="1" dirty="0" smtClean="0"/>
-          </a:p>
-          <a:p>
-            <a:pPr algn="l"/>
-            <a:r>
-              <a:rPr lang="en-US" sz="2000" b="1" dirty="0" smtClean="0"/>
-              <a:t>Encapsulating </a:t>
-            </a:r>
-            <a:r>
-              <a:rPr lang="en-US" sz="2000" b="1" dirty="0"/>
-              <a:t>Security Payload (ESP) </a:t>
-            </a:r>
-            <a:endParaRPr lang="en-US" sz="2000" dirty="0"/>
-          </a:p>
-          <a:p>
-            <a:pPr marL="236538" indent="-236538" algn="l" defTabSz="814388">
-              <a:lnSpc>
-                <a:spcPct val="95000"/>
-              </a:lnSpc>
-              <a:spcBef>
-                <a:spcPct val="50000"/>
-              </a:spcBef>
-              <a:buClr>
-                <a:srgbClr val="708CA1"/>
-              </a:buClr>
-              <a:buFont typeface="Wingdings" pitchFamily="2" charset="2"/>
-              <a:buChar char="§"/>
-            </a:pPr>
-            <a:r>
-              <a:rPr lang="en-US" sz="2000" dirty="0">
-                <a:latin typeface="+mn-lt"/>
-              </a:rPr>
-              <a:t>A security protocol that provides confidentiality and authentication by encrypting the IP </a:t>
-            </a:r>
-            <a:r>
-              <a:rPr lang="en-US" sz="2000" dirty="0" smtClean="0">
-                <a:latin typeface="+mn-lt"/>
-              </a:rPr>
-              <a:t>packet.</a:t>
-            </a:r>
-            <a:endParaRPr lang="en-US" sz="2000" dirty="0">
-              <a:latin typeface="+mn-lt"/>
-            </a:endParaRPr>
-          </a:p>
-          <a:p>
-            <a:pPr marL="236538" indent="-236538" algn="l" defTabSz="814388">
-              <a:lnSpc>
-                <a:spcPct val="95000"/>
-              </a:lnSpc>
-              <a:spcBef>
-                <a:spcPct val="50000"/>
-              </a:spcBef>
-              <a:buClr>
-                <a:srgbClr val="708CA1"/>
-              </a:buClr>
-              <a:buFont typeface="Wingdings" pitchFamily="2" charset="2"/>
-              <a:buChar char="§"/>
-            </a:pPr>
-            <a:r>
-              <a:rPr lang="en-US" sz="2000" dirty="0">
-                <a:latin typeface="+mn-lt"/>
-              </a:rPr>
-              <a:t>Authenticates the inner IP packet and ESP </a:t>
-            </a:r>
-            <a:r>
-              <a:rPr lang="en-US" sz="2000" dirty="0" smtClean="0">
-                <a:latin typeface="+mn-lt"/>
-              </a:rPr>
-              <a:t>header. </a:t>
-            </a:r>
-            <a:endParaRPr lang="en-US" sz="2000" dirty="0">
-              <a:latin typeface="+mn-lt"/>
-            </a:endParaRPr>
-          </a:p>
-          <a:p>
-            <a:pPr marL="236538" indent="-236538" algn="l" defTabSz="814388">
-              <a:lnSpc>
-                <a:spcPct val="95000"/>
-              </a:lnSpc>
-              <a:spcBef>
-                <a:spcPct val="50000"/>
-              </a:spcBef>
-              <a:buClr>
-                <a:srgbClr val="708CA1"/>
-              </a:buClr>
-              <a:buFont typeface="Wingdings" pitchFamily="2" charset="2"/>
-              <a:buChar char="§"/>
-            </a:pPr>
-            <a:r>
-              <a:rPr lang="en-US" sz="2000" dirty="0">
-                <a:latin typeface="+mn-lt"/>
-              </a:rPr>
-              <a:t>Both encryption and authentication are optional in ESP, at a minimum, one of them must be </a:t>
-            </a:r>
-            <a:r>
-              <a:rPr lang="en-US" sz="2000" dirty="0" smtClean="0">
-                <a:latin typeface="+mn-lt"/>
-              </a:rPr>
-              <a:t>selected.</a:t>
-            </a:r>
-            <a:endParaRPr lang="en-US" sz="2000" dirty="0">
-              <a:latin typeface="+mn-lt"/>
-            </a:endParaRPr>
+              <a:t>implementations, </a:t>
+            </a:r>
+            <a:r>
+              <a:rPr lang="en-US" sz="2000" dirty="0"/>
+              <a:t>and the underlying protocols required to configure VPNs.</a:t>
+            </a:r>
+          </a:p>
+          <a:p>
+            <a:endParaRPr lang="en-US" sz="2000" dirty="0" smtClean="0"/>
+          </a:p>
+          <a:p>
+            <a:endParaRPr lang="en-US" sz="2000" dirty="0" smtClean="0"/>
+          </a:p>
+          <a:p>
+            <a:endParaRPr lang="en-US" sz="2000" dirty="0" smtClean="0"/>
           </a:p>
         </p:txBody>
       </p:sp>
     </p:spTree>
     <p:extLst>
       <p:ext uri="{BB962C8B-B14F-4D97-AF65-F5344CB8AC3E}">
-        <p14:creationId xmlns:p14="http://schemas.microsoft.com/office/powerpoint/2010/main" val="3372269653"/>
+        <p14:creationId xmlns:p14="http://schemas.microsoft.com/office/powerpoint/2010/main" val="1039132760"/>
       </p:ext>
     </p:extLst>
   </p:cSld>
@@ -19395,7 +19209,7 @@
 </p:sld>
 </file>
 
-<file path=ppt/slides/slide41.xml><?xml version="1.0" encoding="utf-8"?>
+<file path=ppt/slides/slide40.xml><?xml version="1.0" encoding="utf-8"?>
 <p:sld xmlns:a="http://schemas.openxmlformats.org/drawingml/2006/main" xmlns:r="http://schemas.openxmlformats.org/officeDocument/2006/relationships" xmlns:p="http://schemas.openxmlformats.org/presentationml/2006/main">
   <p:cSld>
     <p:spTree>
@@ -19522,7 +19336,7 @@
 </p:sld>
 </file>
 
-<file path=ppt/slides/slide42.xml><?xml version="1.0" encoding="utf-8"?>
+<file path=ppt/slides/slide41.xml><?xml version="1.0" encoding="utf-8"?>
 <p:sld xmlns:a="http://schemas.openxmlformats.org/drawingml/2006/main" xmlns:r="http://schemas.openxmlformats.org/officeDocument/2006/relationships" xmlns:p="http://schemas.openxmlformats.org/presentationml/2006/main">
   <p:cSld>
     <p:spTree>
@@ -19848,7 +19662,7 @@
 </p:sld>
 </file>
 
-<file path=ppt/slides/slide43.xml><?xml version="1.0" encoding="utf-8"?>
+<file path=ppt/slides/slide42.xml><?xml version="1.0" encoding="utf-8"?>
 <p:sld xmlns:a="http://schemas.openxmlformats.org/drawingml/2006/main" xmlns:r="http://schemas.openxmlformats.org/officeDocument/2006/relationships" xmlns:p="http://schemas.openxmlformats.org/presentationml/2006/main">
   <p:cSld>
     <p:spTree>
@@ -19975,7 +19789,7 @@
 </p:sld>
 </file>
 
-<file path=ppt/slides/slide44.xml><?xml version="1.0" encoding="utf-8"?>
+<file path=ppt/slides/slide43.xml><?xml version="1.0" encoding="utf-8"?>
 <p:sld xmlns:a="http://schemas.openxmlformats.org/drawingml/2006/main" xmlns:r="http://schemas.openxmlformats.org/officeDocument/2006/relationships" xmlns:p="http://schemas.openxmlformats.org/presentationml/2006/main">
   <p:cSld>
     <p:spTree>
@@ -20048,7 +19862,7 @@
 </p:sld>
 </file>
 
-<file path=ppt/slides/slide45.xml><?xml version="1.0" encoding="utf-8"?>
+<file path=ppt/slides/slide44.xml><?xml version="1.0" encoding="utf-8"?>
 <p:sld xmlns:a="http://schemas.openxmlformats.org/drawingml/2006/main" xmlns:r="http://schemas.openxmlformats.org/officeDocument/2006/relationships" xmlns:p="http://schemas.openxmlformats.org/presentationml/2006/main">
   <p:cSld>
     <p:spTree>
@@ -20293,7 +20107,7 @@
 </p:sld>
 </file>
 
-<file path=ppt/slides/slide46.xml><?xml version="1.0" encoding="utf-8"?>
+<file path=ppt/slides/slide45.xml><?xml version="1.0" encoding="utf-8"?>
 <p:sld xmlns:a="http://schemas.openxmlformats.org/drawingml/2006/main" xmlns:r="http://schemas.openxmlformats.org/officeDocument/2006/relationships" xmlns:p="http://schemas.openxmlformats.org/presentationml/2006/main">
   <p:cSld>
     <p:spTree>
@@ -20485,7 +20299,7 @@
 </p:sld>
 </file>
 
-<file path=ppt/slides/slide47.xml><?xml version="1.0" encoding="utf-8"?>
+<file path=ppt/slides/slide46.xml><?xml version="1.0" encoding="utf-8"?>
 <p:sld xmlns:a="http://schemas.openxmlformats.org/drawingml/2006/main" xmlns:r="http://schemas.openxmlformats.org/officeDocument/2006/relationships" xmlns:p="http://schemas.openxmlformats.org/presentationml/2006/main">
   <p:cSld>
     <p:spTree>
@@ -20729,7 +20543,7 @@
 </p:sld>
 </file>
 
-<file path=ppt/slides/slide48.xml><?xml version="1.0" encoding="utf-8"?>
+<file path=ppt/slides/slide47.xml><?xml version="1.0" encoding="utf-8"?>
 <p:sld xmlns:a="http://schemas.openxmlformats.org/drawingml/2006/main" xmlns:r="http://schemas.openxmlformats.org/officeDocument/2006/relationships" xmlns:p="http://schemas.openxmlformats.org/presentationml/2006/main">
   <p:cSld>
     <p:spTree>
@@ -20856,7 +20670,7 @@
 </p:sld>
 </file>
 
-<file path=ppt/slides/slide49.xml><?xml version="1.0" encoding="utf-8"?>
+<file path=ppt/slides/slide48.xml><?xml version="1.0" encoding="utf-8"?>
 <p:sld xmlns:a="http://schemas.openxmlformats.org/drawingml/2006/main" xmlns:r="http://schemas.openxmlformats.org/officeDocument/2006/relationships" xmlns:p="http://schemas.openxmlformats.org/presentationml/2006/main">
   <p:cSld>
     <p:spTree>
@@ -21144,169 +20958,7 @@
 </p:sld>
 </file>
 
-<file path=ppt/slides/slide5.xml><?xml version="1.0" encoding="utf-8"?>
-<p:sld xmlns:a="http://schemas.openxmlformats.org/drawingml/2006/main" xmlns:r="http://schemas.openxmlformats.org/officeDocument/2006/relationships" xmlns:p="http://schemas.openxmlformats.org/presentationml/2006/main">
-  <p:cSld>
-    <p:spTree>
-      <p:nvGrpSpPr>
-        <p:cNvPr id="1" name=""/>
-        <p:cNvGrpSpPr/>
-        <p:nvPr/>
-      </p:nvGrpSpPr>
-      <p:grpSpPr>
-        <a:xfrm>
-          <a:off x="0" y="0"/>
-          <a:ext cx="0" cy="0"/>
-          <a:chOff x="0" y="0"/>
-          <a:chExt cx="0" cy="0"/>
-        </a:xfrm>
-      </p:grpSpPr>
-      <p:sp>
-        <p:nvSpPr>
-          <p:cNvPr id="7170" name="Rectangle 2"/>
-          <p:cNvSpPr>
-            <a:spLocks noGrp="1" noChangeArrowheads="1"/>
-          </p:cNvSpPr>
-          <p:nvPr>
-            <p:ph type="title"/>
-          </p:nvPr>
-        </p:nvSpPr>
-        <p:spPr>
-          <a:xfrm>
-            <a:off x="390753" y="348345"/>
-            <a:ext cx="8145462" cy="827314"/>
-          </a:xfrm>
-        </p:spPr>
-        <p:txBody>
-          <a:bodyPr/>
-          <a:lstStyle/>
-          <a:p>
-            <a:pPr eaLnBrk="1" hangingPunct="1"/>
-            <a:r>
-              <a:rPr lang="en-US" dirty="0" smtClean="0">
-                <a:ea typeface="ＭＳ Ｐゴシック" pitchFamily="34" charset="-128"/>
-              </a:rPr>
-              <a:t>Chapter </a:t>
-            </a:r>
-            <a:r>
-              <a:rPr lang="en-US" dirty="0">
-                <a:ea typeface="ＭＳ Ｐゴシック" pitchFamily="34" charset="-128"/>
-              </a:rPr>
-              <a:t>7</a:t>
-            </a:r>
-            <a:r>
-              <a:rPr lang="en-US" dirty="0" smtClean="0">
-                <a:ea typeface="ＭＳ Ｐゴシック" pitchFamily="34" charset="-128"/>
-              </a:rPr>
-              <a:t>: Introduction</a:t>
-            </a:r>
-          </a:p>
-        </p:txBody>
-      </p:sp>
-      <p:sp>
-        <p:nvSpPr>
-          <p:cNvPr id="6147" name="Rectangle 3"/>
-          <p:cNvSpPr>
-            <a:spLocks noGrp="1" noChangeArrowheads="1"/>
-          </p:cNvSpPr>
-          <p:nvPr>
-            <p:ph idx="1"/>
-          </p:nvPr>
-        </p:nvSpPr>
-        <p:spPr>
-          <a:xfrm>
-            <a:off x="508000" y="1349829"/>
-            <a:ext cx="8171543" cy="5297714"/>
-          </a:xfrm>
-        </p:spPr>
-        <p:txBody>
-          <a:bodyPr/>
-          <a:lstStyle/>
-          <a:p>
-            <a:r>
-              <a:rPr lang="en-US" sz="2000" dirty="0"/>
-              <a:t>Security is a concern when using the public Internet to conduct business. </a:t>
-            </a:r>
-            <a:endParaRPr lang="en-US" sz="2000" dirty="0" smtClean="0"/>
-          </a:p>
-          <a:p>
-            <a:r>
-              <a:rPr lang="en-US" sz="2000" dirty="0" smtClean="0"/>
-              <a:t>Virtual </a:t>
-            </a:r>
-            <a:r>
-              <a:rPr lang="en-US" sz="2000" dirty="0"/>
-              <a:t>Private Networks (VPNs) are used to ensure the security of data across the Internet. </a:t>
-            </a:r>
-            <a:endParaRPr lang="en-US" sz="2000" dirty="0" smtClean="0"/>
-          </a:p>
-          <a:p>
-            <a:r>
-              <a:rPr lang="en-US" sz="2000" dirty="0" smtClean="0"/>
-              <a:t>A </a:t>
-            </a:r>
-            <a:r>
-              <a:rPr lang="en-US" sz="2000" dirty="0"/>
-              <a:t>VPN is used to create a private tunnel over a public network. </a:t>
-            </a:r>
-            <a:endParaRPr lang="en-US" sz="2000" dirty="0" smtClean="0"/>
-          </a:p>
-          <a:p>
-            <a:r>
-              <a:rPr lang="en-US" sz="2000" dirty="0" smtClean="0"/>
-              <a:t>Data </a:t>
-            </a:r>
-            <a:r>
-              <a:rPr lang="en-US" sz="2000" dirty="0"/>
-              <a:t>can be secured by using encryption in this tunnel through the Internet and by using authentication to protect data from unauthorized access.</a:t>
-            </a:r>
-          </a:p>
-          <a:p>
-            <a:r>
-              <a:rPr lang="en-US" sz="2000" dirty="0"/>
-              <a:t>This chapter explains the concepts and processes related to VPNs, as well as the benefits of VPN </a:t>
-            </a:r>
-            <a:r>
-              <a:rPr lang="en-US" sz="2000" dirty="0" smtClean="0"/>
-              <a:t>implementations, </a:t>
-            </a:r>
-            <a:r>
-              <a:rPr lang="en-US" sz="2000" dirty="0"/>
-              <a:t>and the underlying protocols required to configure VPNs.</a:t>
-            </a:r>
-          </a:p>
-          <a:p>
-            <a:endParaRPr lang="en-US" sz="2000" dirty="0" smtClean="0"/>
-          </a:p>
-          <a:p>
-            <a:endParaRPr lang="en-US" sz="2000" dirty="0" smtClean="0"/>
-          </a:p>
-          <a:p>
-            <a:endParaRPr lang="en-US" sz="2000" dirty="0" smtClean="0"/>
-          </a:p>
-        </p:txBody>
-      </p:sp>
-    </p:spTree>
-    <p:extLst>
-      <p:ext uri="{BB962C8B-B14F-4D97-AF65-F5344CB8AC3E}">
-        <p14:creationId xmlns:p14="http://schemas.microsoft.com/office/powerpoint/2010/main" val="1039132760"/>
-      </p:ext>
-    </p:extLst>
-  </p:cSld>
-  <p:clrMapOvr>
-    <a:masterClrMapping/>
-  </p:clrMapOvr>
-  <p:timing>
-    <p:tnLst>
-      <p:par>
-        <p:cTn id="1" dur="indefinite" restart="never" nodeType="tmRoot"/>
-      </p:par>
-    </p:tnLst>
-  </p:timing>
-</p:sld>
-</file>
-
-<file path=ppt/slides/slide50.xml><?xml version="1.0" encoding="utf-8"?>
+<file path=ppt/slides/slide49.xml><?xml version="1.0" encoding="utf-8"?>
 <p:sld xmlns:a="http://schemas.openxmlformats.org/drawingml/2006/main" xmlns:r="http://schemas.openxmlformats.org/officeDocument/2006/relationships" xmlns:p="http://schemas.openxmlformats.org/presentationml/2006/main">
   <p:cSld>
     <p:spTree>
@@ -21433,7 +21085,80 @@
 </p:sld>
 </file>
 
-<file path=ppt/slides/slide51.xml><?xml version="1.0" encoding="utf-8"?>
+<file path=ppt/slides/slide5.xml><?xml version="1.0" encoding="utf-8"?>
+<p:sld xmlns:a="http://schemas.openxmlformats.org/drawingml/2006/main" xmlns:r="http://schemas.openxmlformats.org/officeDocument/2006/relationships" xmlns:p="http://schemas.openxmlformats.org/presentationml/2006/main">
+  <p:cSld>
+    <p:spTree>
+      <p:nvGrpSpPr>
+        <p:cNvPr id="1" name=""/>
+        <p:cNvGrpSpPr/>
+        <p:nvPr/>
+      </p:nvGrpSpPr>
+      <p:grpSpPr>
+        <a:xfrm>
+          <a:off x="0" y="0"/>
+          <a:ext cx="0" cy="0"/>
+          <a:chOff x="0" y="0"/>
+          <a:chExt cx="0" cy="0"/>
+        </a:xfrm>
+      </p:grpSpPr>
+      <p:sp>
+        <p:nvSpPr>
+          <p:cNvPr id="5122" name="Rectangle 2"/>
+          <p:cNvSpPr>
+            <a:spLocks noGrp="1" noChangeArrowheads="1"/>
+          </p:cNvSpPr>
+          <p:nvPr>
+            <p:ph type="ctrTitle"/>
+          </p:nvPr>
+        </p:nvSpPr>
+        <p:spPr>
+          <a:xfrm>
+            <a:off x="311150" y="2263775"/>
+            <a:ext cx="3854450" cy="1481138"/>
+          </a:xfrm>
+        </p:spPr>
+        <p:txBody>
+          <a:bodyPr/>
+          <a:lstStyle/>
+          <a:p>
+            <a:pPr eaLnBrk="1" hangingPunct="1"/>
+            <a:r>
+              <a:rPr lang="en-US" sz="2400" dirty="0" smtClean="0"/>
+              <a:t>7.1 VPNs</a:t>
+            </a:r>
+            <a:endParaRPr lang="en-US" sz="2400" dirty="0" smtClean="0">
+              <a:solidFill>
+                <a:schemeClr val="folHlink"/>
+              </a:solidFill>
+            </a:endParaRPr>
+          </a:p>
+        </p:txBody>
+      </p:sp>
+    </p:spTree>
+    <p:extLst>
+      <p:ext uri="{BB962C8B-B14F-4D97-AF65-F5344CB8AC3E}">
+        <p14:creationId xmlns:p14="http://schemas.microsoft.com/office/powerpoint/2010/main" val="1915260488"/>
+      </p:ext>
+    </p:extLst>
+  </p:cSld>
+  <p:clrMapOvr>
+    <a:masterClrMapping/>
+  </p:clrMapOvr>
+  <p:transition>
+    <p:wipe dir="r"/>
+  </p:transition>
+  <p:timing>
+    <p:tnLst>
+      <p:par>
+        <p:cTn id="1" dur="indefinite" restart="never" nodeType="tmRoot"/>
+      </p:par>
+    </p:tnLst>
+  </p:timing>
+</p:sld>
+</file>
+
+<file path=ppt/slides/slide50.xml><?xml version="1.0" encoding="utf-8"?>
 <p:sld xmlns:a="http://schemas.openxmlformats.org/drawingml/2006/main" xmlns:r="http://schemas.openxmlformats.org/officeDocument/2006/relationships" xmlns:p="http://schemas.openxmlformats.org/presentationml/2006/main">
   <p:cSld>
     <p:spTree>
@@ -21565,6 +21290,193 @@
 </p:sld>
 </file>
 
+<file path=ppt/slides/slide51.xml><?xml version="1.0" encoding="utf-8"?>
+<p:sld xmlns:a="http://schemas.openxmlformats.org/drawingml/2006/main" xmlns:r="http://schemas.openxmlformats.org/officeDocument/2006/relationships" xmlns:p="http://schemas.openxmlformats.org/presentationml/2006/main">
+  <p:cSld>
+    <p:spTree>
+      <p:nvGrpSpPr>
+        <p:cNvPr id="1" name=""/>
+        <p:cNvGrpSpPr/>
+        <p:nvPr/>
+      </p:nvGrpSpPr>
+      <p:grpSpPr>
+        <a:xfrm>
+          <a:off x="0" y="0"/>
+          <a:ext cx="0" cy="0"/>
+          <a:chOff x="0" y="0"/>
+          <a:chExt cx="0" cy="0"/>
+        </a:xfrm>
+      </p:grpSpPr>
+      <p:sp>
+        <p:nvSpPr>
+          <p:cNvPr id="29698" name="Rectangle 2"/>
+          <p:cNvSpPr>
+            <a:spLocks noGrp="1" noChangeArrowheads="1"/>
+          </p:cNvSpPr>
+          <p:nvPr>
+            <p:ph type="title"/>
+          </p:nvPr>
+        </p:nvSpPr>
+        <p:spPr>
+          <a:xfrm>
+            <a:off x="390752" y="411466"/>
+            <a:ext cx="8145462" cy="635176"/>
+          </a:xfrm>
+        </p:spPr>
+        <p:txBody>
+          <a:bodyPr/>
+          <a:lstStyle/>
+          <a:p>
+            <a:pPr eaLnBrk="1" hangingPunct="1"/>
+            <a:r>
+              <a:rPr lang="en-US" dirty="0" smtClean="0">
+                <a:ea typeface="ＭＳ Ｐゴシック" pitchFamily="34" charset="-128"/>
+              </a:rPr>
+              <a:t>Chapter 7: Summary</a:t>
+            </a:r>
+          </a:p>
+        </p:txBody>
+      </p:sp>
+      <p:sp>
+        <p:nvSpPr>
+          <p:cNvPr id="6147" name="Rectangle 3"/>
+          <p:cNvSpPr>
+            <a:spLocks noGrp="1" noChangeArrowheads="1"/>
+          </p:cNvSpPr>
+          <p:nvPr>
+            <p:ph idx="1"/>
+          </p:nvPr>
+        </p:nvSpPr>
+        <p:spPr>
+          <a:xfrm>
+            <a:off x="440268" y="1364343"/>
+            <a:ext cx="8224761" cy="4544332"/>
+          </a:xfrm>
+        </p:spPr>
+        <p:txBody>
+          <a:bodyPr/>
+          <a:lstStyle/>
+          <a:p>
+            <a:r>
+              <a:rPr lang="en-US" sz="2000" dirty="0"/>
+              <a:t>VPNs are used to create a secure end-to-end private network connection over a </a:t>
+            </a:r>
+            <a:r>
+              <a:rPr lang="en-US" sz="2000" dirty="0" smtClean="0"/>
+              <a:t>third-party </a:t>
+            </a:r>
+            <a:r>
+              <a:rPr lang="en-US" sz="2000" dirty="0"/>
+              <a:t>network, such as the Internet. </a:t>
+            </a:r>
+            <a:endParaRPr lang="en-US" sz="2000" dirty="0" smtClean="0"/>
+          </a:p>
+          <a:p>
+            <a:r>
+              <a:rPr lang="en-US" sz="2000" dirty="0" smtClean="0"/>
+              <a:t>A </a:t>
+            </a:r>
+            <a:r>
+              <a:rPr lang="en-US" sz="2000" dirty="0"/>
+              <a:t>site-to-site VPN uses a VPN gateway device at the edge of both sites. The end hosts are unaware of the VPN and have no additional supporting software.</a:t>
+            </a:r>
+          </a:p>
+          <a:p>
+            <a:r>
+              <a:rPr lang="en-US" sz="2000" dirty="0"/>
+              <a:t>A </a:t>
+            </a:r>
+            <a:r>
+              <a:rPr lang="en-US" sz="2000" dirty="0" smtClean="0"/>
+              <a:t>remote access </a:t>
+            </a:r>
+            <a:r>
+              <a:rPr lang="en-US" sz="2000" dirty="0"/>
+              <a:t>VPN requires software to be installed on the individual host device that </a:t>
+            </a:r>
+            <a:r>
+              <a:rPr lang="en-US" sz="2000" dirty="0" smtClean="0"/>
+              <a:t>accesses </a:t>
+            </a:r>
+            <a:r>
+              <a:rPr lang="en-US" sz="2000" dirty="0"/>
+              <a:t>the network from a remote location. </a:t>
+            </a:r>
+            <a:endParaRPr lang="en-US" sz="2000" dirty="0" smtClean="0"/>
+          </a:p>
+          <a:p>
+            <a:pPr marL="682625" lvl="1" indent="-225425">
+              <a:buFont typeface="Arial" panose="020B0604020202020204" pitchFamily="34" charset="0"/>
+              <a:buChar char="•"/>
+              <a:tabLst>
+                <a:tab pos="623888" algn="l"/>
+              </a:tabLst>
+            </a:pPr>
+            <a:r>
+              <a:rPr lang="en-US" dirty="0"/>
+              <a:t>The two types of remote access VPNs are SSL and IPsec. </a:t>
+            </a:r>
+          </a:p>
+          <a:p>
+            <a:pPr marL="682625" lvl="1" indent="-225425">
+              <a:buFont typeface="Arial" panose="020B0604020202020204" pitchFamily="34" charset="0"/>
+              <a:buChar char="•"/>
+              <a:tabLst>
+                <a:tab pos="623888" algn="l"/>
+              </a:tabLst>
+            </a:pPr>
+            <a:r>
+              <a:rPr lang="en-US" dirty="0" smtClean="0"/>
+              <a:t>SSL </a:t>
+            </a:r>
+            <a:r>
+              <a:rPr lang="en-US" dirty="0"/>
+              <a:t>technology can provide remote access using a client’s web browser and the browser’s native SSL </a:t>
+            </a:r>
+            <a:r>
+              <a:rPr lang="en-US" dirty="0" smtClean="0"/>
+              <a:t>encryption. </a:t>
+            </a:r>
+          </a:p>
+          <a:p>
+            <a:pPr marL="682625" lvl="1" indent="-225425">
+              <a:buFont typeface="Arial" panose="020B0604020202020204" pitchFamily="34" charset="0"/>
+              <a:buChar char="•"/>
+              <a:tabLst>
+                <a:tab pos="623888" algn="l"/>
+              </a:tabLst>
+            </a:pPr>
+            <a:r>
+              <a:rPr lang="en-US" dirty="0" smtClean="0"/>
+              <a:t>Using </a:t>
+            </a:r>
+            <a:r>
+              <a:rPr lang="en-US" dirty="0"/>
+              <a:t>Cisco AnyConnect software on the client, users can have LAN-like, full network access using SSL</a:t>
+            </a:r>
+            <a:r>
+              <a:rPr lang="en-US" dirty="0" smtClean="0"/>
+              <a:t>.</a:t>
+            </a:r>
+            <a:endParaRPr lang="en-US" dirty="0"/>
+          </a:p>
+        </p:txBody>
+      </p:sp>
+    </p:spTree>
+  </p:cSld>
+  <p:clrMapOvr>
+    <a:masterClrMapping/>
+  </p:clrMapOvr>
+  <p:timing>
+    <p:tnLst>
+      <p:par>
+        <p:cTn id="1" dur="indefinite" restart="never" nodeType="tmRoot"/>
+      </p:par>
+    </p:tnLst>
+  </p:timing>
+</p:sld>
+</file>
+
 <file path=ppt/slides/slide52.xml><?xml version="1.0" encoding="utf-8"?>
 <p:sld xmlns:a="http://schemas.openxmlformats.org/drawingml/2006/main" xmlns:r="http://schemas.openxmlformats.org/officeDocument/2006/relationships" xmlns:p="http://schemas.openxmlformats.org/presentationml/2006/main">
   <p:cSld>
@@ -21594,7 +21506,7 @@
         </p:nvSpPr>
         <p:spPr>
           <a:xfrm>
-            <a:off x="390752" y="411466"/>
+            <a:off x="361724" y="411466"/>
             <a:ext cx="8145462" cy="635176"/>
           </a:xfrm>
         </p:spPr>
@@ -21607,7 +21519,7 @@
               <a:rPr lang="en-US" dirty="0" smtClean="0">
                 <a:ea typeface="ＭＳ Ｐゴシック" pitchFamily="34" charset="-128"/>
               </a:rPr>
-              <a:t>Chapter 7: Summary</a:t>
+              <a:t>Chapter 7: Summary (cont.)</a:t>
             </a:r>
           </a:p>
         </p:txBody>
@@ -21624,8 +21536,8 @@
         </p:nvSpPr>
         <p:spPr>
           <a:xfrm>
-            <a:off x="440268" y="1364343"/>
-            <a:ext cx="8224761" cy="4544332"/>
+            <a:off x="440268" y="1335314"/>
+            <a:ext cx="8181218" cy="4949372"/>
           </a:xfrm>
         </p:spPr>
         <p:txBody>
@@ -21633,49 +21545,12 @@
           <a:lstStyle/>
           <a:p>
             <a:r>
+              <a:rPr lang="en-US" sz="2000" dirty="0" smtClean="0"/>
+              <a:t>GRE </a:t>
+            </a:r>
+            <a:r>
               <a:rPr lang="en-US" sz="2000" dirty="0"/>
-              <a:t>VPNs are used to create a secure end-to-end private network connection over a </a:t>
-            </a:r>
-            <a:r>
-              <a:rPr lang="en-US" sz="2000" dirty="0" smtClean="0"/>
-              <a:t>third-party </a:t>
-            </a:r>
-            <a:r>
-              <a:rPr lang="en-US" sz="2000" dirty="0"/>
-              <a:t>network, such as the Internet. </a:t>
-            </a:r>
-            <a:endParaRPr lang="en-US" sz="2000" dirty="0" smtClean="0"/>
-          </a:p>
-          <a:p>
-            <a:r>
-              <a:rPr lang="en-US" sz="2000" dirty="0" smtClean="0"/>
-              <a:t>A </a:t>
-            </a:r>
-            <a:r>
-              <a:rPr lang="en-US" sz="2000" dirty="0"/>
-              <a:t>site-to-site VPN uses a VPN gateway device at the edge of both sites. The end hosts are unaware of the VPN and have no additional supporting software.</a:t>
-            </a:r>
-          </a:p>
-          <a:p>
-            <a:r>
-              <a:rPr lang="en-US" sz="2000" dirty="0"/>
-              <a:t>A </a:t>
-            </a:r>
-            <a:r>
-              <a:rPr lang="en-US" sz="2000" dirty="0" smtClean="0"/>
-              <a:t>remote access </a:t>
-            </a:r>
-            <a:r>
-              <a:rPr lang="en-US" sz="2000" dirty="0"/>
-              <a:t>VPN requires software to be installed on the individual host device that </a:t>
-            </a:r>
-            <a:r>
-              <a:rPr lang="en-US" sz="2000" dirty="0" smtClean="0"/>
-              <a:t>accesses </a:t>
-            </a:r>
-            <a:r>
-              <a:rPr lang="en-US" sz="2000" dirty="0"/>
-              <a:t>the network from a remote location. </a:t>
+              <a:t>is a basic, non-secure site-to-site VPN tunneling protocol that can encapsulate a wide variety of protocol packet types inside IP tunnels, thus allowing an organization to deliver other protocols through an IP-based WAN. </a:t>
             </a:r>
             <a:endParaRPr lang="en-US" sz="2000" dirty="0" smtClean="0"/>
           </a:p>
@@ -21683,51 +21558,77 @@
             <a:pPr marL="682625" lvl="1" indent="-225425">
               <a:buFont typeface="Arial" panose="020B0604020202020204" pitchFamily="34" charset="0"/>
               <a:buChar char="•"/>
-              <a:tabLst>
-                <a:tab pos="623888" algn="l"/>
-              </a:tabLst>
             </a:pPr>
             <a:r>
+              <a:rPr lang="en-US" dirty="0" smtClean="0"/>
+              <a:t>Today, </a:t>
+            </a:r>
+            <a:r>
               <a:rPr lang="en-US" dirty="0"/>
-              <a:t>The two types of remote access VPNs are SSL and IPsec. </a:t>
-            </a:r>
+              <a:t>it is primarily used to deliver IP multicast traffic or IPv6 traffic over an IPv4 unicast-only connection.</a:t>
+            </a:r>
+          </a:p>
+          <a:p>
+            <a:r>
+              <a:rPr lang="en-US" sz="2000" dirty="0" smtClean="0"/>
+              <a:t>IPsec, </a:t>
+            </a:r>
+            <a:r>
+              <a:rPr lang="en-US" sz="2000" dirty="0"/>
+              <a:t>an IETF standard, is a secure tunnel operating at Layer 3 of the OSI model that can protect and authenticate IP packets between </a:t>
+            </a:r>
+            <a:r>
+              <a:rPr lang="en-US" sz="2000" dirty="0" smtClean="0"/>
+              <a:t>IPsec </a:t>
+            </a:r>
+            <a:r>
+              <a:rPr lang="en-US" sz="2000" dirty="0"/>
+              <a:t>peers. </a:t>
+            </a:r>
+            <a:endParaRPr lang="en-US" sz="2000" dirty="0" smtClean="0"/>
           </a:p>
           <a:p>
             <a:pPr marL="682625" lvl="1" indent="-225425">
               <a:buFont typeface="Arial" panose="020B0604020202020204" pitchFamily="34" charset="0"/>
               <a:buChar char="•"/>
-              <a:tabLst>
-                <a:tab pos="623888" algn="l"/>
-              </a:tabLst>
             </a:pPr>
             <a:r>
               <a:rPr lang="en-US" dirty="0" smtClean="0"/>
-              <a:t>SSL </a:t>
+              <a:t>It </a:t>
             </a:r>
             <a:r>
               <a:rPr lang="en-US" dirty="0"/>
-              <a:t>technology can provide remote access using a client’s web browser and the browser’s native SSL </a:t>
-            </a:r>
-            <a:r>
-              <a:rPr lang="en-US" dirty="0" smtClean="0"/>
-              <a:t>encryption. </a:t>
-            </a:r>
+              <a:t>can provide confidentiality by using encryption, data integrity, authentication, and anti-replay protection. </a:t>
+            </a:r>
+            <a:endParaRPr lang="en-US" dirty="0" smtClean="0"/>
           </a:p>
           <a:p>
             <a:pPr marL="682625" lvl="1" indent="-225425">
               <a:buFont typeface="Arial" panose="020B0604020202020204" pitchFamily="34" charset="0"/>
               <a:buChar char="•"/>
-              <a:tabLst>
-                <a:tab pos="623888" algn="l"/>
-              </a:tabLst>
             </a:pPr>
             <a:r>
               <a:rPr lang="en-US" dirty="0" smtClean="0"/>
-              <a:t>Using </a:t>
+              <a:t>Data </a:t>
             </a:r>
             <a:r>
               <a:rPr lang="en-US" dirty="0"/>
-              <a:t>Cisco AnyConnect software on the client, users can have LAN-like, full network access using SSL</a:t>
+              <a:t>integrity is provided by using a hash algorithm, such as MD5 or SHA. </a:t>
+            </a:r>
+            <a:endParaRPr lang="en-US" dirty="0" smtClean="0"/>
+          </a:p>
+          <a:p>
+            <a:pPr marL="682625" lvl="1" indent="-225425">
+              <a:buFont typeface="Arial" panose="020B0604020202020204" pitchFamily="34" charset="0"/>
+              <a:buChar char="•"/>
+            </a:pPr>
+            <a:r>
+              <a:rPr lang="en-US" dirty="0" smtClean="0"/>
+              <a:t>Authentication </a:t>
+            </a:r>
+            <a:r>
+              <a:rPr lang="en-US" dirty="0"/>
+              <a:t>is provided by the PSK or RSA peer authentication method</a:t>
             </a:r>
             <a:r>
               <a:rPr lang="en-US" dirty="0" smtClean="0"/>
@@ -21738,6 +21639,11 @@
         </p:txBody>
       </p:sp>
     </p:spTree>
+    <p:extLst>
+      <p:ext uri="{BB962C8B-B14F-4D97-AF65-F5344CB8AC3E}">
+        <p14:creationId xmlns:p14="http://schemas.microsoft.com/office/powerpoint/2010/main" val="2427372721"/>
+      </p:ext>
+    </p:extLst>
   </p:cSld>
   <p:clrMapOvr>
     <a:masterClrMapping/>
@@ -21781,7 +21687,7 @@
         </p:nvSpPr>
         <p:spPr>
           <a:xfrm>
-            <a:off x="361724" y="411466"/>
+            <a:off x="477838" y="411464"/>
             <a:ext cx="8145462" cy="635176"/>
           </a:xfrm>
         </p:spPr>
@@ -21811,8 +21717,8 @@
         </p:nvSpPr>
         <p:spPr>
           <a:xfrm>
-            <a:off x="440268" y="1335314"/>
-            <a:ext cx="8181218" cy="4949372"/>
+            <a:off x="440268" y="1291771"/>
+            <a:ext cx="8410046" cy="4616904"/>
           </a:xfrm>
         </p:spPr>
         <p:txBody>
@@ -21821,102 +21727,41 @@
           <a:p>
             <a:r>
               <a:rPr lang="en-US" sz="2000" dirty="0" smtClean="0"/>
-              <a:t>GRE </a:t>
+              <a:t>The </a:t>
             </a:r>
             <a:r>
               <a:rPr lang="en-US" sz="2000" dirty="0"/>
-              <a:t>is a basic, non-secure site-to-site VPN tunneling protocol that can encapsulate a wide variety of protocol packet types inside IP tunnels, thus allowing an organization to deliver other protocols through an IP-based WAN. </a:t>
+              <a:t>level of confidentiality provided by encryption depends on the algorithm used and the key length. </a:t>
             </a:r>
             <a:endParaRPr lang="en-US" sz="2000" dirty="0" smtClean="0"/>
           </a:p>
           <a:p>
-            <a:pPr marL="682625" lvl="1" indent="-225425">
-              <a:buFont typeface="Arial" panose="020B0604020202020204" pitchFamily="34" charset="0"/>
-              <a:buChar char="•"/>
-            </a:pPr>
-            <a:r>
-              <a:rPr lang="en-US" dirty="0" smtClean="0"/>
-              <a:t>Today, </a:t>
-            </a:r>
-            <a:r>
-              <a:rPr lang="en-US" dirty="0"/>
-              <a:t>it is primarily used to deliver IP multicast traffic or IPv6 traffic over an IPv4 unicast-only connection.</a:t>
-            </a:r>
-          </a:p>
-          <a:p>
             <a:r>
               <a:rPr lang="en-US" sz="2000" dirty="0" smtClean="0"/>
-              <a:t>IPsec, </a:t>
+              <a:t>Encryption </a:t>
             </a:r>
             <a:r>
               <a:rPr lang="en-US" sz="2000" dirty="0"/>
-              <a:t>an IETF standard, is a secure tunnel operating at Layer 3 of the OSI model that can protect and authenticate IP packets between </a:t>
-            </a:r>
+              <a:t>can be symmetrical or asymmetrical. </a:t>
+            </a:r>
+            <a:endParaRPr lang="en-US" sz="2000" dirty="0" smtClean="0"/>
+          </a:p>
+          <a:p>
             <a:r>
               <a:rPr lang="en-US" sz="2000" dirty="0" smtClean="0"/>
-              <a:t>IPsec </a:t>
+              <a:t>DH </a:t>
             </a:r>
             <a:r>
               <a:rPr lang="en-US" sz="2000" dirty="0"/>
-              <a:t>peers. </a:t>
-            </a:r>
-            <a:endParaRPr lang="en-US" sz="2000" dirty="0" smtClean="0"/>
-          </a:p>
-          <a:p>
-            <a:pPr marL="682625" lvl="1" indent="-225425">
-              <a:buFont typeface="Arial" panose="020B0604020202020204" pitchFamily="34" charset="0"/>
-              <a:buChar char="•"/>
-            </a:pPr>
-            <a:r>
-              <a:rPr lang="en-US" dirty="0" smtClean="0"/>
-              <a:t>It </a:t>
-            </a:r>
-            <a:r>
-              <a:rPr lang="en-US" dirty="0"/>
-              <a:t>can provide confidentiality by using encryption, data integrity, authentication, and anti-replay protection. </a:t>
-            </a:r>
-            <a:endParaRPr lang="en-US" dirty="0" smtClean="0"/>
-          </a:p>
-          <a:p>
-            <a:pPr marL="682625" lvl="1" indent="-225425">
-              <a:buFont typeface="Arial" panose="020B0604020202020204" pitchFamily="34" charset="0"/>
-              <a:buChar char="•"/>
-            </a:pPr>
-            <a:r>
-              <a:rPr lang="en-US" dirty="0" smtClean="0"/>
-              <a:t>Data </a:t>
-            </a:r>
-            <a:r>
-              <a:rPr lang="en-US" dirty="0"/>
-              <a:t>integrity is provided by using a hash algorithm, such as MD5 or SHA. </a:t>
-            </a:r>
-            <a:endParaRPr lang="en-US" dirty="0" smtClean="0"/>
-          </a:p>
-          <a:p>
-            <a:pPr marL="682625" lvl="1" indent="-225425">
-              <a:buFont typeface="Arial" panose="020B0604020202020204" pitchFamily="34" charset="0"/>
-              <a:buChar char="•"/>
-            </a:pPr>
-            <a:r>
-              <a:rPr lang="en-US" dirty="0" smtClean="0"/>
-              <a:t>Authentication </a:t>
-            </a:r>
-            <a:r>
-              <a:rPr lang="en-US" dirty="0"/>
-              <a:t>is provided by the PSK or RSA peer authentication method</a:t>
-            </a:r>
-            <a:r>
-              <a:rPr lang="en-US" dirty="0" smtClean="0"/>
-              <a:t>.</a:t>
-            </a:r>
-            <a:endParaRPr lang="en-US" dirty="0"/>
+              <a:t>is a method used to securely exchange the keys to encrypt data.</a:t>
+            </a:r>
           </a:p>
         </p:txBody>
       </p:sp>
     </p:spTree>
     <p:extLst>
       <p:ext uri="{BB962C8B-B14F-4D97-AF65-F5344CB8AC3E}">
-        <p14:creationId xmlns:p14="http://schemas.microsoft.com/office/powerpoint/2010/main" val="2427372721"/>
+        <p14:creationId xmlns:p14="http://schemas.microsoft.com/office/powerpoint/2010/main" val="2818231821"/>
       </p:ext>
     </p:extLst>
   </p:cSld>
@@ -21952,126 +21797,6 @@
       </p:grpSpPr>
       <p:sp>
         <p:nvSpPr>
-          <p:cNvPr id="29698" name="Rectangle 2"/>
-          <p:cNvSpPr>
-            <a:spLocks noGrp="1" noChangeArrowheads="1"/>
-          </p:cNvSpPr>
-          <p:nvPr>
-            <p:ph type="title"/>
-          </p:nvPr>
-        </p:nvSpPr>
-        <p:spPr>
-          <a:xfrm>
-            <a:off x="477838" y="411464"/>
-            <a:ext cx="8145462" cy="635176"/>
-          </a:xfrm>
-        </p:spPr>
-        <p:txBody>
-          <a:bodyPr/>
-          <a:lstStyle/>
-          <a:p>
-            <a:pPr eaLnBrk="1" hangingPunct="1"/>
-            <a:r>
-              <a:rPr lang="en-US" dirty="0" smtClean="0">
-                <a:ea typeface="ＭＳ Ｐゴシック" pitchFamily="34" charset="-128"/>
-              </a:rPr>
-              <a:t>Chapter 7: Summary (cont.)</a:t>
-            </a:r>
-          </a:p>
-        </p:txBody>
-      </p:sp>
-      <p:sp>
-        <p:nvSpPr>
-          <p:cNvPr id="6147" name="Rectangle 3"/>
-          <p:cNvSpPr>
-            <a:spLocks noGrp="1" noChangeArrowheads="1"/>
-          </p:cNvSpPr>
-          <p:nvPr>
-            <p:ph idx="1"/>
-          </p:nvPr>
-        </p:nvSpPr>
-        <p:spPr>
-          <a:xfrm>
-            <a:off x="440268" y="1291771"/>
-            <a:ext cx="8410046" cy="4616904"/>
-          </a:xfrm>
-        </p:spPr>
-        <p:txBody>
-          <a:bodyPr/>
-          <a:lstStyle/>
-          <a:p>
-            <a:r>
-              <a:rPr lang="en-US" sz="2000" dirty="0" smtClean="0"/>
-              <a:t>The </a:t>
-            </a:r>
-            <a:r>
-              <a:rPr lang="en-US" sz="2000" dirty="0"/>
-              <a:t>level of confidentiality provided by encryption depends on the algorithm used and the key length. </a:t>
-            </a:r>
-            <a:endParaRPr lang="en-US" sz="2000" dirty="0" smtClean="0"/>
-          </a:p>
-          <a:p>
-            <a:r>
-              <a:rPr lang="en-US" sz="2000" dirty="0" smtClean="0"/>
-              <a:t>Encryption </a:t>
-            </a:r>
-            <a:r>
-              <a:rPr lang="en-US" sz="2000" dirty="0"/>
-              <a:t>can be symmetrical or asymmetrical. </a:t>
-            </a:r>
-            <a:endParaRPr lang="en-US" sz="2000" dirty="0" smtClean="0"/>
-          </a:p>
-          <a:p>
-            <a:r>
-              <a:rPr lang="en-US" sz="2000" dirty="0" smtClean="0"/>
-              <a:t>DH </a:t>
-            </a:r>
-            <a:r>
-              <a:rPr lang="en-US" sz="2000" dirty="0"/>
-              <a:t>is a method used to securely exchange the keys to encrypt data.</a:t>
-            </a:r>
-          </a:p>
-        </p:txBody>
-      </p:sp>
-    </p:spTree>
-    <p:extLst>
-      <p:ext uri="{BB962C8B-B14F-4D97-AF65-F5344CB8AC3E}">
-        <p14:creationId xmlns:p14="http://schemas.microsoft.com/office/powerpoint/2010/main" val="2818231821"/>
-      </p:ext>
-    </p:extLst>
-  </p:cSld>
-  <p:clrMapOvr>
-    <a:masterClrMapping/>
-  </p:clrMapOvr>
-  <p:timing>
-    <p:tnLst>
-      <p:par>
-        <p:cTn id="1" dur="indefinite" restart="never" nodeType="tmRoot"/>
-      </p:par>
-    </p:tnLst>
-  </p:timing>
-</p:sld>
-</file>
-
-<file path=ppt/slides/slide55.xml><?xml version="1.0" encoding="utf-8"?>
-<p:sld xmlns:a="http://schemas.openxmlformats.org/drawingml/2006/main" xmlns:r="http://schemas.openxmlformats.org/officeDocument/2006/relationships" xmlns:p="http://schemas.openxmlformats.org/presentationml/2006/main">
-  <p:cSld>
-    <p:spTree>
-      <p:nvGrpSpPr>
-        <p:cNvPr id="1" name=""/>
-        <p:cNvGrpSpPr/>
-        <p:nvPr/>
-      </p:nvGrpSpPr>
-      <p:grpSpPr>
-        <a:xfrm>
-          <a:off x="0" y="0"/>
-          <a:ext cx="0" cy="0"/>
-          <a:chOff x="0" y="0"/>
-          <a:chExt cx="0" cy="0"/>
-        </a:xfrm>
-      </p:grpSpPr>
-      <p:sp>
-        <p:nvSpPr>
           <p:cNvPr id="30722" name="Rectangle 2"/>
           <p:cNvSpPr>
             <a:spLocks noChangeArrowheads="1"/>
@@ -22154,2160 +21879,7 @@
 </p:sld>
 </file>
 
-<file path=ppt/slides/slide56.xml><?xml version="1.0" encoding="utf-8"?>
-<p:sld xmlns:a="http://schemas.openxmlformats.org/drawingml/2006/main" xmlns:r="http://schemas.openxmlformats.org/officeDocument/2006/relationships" xmlns:p="http://schemas.openxmlformats.org/presentationml/2006/main">
-  <p:cSld>
-    <p:spTree>
-      <p:nvGrpSpPr>
-        <p:cNvPr id="1" name=""/>
-        <p:cNvGrpSpPr/>
-        <p:nvPr/>
-      </p:nvGrpSpPr>
-      <p:grpSpPr>
-        <a:xfrm>
-          <a:off x="0" y="0"/>
-          <a:ext cx="0" cy="0"/>
-          <a:chOff x="0" y="0"/>
-          <a:chExt cx="0" cy="0"/>
-        </a:xfrm>
-      </p:grpSpPr>
-      <p:sp>
-        <p:nvSpPr>
-          <p:cNvPr id="2" name="Rectangle 2"/>
-          <p:cNvSpPr txBox="1">
-            <a:spLocks noChangeArrowheads="1"/>
-          </p:cNvSpPr>
-          <p:nvPr/>
-        </p:nvSpPr>
-        <p:spPr>
-          <a:xfrm>
-            <a:off x="477838" y="411464"/>
-            <a:ext cx="8145462" cy="635176"/>
-          </a:xfrm>
-          <a:prstGeom prst="rect">
-            <a:avLst/>
-          </a:prstGeom>
-        </p:spPr>
-        <p:txBody>
-          <a:bodyPr/>
-          <a:lstStyle>
-            <a:lvl1pPr algn="l" defTabSz="814388" rtl="0" eaLnBrk="0" fontAlgn="base" hangingPunct="0">
-              <a:lnSpc>
-                <a:spcPct val="90000"/>
-              </a:lnSpc>
-              <a:spcBef>
-                <a:spcPct val="0"/>
-              </a:spcBef>
-              <a:spcAft>
-                <a:spcPct val="0"/>
-              </a:spcAft>
-              <a:defRPr sz="3200" b="1">
-                <a:solidFill>
-                  <a:srgbClr val="708CA1"/>
-                </a:solidFill>
-                <a:latin typeface="+mj-lt"/>
-                <a:ea typeface="+mj-ea"/>
-                <a:cs typeface="+mj-cs"/>
-              </a:defRPr>
-            </a:lvl1pPr>
-            <a:lvl2pPr algn="l" defTabSz="814388" rtl="0" eaLnBrk="0" fontAlgn="base" hangingPunct="0">
-              <a:lnSpc>
-                <a:spcPct val="90000"/>
-              </a:lnSpc>
-              <a:spcBef>
-                <a:spcPct val="0"/>
-              </a:spcBef>
-              <a:spcAft>
-                <a:spcPct val="0"/>
-              </a:spcAft>
-              <a:defRPr sz="3200" b="1">
-                <a:solidFill>
-                  <a:srgbClr val="708CA1"/>
-                </a:solidFill>
-                <a:latin typeface="Arial" charset="0"/>
-              </a:defRPr>
-            </a:lvl2pPr>
-            <a:lvl3pPr algn="l" defTabSz="814388" rtl="0" eaLnBrk="0" fontAlgn="base" hangingPunct="0">
-              <a:lnSpc>
-                <a:spcPct val="90000"/>
-              </a:lnSpc>
-              <a:spcBef>
-                <a:spcPct val="0"/>
-              </a:spcBef>
-              <a:spcAft>
-                <a:spcPct val="0"/>
-              </a:spcAft>
-              <a:defRPr sz="3200" b="1">
-                <a:solidFill>
-                  <a:srgbClr val="708CA1"/>
-                </a:solidFill>
-                <a:latin typeface="Arial" charset="0"/>
-              </a:defRPr>
-            </a:lvl3pPr>
-            <a:lvl4pPr algn="l" defTabSz="814388" rtl="0" eaLnBrk="0" fontAlgn="base" hangingPunct="0">
-              <a:lnSpc>
-                <a:spcPct val="90000"/>
-              </a:lnSpc>
-              <a:spcBef>
-                <a:spcPct val="0"/>
-              </a:spcBef>
-              <a:spcAft>
-                <a:spcPct val="0"/>
-              </a:spcAft>
-              <a:defRPr sz="3200" b="1">
-                <a:solidFill>
-                  <a:srgbClr val="708CA1"/>
-                </a:solidFill>
-                <a:latin typeface="Arial" charset="0"/>
-              </a:defRPr>
-            </a:lvl4pPr>
-            <a:lvl5pPr algn="l" defTabSz="814388" rtl="0" eaLnBrk="0" fontAlgn="base" hangingPunct="0">
-              <a:lnSpc>
-                <a:spcPct val="90000"/>
-              </a:lnSpc>
-              <a:spcBef>
-                <a:spcPct val="0"/>
-              </a:spcBef>
-              <a:spcAft>
-                <a:spcPct val="0"/>
-              </a:spcAft>
-              <a:defRPr sz="3200" b="1">
-                <a:solidFill>
-                  <a:srgbClr val="708CA1"/>
-                </a:solidFill>
-                <a:latin typeface="Arial" charset="0"/>
-              </a:defRPr>
-            </a:lvl5pPr>
-            <a:lvl6pPr marL="457200" algn="l" defTabSz="814388" rtl="0" eaLnBrk="1" fontAlgn="base" hangingPunct="1">
-              <a:lnSpc>
-                <a:spcPct val="90000"/>
-              </a:lnSpc>
-              <a:spcBef>
-                <a:spcPct val="0"/>
-              </a:spcBef>
-              <a:spcAft>
-                <a:spcPct val="0"/>
-              </a:spcAft>
-              <a:defRPr sz="3200" b="1">
-                <a:solidFill>
-                  <a:srgbClr val="708CA1"/>
-                </a:solidFill>
-                <a:latin typeface="Arial" charset="0"/>
-              </a:defRPr>
-            </a:lvl6pPr>
-            <a:lvl7pPr marL="914400" algn="l" defTabSz="814388" rtl="0" eaLnBrk="1" fontAlgn="base" hangingPunct="1">
-              <a:lnSpc>
-                <a:spcPct val="90000"/>
-              </a:lnSpc>
-              <a:spcBef>
-                <a:spcPct val="0"/>
-              </a:spcBef>
-              <a:spcAft>
-                <a:spcPct val="0"/>
-              </a:spcAft>
-              <a:defRPr sz="3200" b="1">
-                <a:solidFill>
-                  <a:srgbClr val="708CA1"/>
-                </a:solidFill>
-                <a:latin typeface="Arial" charset="0"/>
-              </a:defRPr>
-            </a:lvl7pPr>
-            <a:lvl8pPr marL="1371600" algn="l" defTabSz="814388" rtl="0" eaLnBrk="1" fontAlgn="base" hangingPunct="1">
-              <a:lnSpc>
-                <a:spcPct val="90000"/>
-              </a:lnSpc>
-              <a:spcBef>
-                <a:spcPct val="0"/>
-              </a:spcBef>
-              <a:spcAft>
-                <a:spcPct val="0"/>
-              </a:spcAft>
-              <a:defRPr sz="3200" b="1">
-                <a:solidFill>
-                  <a:srgbClr val="708CA1"/>
-                </a:solidFill>
-                <a:latin typeface="Arial" charset="0"/>
-              </a:defRPr>
-            </a:lvl8pPr>
-            <a:lvl9pPr marL="1828800" algn="l" defTabSz="814388" rtl="0" eaLnBrk="1" fontAlgn="base" hangingPunct="1">
-              <a:lnSpc>
-                <a:spcPct val="90000"/>
-              </a:lnSpc>
-              <a:spcBef>
-                <a:spcPct val="0"/>
-              </a:spcBef>
-              <a:spcAft>
-                <a:spcPct val="0"/>
-              </a:spcAft>
-              <a:defRPr sz="3200" b="1">
-                <a:solidFill>
-                  <a:srgbClr val="708CA1"/>
-                </a:solidFill>
-                <a:latin typeface="Arial" charset="0"/>
-              </a:defRPr>
-            </a:lvl9pPr>
-          </a:lstStyle>
-          <a:p>
-            <a:pPr eaLnBrk="1" hangingPunct="1"/>
-            <a:r>
-              <a:rPr lang="en-US" kern="0" dirty="0" smtClean="0">
-                <a:ea typeface="ＭＳ Ｐゴシック" pitchFamily="34" charset="-128"/>
-              </a:rPr>
-              <a:t>Review</a:t>
-            </a:r>
-          </a:p>
-        </p:txBody>
-      </p:sp>
-      <p:sp>
-        <p:nvSpPr>
-          <p:cNvPr id="3" name="Rectangle 2"/>
-          <p:cNvSpPr/>
-          <p:nvPr/>
-        </p:nvSpPr>
-        <p:spPr>
-          <a:xfrm>
-            <a:off x="477838" y="1971431"/>
-            <a:ext cx="8208819" cy="3083921"/>
-          </a:xfrm>
-          <a:prstGeom prst="rect">
-            <a:avLst/>
-          </a:prstGeom>
-        </p:spPr>
-        <p:txBody>
-          <a:bodyPr wrap="square">
-            <a:spAutoFit/>
-          </a:bodyPr>
-          <a:lstStyle/>
-          <a:p>
-            <a:pPr algn="just"/>
-            <a:r>
-              <a:rPr lang="en-US" sz="1800" dirty="0" smtClean="0"/>
-              <a:t>Created </a:t>
-            </a:r>
-            <a:r>
-              <a:rPr lang="en-US" sz="1800" dirty="0"/>
-              <a:t>an </a:t>
-            </a:r>
-            <a:r>
-              <a:rPr lang="en-US" sz="1800" dirty="0" err="1"/>
-              <a:t>IPSec</a:t>
-            </a:r>
-            <a:r>
-              <a:rPr lang="en-US" sz="1800" dirty="0"/>
-              <a:t> based Virtual Private Network (VPN) for a company to connect with its partner's network securely. The data transmitted is authenticated and encrypted over the Internet so Confidentiality, Integrity, and Availability can be achieved</a:t>
-            </a:r>
-            <a:r>
-              <a:rPr lang="en-US" sz="1800" dirty="0" smtClean="0"/>
-              <a:t>.</a:t>
-            </a:r>
-          </a:p>
-          <a:p>
-            <a:pPr algn="just"/>
-            <a:endParaRPr lang="en-US" sz="1800" dirty="0"/>
-          </a:p>
-          <a:p>
-            <a:pPr algn="just"/>
-            <a:r>
-              <a:rPr lang="en-US" sz="1800" dirty="0"/>
-              <a:t>Configuration includes:</a:t>
-            </a:r>
-          </a:p>
-          <a:p>
-            <a:pPr marL="285750" indent="-285750" algn="just">
-              <a:buFont typeface="Arial" panose="020B0604020202020204" pitchFamily="34" charset="0"/>
-              <a:buChar char="•"/>
-            </a:pPr>
-            <a:r>
-              <a:rPr lang="en-US" sz="1800" dirty="0"/>
-              <a:t>Type of VPN: IPsec tunnel</a:t>
-            </a:r>
-          </a:p>
-          <a:p>
-            <a:pPr marL="285750" indent="-285750" algn="just">
-              <a:buFont typeface="Arial" panose="020B0604020202020204" pitchFamily="34" charset="0"/>
-              <a:buChar char="•"/>
-            </a:pPr>
-            <a:r>
-              <a:rPr lang="en-US" sz="1800" dirty="0"/>
-              <a:t>Tunnel policy: Internet Security Association and Key Management Protocol (ISAKMP-IKEv2)</a:t>
-            </a:r>
-          </a:p>
-          <a:p>
-            <a:pPr marL="285750" indent="-285750" algn="just">
-              <a:buFont typeface="Arial" panose="020B0604020202020204" pitchFamily="34" charset="0"/>
-              <a:buChar char="•"/>
-            </a:pPr>
-            <a:r>
-              <a:rPr lang="en-US" sz="1800" dirty="0"/>
-              <a:t>Failover plan: Port-Channel and Double-Homed Single ISP (WAN topology)</a:t>
-            </a:r>
-          </a:p>
-          <a:p>
-            <a:pPr marL="285750" indent="-285750" algn="just">
-              <a:buFont typeface="Arial" panose="020B0604020202020204" pitchFamily="34" charset="0"/>
-              <a:buChar char="•"/>
-            </a:pPr>
-            <a:r>
-              <a:rPr lang="en-US" sz="1800" dirty="0"/>
-              <a:t>Packet filter: Extended Access-List</a:t>
-            </a:r>
-          </a:p>
-          <a:p>
-            <a:pPr marL="285750" indent="-285750" algn="just">
-              <a:buFont typeface="Arial" panose="020B0604020202020204" pitchFamily="34" charset="0"/>
-              <a:buChar char="•"/>
-            </a:pPr>
-            <a:r>
-              <a:rPr lang="en-US" sz="1800" dirty="0"/>
-              <a:t>IP addressing scheme: Internet Protocol Version 4 (IPv4)</a:t>
-            </a:r>
-          </a:p>
-        </p:txBody>
-      </p:sp>
-      <p:sp>
-        <p:nvSpPr>
-          <p:cNvPr id="4" name="Rectangle 3"/>
-          <p:cNvSpPr/>
-          <p:nvPr/>
-        </p:nvSpPr>
-        <p:spPr>
-          <a:xfrm>
-            <a:off x="477838" y="1296669"/>
-            <a:ext cx="1707519" cy="424732"/>
-          </a:xfrm>
-          <a:prstGeom prst="rect">
-            <a:avLst/>
-          </a:prstGeom>
-        </p:spPr>
-        <p:txBody>
-          <a:bodyPr wrap="none">
-            <a:spAutoFit/>
-          </a:bodyPr>
-          <a:lstStyle/>
-          <a:p>
-            <a:pPr algn="just"/>
-            <a:r>
-              <a:rPr lang="en-US" b="1" dirty="0">
-                <a:solidFill>
-                  <a:srgbClr val="00B0F0"/>
-                </a:solidFill>
-              </a:rPr>
-              <a:t>IPsec VPN</a:t>
-            </a:r>
-          </a:p>
-        </p:txBody>
-      </p:sp>
-    </p:spTree>
-    <p:extLst>
-      <p:ext uri="{BB962C8B-B14F-4D97-AF65-F5344CB8AC3E}">
-        <p14:creationId xmlns:p14="http://schemas.microsoft.com/office/powerpoint/2010/main" val="4196066826"/>
-      </p:ext>
-    </p:extLst>
-  </p:cSld>
-  <p:clrMapOvr>
-    <a:masterClrMapping/>
-  </p:clrMapOvr>
-  <p:timing>
-    <p:tnLst>
-      <p:par>
-        <p:cTn id="1" dur="indefinite" restart="never" nodeType="tmRoot"/>
-      </p:par>
-    </p:tnLst>
-  </p:timing>
-</p:sld>
-</file>
-
-<file path=ppt/slides/slide57.xml><?xml version="1.0" encoding="utf-8"?>
-<p:sld xmlns:a="http://schemas.openxmlformats.org/drawingml/2006/main" xmlns:r="http://schemas.openxmlformats.org/officeDocument/2006/relationships" xmlns:p="http://schemas.openxmlformats.org/presentationml/2006/main">
-  <p:cSld>
-    <p:spTree>
-      <p:nvGrpSpPr>
-        <p:cNvPr id="1" name=""/>
-        <p:cNvGrpSpPr/>
-        <p:nvPr/>
-      </p:nvGrpSpPr>
-      <p:grpSpPr>
-        <a:xfrm>
-          <a:off x="0" y="0"/>
-          <a:ext cx="0" cy="0"/>
-          <a:chOff x="0" y="0"/>
-          <a:chExt cx="0" cy="0"/>
-        </a:xfrm>
-      </p:grpSpPr>
-      <p:sp>
-        <p:nvSpPr>
-          <p:cNvPr id="2" name="Rectangle 1"/>
-          <p:cNvSpPr/>
-          <p:nvPr/>
-        </p:nvSpPr>
-        <p:spPr>
-          <a:xfrm>
-            <a:off x="446809" y="952576"/>
-            <a:ext cx="8416637" cy="3416320"/>
-          </a:xfrm>
-          <a:prstGeom prst="rect">
-            <a:avLst/>
-          </a:prstGeom>
-        </p:spPr>
-        <p:txBody>
-          <a:bodyPr wrap="square">
-            <a:spAutoFit/>
-          </a:bodyPr>
-          <a:lstStyle/>
-          <a:p>
-            <a:pPr algn="just"/>
-            <a:r>
-              <a:rPr lang="en-US" sz="1600" dirty="0"/>
-              <a:t>Virtual Private Network (VPN) is a secure logical network that a company or user required while confidential data need to be transmitted securely from one device to another over the Internet.</a:t>
-            </a:r>
-          </a:p>
-          <a:p>
-            <a:pPr algn="just"/>
-            <a:endParaRPr lang="en-US" sz="1600" dirty="0"/>
-          </a:p>
-          <a:p>
-            <a:pPr algn="just"/>
-            <a:r>
-              <a:rPr lang="en-US" sz="1600" dirty="0"/>
-              <a:t>Internet is loaded with unauthorized users trying to break down your company's security and pushing data over such an unsecured network without a VPN or personal leased line would be questionable once the security threat occurs. VPNs have different flavors available for you, so you can find the best solution and implement it into your network for end-to-end security</a:t>
-            </a:r>
-            <a:r>
-              <a:rPr lang="en-US" sz="1600" dirty="0" smtClean="0"/>
-              <a:t>.</a:t>
-            </a:r>
-          </a:p>
-          <a:p>
-            <a:pPr algn="just"/>
-            <a:endParaRPr lang="en-US" sz="1600" dirty="0"/>
-          </a:p>
-          <a:p>
-            <a:pPr algn="just"/>
-            <a:r>
-              <a:rPr lang="en-US" sz="1600" dirty="0"/>
-              <a:t>Project : </a:t>
-            </a:r>
-            <a:r>
-              <a:rPr lang="en-US" sz="1600" dirty="0" smtClean="0">
-                <a:solidFill>
-                  <a:srgbClr val="00B0F0"/>
-                </a:solidFill>
-              </a:rPr>
-              <a:t>IPsec-VPN-</a:t>
-            </a:r>
-            <a:r>
-              <a:rPr lang="en-US" sz="1600" dirty="0" err="1" smtClean="0">
-                <a:solidFill>
-                  <a:srgbClr val="00B0F0"/>
-                </a:solidFill>
-              </a:rPr>
-              <a:t>project.pkt</a:t>
-            </a:r>
-            <a:endParaRPr lang="en-US" sz="1600" dirty="0" smtClean="0">
-              <a:solidFill>
-                <a:srgbClr val="00B0F0"/>
-              </a:solidFill>
-            </a:endParaRPr>
-          </a:p>
-          <a:p>
-            <a:pPr algn="just"/>
-            <a:r>
-              <a:rPr lang="en-US" sz="1600" dirty="0" err="1" smtClean="0"/>
-              <a:t>Organisation</a:t>
-            </a:r>
-            <a:r>
-              <a:rPr lang="en-US" sz="1600" dirty="0" smtClean="0"/>
-              <a:t> </a:t>
-            </a:r>
-            <a:r>
-              <a:rPr lang="en-US" sz="1600" dirty="0"/>
-              <a:t>requires establishing a VPN between a host in its parts division and a host in the manufacturing department of one of their business partners, </a:t>
-            </a:r>
-            <a:r>
-              <a:rPr lang="en-US" sz="1600" dirty="0" err="1"/>
-              <a:t>TheirCo</a:t>
-            </a:r>
-            <a:r>
-              <a:rPr lang="en-US" sz="1600" dirty="0"/>
-              <a:t>. They only want to create a VPN between System-A and System-C (refer to the figure), so that no other devices from both networks will be connecting except these two.</a:t>
-            </a:r>
-          </a:p>
-        </p:txBody>
-      </p:sp>
-      <p:sp>
-        <p:nvSpPr>
-          <p:cNvPr id="3" name="Rectangle 2"/>
-          <p:cNvSpPr/>
-          <p:nvPr/>
-        </p:nvSpPr>
-        <p:spPr>
-          <a:xfrm>
-            <a:off x="446809" y="527844"/>
-            <a:ext cx="1707519" cy="424732"/>
-          </a:xfrm>
-          <a:prstGeom prst="rect">
-            <a:avLst/>
-          </a:prstGeom>
-        </p:spPr>
-        <p:txBody>
-          <a:bodyPr wrap="none">
-            <a:spAutoFit/>
-          </a:bodyPr>
-          <a:lstStyle/>
-          <a:p>
-            <a:pPr algn="just"/>
-            <a:r>
-              <a:rPr lang="en-US" b="1" dirty="0">
-                <a:solidFill>
-                  <a:srgbClr val="00B0F0"/>
-                </a:solidFill>
-              </a:rPr>
-              <a:t>IPsec VPN</a:t>
-            </a:r>
-          </a:p>
-        </p:txBody>
-      </p:sp>
-    </p:spTree>
-    <p:extLst>
-      <p:ext uri="{BB962C8B-B14F-4D97-AF65-F5344CB8AC3E}">
-        <p14:creationId xmlns:p14="http://schemas.microsoft.com/office/powerpoint/2010/main" val="1929246260"/>
-      </p:ext>
-    </p:extLst>
-  </p:cSld>
-  <p:clrMapOvr>
-    <a:masterClrMapping/>
-  </p:clrMapOvr>
-  <p:timing>
-    <p:tnLst>
-      <p:par>
-        <p:cTn id="1" dur="indefinite" restart="never" nodeType="tmRoot"/>
-      </p:par>
-    </p:tnLst>
-  </p:timing>
-</p:sld>
-</file>
-
-<file path=ppt/slides/slide58.xml><?xml version="1.0" encoding="utf-8"?>
-<p:sld xmlns:a="http://schemas.openxmlformats.org/drawingml/2006/main" xmlns:r="http://schemas.openxmlformats.org/officeDocument/2006/relationships" xmlns:p="http://schemas.openxmlformats.org/presentationml/2006/main">
-  <p:cSld>
-    <p:spTree>
-      <p:nvGrpSpPr>
-        <p:cNvPr id="1" name=""/>
-        <p:cNvGrpSpPr/>
-        <p:nvPr/>
-      </p:nvGrpSpPr>
-      <p:grpSpPr>
-        <a:xfrm>
-          <a:off x="0" y="0"/>
-          <a:ext cx="0" cy="0"/>
-          <a:chOff x="0" y="0"/>
-          <a:chExt cx="0" cy="0"/>
-        </a:xfrm>
-      </p:grpSpPr>
-      <p:pic>
-        <p:nvPicPr>
-          <p:cNvPr id="2" name="Picture 1"/>
-          <p:cNvPicPr>
-            <a:picLocks noChangeAspect="1"/>
-          </p:cNvPicPr>
-          <p:nvPr/>
-        </p:nvPicPr>
-        <p:blipFill>
-          <a:blip r:embed="rId2"/>
-          <a:stretch>
-            <a:fillRect/>
-          </a:stretch>
-        </p:blipFill>
-        <p:spPr>
-          <a:xfrm>
-            <a:off x="561108" y="1200855"/>
-            <a:ext cx="8256311" cy="4825872"/>
-          </a:xfrm>
-          <a:prstGeom prst="rect">
-            <a:avLst/>
-          </a:prstGeom>
-        </p:spPr>
-      </p:pic>
-      <p:sp>
-        <p:nvSpPr>
-          <p:cNvPr id="3" name="Rectangle 2"/>
-          <p:cNvSpPr/>
-          <p:nvPr/>
-        </p:nvSpPr>
-        <p:spPr>
-          <a:xfrm>
-            <a:off x="446809" y="527844"/>
-            <a:ext cx="1707519" cy="424732"/>
-          </a:xfrm>
-          <a:prstGeom prst="rect">
-            <a:avLst/>
-          </a:prstGeom>
-        </p:spPr>
-        <p:txBody>
-          <a:bodyPr wrap="none">
-            <a:spAutoFit/>
-          </a:bodyPr>
-          <a:lstStyle/>
-          <a:p>
-            <a:pPr algn="just"/>
-            <a:r>
-              <a:rPr lang="en-US" b="1" dirty="0">
-                <a:solidFill>
-                  <a:srgbClr val="00B0F0"/>
-                </a:solidFill>
-              </a:rPr>
-              <a:t>IPsec VPN</a:t>
-            </a:r>
-          </a:p>
-        </p:txBody>
-      </p:sp>
-    </p:spTree>
-    <p:extLst>
-      <p:ext uri="{BB962C8B-B14F-4D97-AF65-F5344CB8AC3E}">
-        <p14:creationId xmlns:p14="http://schemas.microsoft.com/office/powerpoint/2010/main" val="2984678905"/>
-      </p:ext>
-    </p:extLst>
-  </p:cSld>
-  <p:clrMapOvr>
-    <a:masterClrMapping/>
-  </p:clrMapOvr>
-  <p:timing>
-    <p:tnLst>
-      <p:par>
-        <p:cTn id="1" dur="indefinite" restart="never" nodeType="tmRoot"/>
-      </p:par>
-    </p:tnLst>
-  </p:timing>
-</p:sld>
-</file>
-
-<file path=ppt/slides/slide59.xml><?xml version="1.0" encoding="utf-8"?>
-<p:sld xmlns:a="http://schemas.openxmlformats.org/drawingml/2006/main" xmlns:r="http://schemas.openxmlformats.org/officeDocument/2006/relationships" xmlns:p="http://schemas.openxmlformats.org/presentationml/2006/main">
-  <p:cSld>
-    <p:spTree>
-      <p:nvGrpSpPr>
-        <p:cNvPr id="1" name=""/>
-        <p:cNvGrpSpPr/>
-        <p:nvPr/>
-      </p:nvGrpSpPr>
-      <p:grpSpPr>
-        <a:xfrm>
-          <a:off x="0" y="0"/>
-          <a:ext cx="0" cy="0"/>
-          <a:chOff x="0" y="0"/>
-          <a:chExt cx="0" cy="0"/>
-        </a:xfrm>
-      </p:grpSpPr>
-      <p:sp>
-        <p:nvSpPr>
-          <p:cNvPr id="2" name="Rectangle 1"/>
-          <p:cNvSpPr/>
-          <p:nvPr/>
-        </p:nvSpPr>
-        <p:spPr>
-          <a:xfrm>
-            <a:off x="103908" y="1794128"/>
-            <a:ext cx="8905009" cy="1865126"/>
-          </a:xfrm>
-          <a:prstGeom prst="rect">
-            <a:avLst/>
-          </a:prstGeom>
-        </p:spPr>
-        <p:txBody>
-          <a:bodyPr wrap="square">
-            <a:spAutoFit/>
-          </a:bodyPr>
-          <a:lstStyle/>
-          <a:p>
-            <a:pPr marL="285750" indent="-285750" algn="just">
-              <a:buFont typeface="Arial" panose="020B0604020202020204" pitchFamily="34" charset="0"/>
-              <a:buChar char="•"/>
-            </a:pPr>
-            <a:r>
-              <a:rPr lang="en-US" sz="1600" dirty="0"/>
-              <a:t>IPsec VPN and ISAKMP policies were created between two routers with Pre-shared Key authentication and encryption (AES 256).</a:t>
-            </a:r>
-          </a:p>
-          <a:p>
-            <a:pPr marL="285750" indent="-285750" algn="just">
-              <a:buFont typeface="Arial" panose="020B0604020202020204" pitchFamily="34" charset="0"/>
-              <a:buChar char="•"/>
-            </a:pPr>
-            <a:r>
-              <a:rPr lang="en-US" sz="1600" dirty="0"/>
-              <a:t>Access-list created to filter the traffic, so only System-A and System-C can connect between these two networks.</a:t>
-            </a:r>
-          </a:p>
-          <a:p>
-            <a:pPr marL="285750" indent="-285750" algn="just">
-              <a:buFont typeface="Arial" panose="020B0604020202020204" pitchFamily="34" charset="0"/>
-              <a:buChar char="•"/>
-            </a:pPr>
-            <a:r>
-              <a:rPr lang="en-US" sz="1600" dirty="0"/>
-              <a:t>Port-Channel had been between Router-to-Switch. for high-speed and redundancy.</a:t>
-            </a:r>
-          </a:p>
-          <a:p>
-            <a:pPr marL="285750" indent="-285750" algn="just">
-              <a:buFont typeface="Arial" panose="020B0604020202020204" pitchFamily="34" charset="0"/>
-              <a:buChar char="•"/>
-            </a:pPr>
-            <a:r>
-              <a:rPr lang="en-US" sz="1600" dirty="0"/>
-              <a:t>Two Serial links have been used to connect with ISP. This will allow high-availability and if one goes down them the other link will be up. To enable this feature, the Administrative Distance of the route of the back-up link was increased</a:t>
-            </a:r>
-          </a:p>
-        </p:txBody>
-      </p:sp>
-      <p:sp>
-        <p:nvSpPr>
-          <p:cNvPr id="3" name="Rectangle 2"/>
-          <p:cNvSpPr/>
-          <p:nvPr/>
-        </p:nvSpPr>
-        <p:spPr>
-          <a:xfrm>
-            <a:off x="446809" y="527844"/>
-            <a:ext cx="1707519" cy="424732"/>
-          </a:xfrm>
-          <a:prstGeom prst="rect">
-            <a:avLst/>
-          </a:prstGeom>
-        </p:spPr>
-        <p:txBody>
-          <a:bodyPr wrap="none">
-            <a:spAutoFit/>
-          </a:bodyPr>
-          <a:lstStyle/>
-          <a:p>
-            <a:pPr algn="just"/>
-            <a:r>
-              <a:rPr lang="en-US" b="1" dirty="0">
-                <a:solidFill>
-                  <a:srgbClr val="00B0F0"/>
-                </a:solidFill>
-              </a:rPr>
-              <a:t>IPsec VPN</a:t>
-            </a:r>
-          </a:p>
-        </p:txBody>
-      </p:sp>
-      <p:sp>
-        <p:nvSpPr>
-          <p:cNvPr id="4" name="Rectangle 3"/>
-          <p:cNvSpPr/>
-          <p:nvPr/>
-        </p:nvSpPr>
-        <p:spPr>
-          <a:xfrm>
-            <a:off x="216920" y="1369396"/>
-            <a:ext cx="1481496" cy="424732"/>
-          </a:xfrm>
-          <a:prstGeom prst="rect">
-            <a:avLst/>
-          </a:prstGeom>
-        </p:spPr>
-        <p:txBody>
-          <a:bodyPr wrap="none">
-            <a:spAutoFit/>
-          </a:bodyPr>
-          <a:lstStyle/>
-          <a:p>
-            <a:pPr algn="just"/>
-            <a:r>
-              <a:rPr lang="en-US" b="1" dirty="0" err="1" smtClean="0"/>
-              <a:t>Solusion</a:t>
-            </a:r>
-            <a:endParaRPr lang="en-US" b="1" dirty="0"/>
-          </a:p>
-        </p:txBody>
-      </p:sp>
-    </p:spTree>
-    <p:extLst>
-      <p:ext uri="{BB962C8B-B14F-4D97-AF65-F5344CB8AC3E}">
-        <p14:creationId xmlns:p14="http://schemas.microsoft.com/office/powerpoint/2010/main" val="3191426423"/>
-      </p:ext>
-    </p:extLst>
-  </p:cSld>
-  <p:clrMapOvr>
-    <a:masterClrMapping/>
-  </p:clrMapOvr>
-  <p:timing>
-    <p:tnLst>
-      <p:par>
-        <p:cTn id="1" dur="indefinite" restart="never" nodeType="tmRoot"/>
-      </p:par>
-    </p:tnLst>
-  </p:timing>
-</p:sld>
-</file>
-
 <file path=ppt/slides/slide6.xml><?xml version="1.0" encoding="utf-8"?>
-<p:sld xmlns:a="http://schemas.openxmlformats.org/drawingml/2006/main" xmlns:r="http://schemas.openxmlformats.org/officeDocument/2006/relationships" xmlns:p="http://schemas.openxmlformats.org/presentationml/2006/main">
-  <p:cSld>
-    <p:spTree>
-      <p:nvGrpSpPr>
-        <p:cNvPr id="1" name=""/>
-        <p:cNvGrpSpPr/>
-        <p:nvPr/>
-      </p:nvGrpSpPr>
-      <p:grpSpPr>
-        <a:xfrm>
-          <a:off x="0" y="0"/>
-          <a:ext cx="0" cy="0"/>
-          <a:chOff x="0" y="0"/>
-          <a:chExt cx="0" cy="0"/>
-        </a:xfrm>
-      </p:grpSpPr>
-      <p:sp>
-        <p:nvSpPr>
-          <p:cNvPr id="5122" name="Rectangle 2"/>
-          <p:cNvSpPr>
-            <a:spLocks noGrp="1" noChangeArrowheads="1"/>
-          </p:cNvSpPr>
-          <p:nvPr>
-            <p:ph type="ctrTitle"/>
-          </p:nvPr>
-        </p:nvSpPr>
-        <p:spPr>
-          <a:xfrm>
-            <a:off x="311150" y="2263775"/>
-            <a:ext cx="3854450" cy="1481138"/>
-          </a:xfrm>
-        </p:spPr>
-        <p:txBody>
-          <a:bodyPr/>
-          <a:lstStyle/>
-          <a:p>
-            <a:pPr eaLnBrk="1" hangingPunct="1"/>
-            <a:r>
-              <a:rPr lang="en-US" sz="2400" dirty="0" smtClean="0"/>
-              <a:t>7.1 VPNs</a:t>
-            </a:r>
-            <a:endParaRPr lang="en-US" sz="2400" dirty="0" smtClean="0">
-              <a:solidFill>
-                <a:schemeClr val="folHlink"/>
-              </a:solidFill>
-            </a:endParaRPr>
-          </a:p>
-        </p:txBody>
-      </p:sp>
-    </p:spTree>
-    <p:extLst>
-      <p:ext uri="{BB962C8B-B14F-4D97-AF65-F5344CB8AC3E}">
-        <p14:creationId xmlns:p14="http://schemas.microsoft.com/office/powerpoint/2010/main" val="1915260488"/>
-      </p:ext>
-    </p:extLst>
-  </p:cSld>
-  <p:clrMapOvr>
-    <a:masterClrMapping/>
-  </p:clrMapOvr>
-  <p:transition>
-    <p:wipe dir="r"/>
-  </p:transition>
-  <p:timing>
-    <p:tnLst>
-      <p:par>
-        <p:cTn id="1" dur="indefinite" restart="never" nodeType="tmRoot"/>
-      </p:par>
-    </p:tnLst>
-  </p:timing>
-</p:sld>
-</file>
-
-<file path=ppt/slides/slide60.xml><?xml version="1.0" encoding="utf-8"?>
-<p:sld xmlns:a="http://schemas.openxmlformats.org/drawingml/2006/main" xmlns:r="http://schemas.openxmlformats.org/officeDocument/2006/relationships" xmlns:p="http://schemas.openxmlformats.org/presentationml/2006/main">
-  <p:cSld>
-    <p:spTree>
-      <p:nvGrpSpPr>
-        <p:cNvPr id="1" name=""/>
-        <p:cNvGrpSpPr/>
-        <p:nvPr/>
-      </p:nvGrpSpPr>
-      <p:grpSpPr>
-        <a:xfrm>
-          <a:off x="0" y="0"/>
-          <a:ext cx="0" cy="0"/>
-          <a:chOff x="0" y="0"/>
-          <a:chExt cx="0" cy="0"/>
-        </a:xfrm>
-      </p:grpSpPr>
-      <p:sp>
-        <p:nvSpPr>
-          <p:cNvPr id="2" name="Rectangle 1"/>
-          <p:cNvSpPr/>
-          <p:nvPr/>
-        </p:nvSpPr>
-        <p:spPr>
-          <a:xfrm>
-            <a:off x="320261" y="612904"/>
-            <a:ext cx="3831946" cy="424732"/>
-          </a:xfrm>
-          <a:prstGeom prst="rect">
-            <a:avLst/>
-          </a:prstGeom>
-        </p:spPr>
-        <p:txBody>
-          <a:bodyPr wrap="none">
-            <a:spAutoFit/>
-          </a:bodyPr>
-          <a:lstStyle/>
-          <a:p>
-            <a:pPr algn="just"/>
-            <a:r>
-              <a:rPr lang="en-US" b="1" dirty="0">
-                <a:solidFill>
-                  <a:srgbClr val="00B0F0"/>
-                </a:solidFill>
-              </a:rPr>
-              <a:t>Port Address Translation</a:t>
-            </a:r>
-          </a:p>
-        </p:txBody>
-      </p:sp>
-      <p:sp>
-        <p:nvSpPr>
-          <p:cNvPr id="3" name="Rectangle 2"/>
-          <p:cNvSpPr/>
-          <p:nvPr/>
-        </p:nvSpPr>
-        <p:spPr>
-          <a:xfrm>
-            <a:off x="320261" y="1264248"/>
-            <a:ext cx="8261498" cy="3859518"/>
-          </a:xfrm>
-          <a:prstGeom prst="rect">
-            <a:avLst/>
-          </a:prstGeom>
-        </p:spPr>
-        <p:txBody>
-          <a:bodyPr wrap="square">
-            <a:spAutoFit/>
-          </a:bodyPr>
-          <a:lstStyle/>
-          <a:p>
-            <a:pPr algn="just"/>
-            <a:r>
-              <a:rPr lang="en-US" sz="1600" dirty="0"/>
-              <a:t>PAT stands for Port Address Translation which is a feature on network devices that allows multiple users to use the same Public IP address from that private network. It is an extended form of Network Address Translation.</a:t>
-            </a:r>
-          </a:p>
-          <a:p>
-            <a:pPr algn="just"/>
-            <a:endParaRPr lang="en-US" sz="1600" dirty="0"/>
-          </a:p>
-          <a:p>
-            <a:pPr algn="just"/>
-            <a:r>
-              <a:rPr lang="en-US" sz="1600" dirty="0"/>
-              <a:t>As the numbers of the network device are increasing constantly, the demand for the IP addresses is increased too. Hence, the solution for not running out from IP addresses includes PAT, NAT, and IPv6. Use of PAT in the network reduces the operational cost, as the least or no extra IP addresses will require to lease from Internet Service Provides</a:t>
-            </a:r>
-            <a:r>
-              <a:rPr lang="en-US" sz="1600" dirty="0" smtClean="0"/>
-              <a:t>.</a:t>
-            </a:r>
-          </a:p>
-          <a:p>
-            <a:pPr algn="just"/>
-            <a:endParaRPr lang="en-US" sz="1600" dirty="0"/>
-          </a:p>
-          <a:p>
-            <a:pPr algn="just"/>
-            <a:r>
-              <a:rPr lang="en-US" sz="1600" dirty="0"/>
-              <a:t>Project : </a:t>
-            </a:r>
-            <a:r>
-              <a:rPr lang="en-US" sz="1600" dirty="0">
-                <a:solidFill>
-                  <a:srgbClr val="00B0F0"/>
-                </a:solidFill>
-              </a:rPr>
-              <a:t>"</a:t>
-            </a:r>
-            <a:r>
-              <a:rPr lang="en-US" sz="1600" dirty="0" smtClean="0">
-                <a:solidFill>
-                  <a:srgbClr val="00B0F0"/>
-                </a:solidFill>
-              </a:rPr>
-              <a:t>Network-Port-Address-</a:t>
-            </a:r>
-            <a:r>
-              <a:rPr lang="en-US" sz="1600" dirty="0" err="1" smtClean="0">
-                <a:solidFill>
-                  <a:srgbClr val="00B0F0"/>
-                </a:solidFill>
-              </a:rPr>
-              <a:t>Translation.pkt</a:t>
-            </a:r>
-            <a:endParaRPr lang="en-US" sz="1600" dirty="0" smtClean="0">
-              <a:solidFill>
-                <a:srgbClr val="00B0F0"/>
-              </a:solidFill>
-            </a:endParaRPr>
-          </a:p>
-          <a:p>
-            <a:pPr algn="just"/>
-            <a:endParaRPr lang="en-US" sz="1600" dirty="0" smtClean="0"/>
-          </a:p>
-          <a:p>
-            <a:pPr algn="just"/>
-            <a:r>
-              <a:rPr lang="en-US" sz="1600" dirty="0" smtClean="0"/>
-              <a:t>A </a:t>
-            </a:r>
-            <a:r>
-              <a:rPr lang="en-US" sz="1600" dirty="0"/>
-              <a:t>simple network scenario is created to demonstrate how PAT can be implemented on the network. This project also concentrates on features like Dynamic Host Configuration (DHCP) and Access control Lists (ACLs). The DHCP will allow us to automatically provide the IP addresses to the network devices and ACL will make sure that only </a:t>
-            </a:r>
-            <a:r>
-              <a:rPr lang="en-US" sz="1600" dirty="0" err="1"/>
-              <a:t>authorised</a:t>
-            </a:r>
-            <a:r>
-              <a:rPr lang="en-US" sz="1600" dirty="0"/>
-              <a:t> network/users are accessing the company's network. Simply, ACLs are a type of filtration occurring whenever any packet leaves/enters the private network.</a:t>
-            </a:r>
-          </a:p>
-        </p:txBody>
-      </p:sp>
-    </p:spTree>
-    <p:extLst>
-      <p:ext uri="{BB962C8B-B14F-4D97-AF65-F5344CB8AC3E}">
-        <p14:creationId xmlns:p14="http://schemas.microsoft.com/office/powerpoint/2010/main" val="4141154712"/>
-      </p:ext>
-    </p:extLst>
-  </p:cSld>
-  <p:clrMapOvr>
-    <a:masterClrMapping/>
-  </p:clrMapOvr>
-  <p:timing>
-    <p:tnLst>
-      <p:par>
-        <p:cTn id="1" dur="indefinite" restart="never" nodeType="tmRoot"/>
-      </p:par>
-    </p:tnLst>
-  </p:timing>
-</p:sld>
-</file>
-
-<file path=ppt/slides/slide61.xml><?xml version="1.0" encoding="utf-8"?>
-<p:sld xmlns:a="http://schemas.openxmlformats.org/drawingml/2006/main" xmlns:r="http://schemas.openxmlformats.org/officeDocument/2006/relationships" xmlns:p="http://schemas.openxmlformats.org/presentationml/2006/main">
-  <p:cSld>
-    <p:spTree>
-      <p:nvGrpSpPr>
-        <p:cNvPr id="1" name=""/>
-        <p:cNvGrpSpPr/>
-        <p:nvPr/>
-      </p:nvGrpSpPr>
-      <p:grpSpPr>
-        <a:xfrm>
-          <a:off x="0" y="0"/>
-          <a:ext cx="0" cy="0"/>
-          <a:chOff x="0" y="0"/>
-          <a:chExt cx="0" cy="0"/>
-        </a:xfrm>
-      </p:grpSpPr>
-      <p:pic>
-        <p:nvPicPr>
-          <p:cNvPr id="2" name="Picture 1"/>
-          <p:cNvPicPr>
-            <a:picLocks noChangeAspect="1"/>
-          </p:cNvPicPr>
-          <p:nvPr/>
-        </p:nvPicPr>
-        <p:blipFill>
-          <a:blip r:embed="rId2"/>
-          <a:stretch>
-            <a:fillRect/>
-          </a:stretch>
-        </p:blipFill>
-        <p:spPr>
-          <a:xfrm>
-            <a:off x="323850" y="1690687"/>
-            <a:ext cx="8496300" cy="3476625"/>
-          </a:xfrm>
-          <a:prstGeom prst="rect">
-            <a:avLst/>
-          </a:prstGeom>
-        </p:spPr>
-      </p:pic>
-      <p:sp>
-        <p:nvSpPr>
-          <p:cNvPr id="3" name="Rectangle 2"/>
-          <p:cNvSpPr/>
-          <p:nvPr/>
-        </p:nvSpPr>
-        <p:spPr>
-          <a:xfrm>
-            <a:off x="320261" y="612904"/>
-            <a:ext cx="3831946" cy="424732"/>
-          </a:xfrm>
-          <a:prstGeom prst="rect">
-            <a:avLst/>
-          </a:prstGeom>
-        </p:spPr>
-        <p:txBody>
-          <a:bodyPr wrap="none">
-            <a:spAutoFit/>
-          </a:bodyPr>
-          <a:lstStyle/>
-          <a:p>
-            <a:pPr algn="just"/>
-            <a:r>
-              <a:rPr lang="en-US" b="1" dirty="0">
-                <a:solidFill>
-                  <a:srgbClr val="00B0F0"/>
-                </a:solidFill>
-              </a:rPr>
-              <a:t>Port Address Translation</a:t>
-            </a:r>
-          </a:p>
-        </p:txBody>
-      </p:sp>
-    </p:spTree>
-    <p:extLst>
-      <p:ext uri="{BB962C8B-B14F-4D97-AF65-F5344CB8AC3E}">
-        <p14:creationId xmlns:p14="http://schemas.microsoft.com/office/powerpoint/2010/main" val="2502226911"/>
-      </p:ext>
-    </p:extLst>
-  </p:cSld>
-  <p:clrMapOvr>
-    <a:masterClrMapping/>
-  </p:clrMapOvr>
-  <p:timing>
-    <p:tnLst>
-      <p:par>
-        <p:cTn id="1" dur="indefinite" restart="never" nodeType="tmRoot"/>
-      </p:par>
-    </p:tnLst>
-  </p:timing>
-</p:sld>
-</file>
-
-<file path=ppt/slides/slide62.xml><?xml version="1.0" encoding="utf-8"?>
-<p:sld xmlns:a="http://schemas.openxmlformats.org/drawingml/2006/main" xmlns:r="http://schemas.openxmlformats.org/officeDocument/2006/relationships" xmlns:p="http://schemas.openxmlformats.org/presentationml/2006/main">
-  <p:cSld>
-    <p:spTree>
-      <p:nvGrpSpPr>
-        <p:cNvPr id="1" name=""/>
-        <p:cNvGrpSpPr/>
-        <p:nvPr/>
-      </p:nvGrpSpPr>
-      <p:grpSpPr>
-        <a:xfrm>
-          <a:off x="0" y="0"/>
-          <a:ext cx="0" cy="0"/>
-          <a:chOff x="0" y="0"/>
-          <a:chExt cx="0" cy="0"/>
-        </a:xfrm>
-      </p:grpSpPr>
-      <p:sp>
-        <p:nvSpPr>
-          <p:cNvPr id="2" name="Rectangle 1"/>
-          <p:cNvSpPr/>
-          <p:nvPr/>
-        </p:nvSpPr>
-        <p:spPr>
-          <a:xfrm>
-            <a:off x="529936" y="1147548"/>
-            <a:ext cx="8614064" cy="978729"/>
-          </a:xfrm>
-          <a:prstGeom prst="rect">
-            <a:avLst/>
-          </a:prstGeom>
-        </p:spPr>
-        <p:txBody>
-          <a:bodyPr wrap="square">
-            <a:spAutoFit/>
-          </a:bodyPr>
-          <a:lstStyle/>
-          <a:p>
-            <a:pPr algn="just"/>
-            <a:r>
-              <a:rPr lang="en-US" sz="1600" dirty="0">
-                <a:hlinkClick r:id="rId2"/>
-              </a:rPr>
-              <a:t>https://</a:t>
-            </a:r>
-            <a:r>
-              <a:rPr lang="en-US" sz="1600" dirty="0" smtClean="0">
-                <a:hlinkClick r:id="rId2"/>
-              </a:rPr>
-              <a:t>www.cisco.com/c/en/us/support/docs/security/asa-5500-x-series-firewalls/215884-configure-a-site-to-site-vpn-tunnel-with.html</a:t>
-            </a:r>
-            <a:endParaRPr lang="en-US" sz="1600" dirty="0" smtClean="0"/>
-          </a:p>
-          <a:p>
-            <a:pPr algn="just"/>
-            <a:endParaRPr lang="en-US" sz="1600" dirty="0"/>
-          </a:p>
-          <a:p>
-            <a:pPr algn="just"/>
-            <a:r>
-              <a:rPr lang="en-US" sz="1600" dirty="0"/>
-              <a:t>https://idwebhost.com/blog/vpn-tunnel/</a:t>
-            </a:r>
-          </a:p>
-        </p:txBody>
-      </p:sp>
-      <p:sp>
-        <p:nvSpPr>
-          <p:cNvPr id="3" name="Rectangle 2"/>
-          <p:cNvSpPr/>
-          <p:nvPr/>
-        </p:nvSpPr>
-        <p:spPr>
-          <a:xfrm>
-            <a:off x="217201" y="722816"/>
-            <a:ext cx="1851597" cy="424732"/>
-          </a:xfrm>
-          <a:prstGeom prst="rect">
-            <a:avLst/>
-          </a:prstGeom>
-        </p:spPr>
-        <p:txBody>
-          <a:bodyPr wrap="none">
-            <a:spAutoFit/>
-          </a:bodyPr>
-          <a:lstStyle/>
-          <a:p>
-            <a:r>
-              <a:rPr lang="en-US" dirty="0" smtClean="0">
-                <a:solidFill>
-                  <a:schemeClr val="tx2">
-                    <a:lumMod val="60000"/>
-                    <a:lumOff val="40000"/>
-                  </a:schemeClr>
-                </a:solidFill>
-              </a:rPr>
-              <a:t>VPN-Tunnel</a:t>
-            </a:r>
-            <a:endParaRPr lang="en-US" dirty="0">
-              <a:solidFill>
-                <a:schemeClr val="tx2">
-                  <a:lumMod val="60000"/>
-                  <a:lumOff val="40000"/>
-                </a:schemeClr>
-              </a:solidFill>
-            </a:endParaRPr>
-          </a:p>
-        </p:txBody>
-      </p:sp>
-    </p:spTree>
-    <p:extLst>
-      <p:ext uri="{BB962C8B-B14F-4D97-AF65-F5344CB8AC3E}">
-        <p14:creationId xmlns:p14="http://schemas.microsoft.com/office/powerpoint/2010/main" val="3810631874"/>
-      </p:ext>
-    </p:extLst>
-  </p:cSld>
-  <p:clrMapOvr>
-    <a:masterClrMapping/>
-  </p:clrMapOvr>
-  <p:timing>
-    <p:tnLst>
-      <p:par>
-        <p:cTn id="1" dur="indefinite" restart="never" nodeType="tmRoot"/>
-      </p:par>
-    </p:tnLst>
-  </p:timing>
-</p:sld>
-</file>
-
-<file path=ppt/slides/slide63.xml><?xml version="1.0" encoding="utf-8"?>
-<p:sld xmlns:a="http://schemas.openxmlformats.org/drawingml/2006/main" xmlns:r="http://schemas.openxmlformats.org/officeDocument/2006/relationships" xmlns:p="http://schemas.openxmlformats.org/presentationml/2006/main">
-  <p:cSld>
-    <p:spTree>
-      <p:nvGrpSpPr>
-        <p:cNvPr id="1" name=""/>
-        <p:cNvGrpSpPr/>
-        <p:nvPr/>
-      </p:nvGrpSpPr>
-      <p:grpSpPr>
-        <a:xfrm>
-          <a:off x="0" y="0"/>
-          <a:ext cx="0" cy="0"/>
-          <a:chOff x="0" y="0"/>
-          <a:chExt cx="0" cy="0"/>
-        </a:xfrm>
-      </p:grpSpPr>
-      <p:sp>
-        <p:nvSpPr>
-          <p:cNvPr id="2" name="Rectangle 1"/>
-          <p:cNvSpPr/>
-          <p:nvPr/>
-        </p:nvSpPr>
-        <p:spPr>
-          <a:xfrm>
-            <a:off x="271372" y="1250825"/>
-            <a:ext cx="8372898" cy="5050613"/>
-          </a:xfrm>
-          <a:prstGeom prst="rect">
-            <a:avLst/>
-          </a:prstGeom>
-        </p:spPr>
-        <p:txBody>
-          <a:bodyPr wrap="square">
-            <a:spAutoFit/>
-          </a:bodyPr>
-          <a:lstStyle/>
-          <a:p>
-            <a:pPr algn="just"/>
-            <a:r>
-              <a:rPr lang="en-US" sz="1600" dirty="0"/>
-              <a:t>Why use a </a:t>
-            </a:r>
-            <a:r>
-              <a:rPr lang="en-US" sz="1600" dirty="0" smtClean="0"/>
-              <a:t>VPN  ?</a:t>
-            </a:r>
-          </a:p>
-          <a:p>
-            <a:pPr algn="just"/>
-            <a:endParaRPr lang="en-US" sz="1600" dirty="0"/>
-          </a:p>
-          <a:p>
-            <a:pPr marL="285750" indent="-285750" algn="just">
-              <a:buFont typeface="Arial" panose="020B0604020202020204" pitchFamily="34" charset="0"/>
-              <a:buChar char="•"/>
-            </a:pPr>
-            <a:r>
-              <a:rPr lang="en-US" sz="1400" dirty="0"/>
-              <a:t>Privacy and Anonymity: VPNs hide a user's browser history, IP address, and geographical location, enhancing security and preventing unauthorized access to personal data.</a:t>
-            </a:r>
-          </a:p>
-          <a:p>
-            <a:pPr marL="285750" indent="-285750" algn="just">
-              <a:buFont typeface="Arial" panose="020B0604020202020204" pitchFamily="34" charset="0"/>
-              <a:buChar char="•"/>
-            </a:pPr>
-            <a:r>
-              <a:rPr lang="en-US" sz="1400" dirty="0"/>
-              <a:t>Bypassing Geographical Restrictions: VPNs enable access to restricted content based on location, allowing users to visit otherwise unavailable websites.</a:t>
-            </a:r>
-          </a:p>
-          <a:p>
-            <a:pPr marL="285750" indent="-285750" algn="just">
-              <a:buFont typeface="Arial" panose="020B0604020202020204" pitchFamily="34" charset="0"/>
-              <a:buChar char="•"/>
-            </a:pPr>
-            <a:r>
-              <a:rPr lang="en-US" sz="1400" dirty="0"/>
-              <a:t>Remote Access: VPNs provide secure remote access to a company's network, facilitating work from home or while traveling.</a:t>
-            </a:r>
-          </a:p>
-          <a:p>
-            <a:pPr marL="285750" indent="-285750" algn="just">
-              <a:buFont typeface="Arial" panose="020B0604020202020204" pitchFamily="34" charset="0"/>
-              <a:buChar char="•"/>
-            </a:pPr>
-            <a:r>
-              <a:rPr lang="en-US" sz="1400" dirty="0"/>
-              <a:t>Public </a:t>
-            </a:r>
-            <a:r>
-              <a:rPr lang="en-US" sz="1400" dirty="0" err="1"/>
-              <a:t>WiFi</a:t>
-            </a:r>
-            <a:r>
-              <a:rPr lang="en-US" sz="1400" dirty="0"/>
-              <a:t> Security: VPNs protect users on public </a:t>
-            </a:r>
-            <a:r>
-              <a:rPr lang="en-US" sz="1400" dirty="0" err="1"/>
-              <a:t>WiFi</a:t>
-            </a:r>
-            <a:r>
-              <a:rPr lang="en-US" sz="1400" dirty="0"/>
-              <a:t> networks from hackers and cybercriminals attempting to intercept sensitive information</a:t>
-            </a:r>
-            <a:r>
-              <a:rPr lang="en-US" sz="1400" dirty="0" smtClean="0"/>
-              <a:t>.</a:t>
-            </a:r>
-          </a:p>
-          <a:p>
-            <a:pPr algn="just"/>
-            <a:endParaRPr lang="en-US" sz="1600" dirty="0"/>
-          </a:p>
-          <a:p>
-            <a:pPr algn="just"/>
-            <a:r>
-              <a:rPr lang="en-US" sz="1600" dirty="0"/>
-              <a:t>How VPNs Work</a:t>
-            </a:r>
-          </a:p>
-          <a:p>
-            <a:pPr marL="285750" indent="-285750" algn="just">
-              <a:buFont typeface="Arial" panose="020B0604020202020204" pitchFamily="34" charset="0"/>
-              <a:buChar char="•"/>
-            </a:pPr>
-            <a:r>
-              <a:rPr lang="en-US" sz="1400" dirty="0"/>
-              <a:t>Tunneling Protocols: VPNs utilize tunneling protocols like </a:t>
-            </a:r>
-            <a:r>
-              <a:rPr lang="en-US" sz="1400" dirty="0" err="1"/>
-              <a:t>OpenVPN</a:t>
-            </a:r>
-            <a:r>
-              <a:rPr lang="en-US" sz="1400" dirty="0"/>
-              <a:t>, SSTP, and IKEv2 for data encryption and decryption.</a:t>
-            </a:r>
-          </a:p>
-          <a:p>
-            <a:pPr marL="285750" indent="-285750" algn="just">
-              <a:buFont typeface="Arial" panose="020B0604020202020204" pitchFamily="34" charset="0"/>
-              <a:buChar char="•"/>
-            </a:pPr>
-            <a:r>
-              <a:rPr lang="en-US" sz="1400" dirty="0"/>
-              <a:t>Encryption: VPNs use encryption to secure data transmitted over the internet, preventing unauthorized reading without the decryption key.</a:t>
-            </a:r>
-          </a:p>
-          <a:p>
-            <a:pPr marL="285750" indent="-285750" algn="just">
-              <a:buFont typeface="Arial" panose="020B0604020202020204" pitchFamily="34" charset="0"/>
-              <a:buChar char="•"/>
-            </a:pPr>
-            <a:r>
-              <a:rPr lang="en-US" sz="1400" dirty="0"/>
-              <a:t>IP Address Masking: VPNs replace a user's IP address with that of the VPN server, maintaining anonymity and preventing tracking.</a:t>
-            </a:r>
-          </a:p>
-          <a:p>
-            <a:pPr marL="285750" indent="-285750" algn="just">
-              <a:buFont typeface="Arial" panose="020B0604020202020204" pitchFamily="34" charset="0"/>
-              <a:buChar char="•"/>
-            </a:pPr>
-            <a:r>
-              <a:rPr lang="en-US" sz="1400" dirty="0"/>
-              <a:t>Types of VPNs</a:t>
-            </a:r>
-          </a:p>
-          <a:p>
-            <a:pPr marL="285750" indent="-285750" algn="just">
-              <a:buFont typeface="Arial" panose="020B0604020202020204" pitchFamily="34" charset="0"/>
-              <a:buChar char="•"/>
-            </a:pPr>
-            <a:r>
-              <a:rPr lang="en-US" sz="1400" dirty="0"/>
-              <a:t>Remote Access VPNs: Allow individual users to securely connect to a private network over the internet.</a:t>
-            </a:r>
-          </a:p>
-          <a:p>
-            <a:pPr marL="285750" indent="-285750" algn="just">
-              <a:buFont typeface="Arial" panose="020B0604020202020204" pitchFamily="34" charset="0"/>
-              <a:buChar char="•"/>
-            </a:pPr>
-            <a:r>
-              <a:rPr lang="en-US" sz="1400" dirty="0"/>
-              <a:t>Site-to-Site VPNs: Connect entire networks in different locations, ensuring secure communication between them.</a:t>
-            </a:r>
-          </a:p>
-          <a:p>
-            <a:pPr marL="285750" indent="-285750" algn="just">
-              <a:buFont typeface="Arial" panose="020B0604020202020204" pitchFamily="34" charset="0"/>
-              <a:buChar char="•"/>
-            </a:pPr>
-            <a:r>
-              <a:rPr lang="en-US" sz="1400" dirty="0"/>
-              <a:t>Hardware VPNs: Physical devices providing VPN functionality, commonly used for added security in enterprise environments.</a:t>
-            </a:r>
-          </a:p>
-        </p:txBody>
-      </p:sp>
-      <p:sp>
-        <p:nvSpPr>
-          <p:cNvPr id="3" name="Rectangle 2"/>
-          <p:cNvSpPr/>
-          <p:nvPr/>
-        </p:nvSpPr>
-        <p:spPr>
-          <a:xfrm>
-            <a:off x="143739" y="603683"/>
-            <a:ext cx="3658374" cy="424732"/>
-          </a:xfrm>
-          <a:prstGeom prst="rect">
-            <a:avLst/>
-          </a:prstGeom>
-        </p:spPr>
-        <p:txBody>
-          <a:bodyPr wrap="none">
-            <a:spAutoFit/>
-          </a:bodyPr>
-          <a:lstStyle/>
-          <a:p>
-            <a:r>
-              <a:rPr lang="en-US" dirty="0">
-                <a:solidFill>
-                  <a:schemeClr val="tx2">
-                    <a:lumMod val="60000"/>
-                    <a:lumOff val="40000"/>
-                  </a:schemeClr>
-                </a:solidFill>
-              </a:rPr>
-              <a:t>VPN-For-Remote-Access</a:t>
-            </a:r>
-          </a:p>
-        </p:txBody>
-      </p:sp>
-    </p:spTree>
-    <p:extLst>
-      <p:ext uri="{BB962C8B-B14F-4D97-AF65-F5344CB8AC3E}">
-        <p14:creationId xmlns:p14="http://schemas.microsoft.com/office/powerpoint/2010/main" val="297122808"/>
-      </p:ext>
-    </p:extLst>
-  </p:cSld>
-  <p:clrMapOvr>
-    <a:masterClrMapping/>
-  </p:clrMapOvr>
-  <p:timing>
-    <p:tnLst>
-      <p:par>
-        <p:cTn id="1" dur="indefinite" restart="never" nodeType="tmRoot"/>
-      </p:par>
-    </p:tnLst>
-  </p:timing>
-</p:sld>
-</file>
-
-<file path=ppt/slides/slide64.xml><?xml version="1.0" encoding="utf-8"?>
-<p:sld xmlns:a="http://schemas.openxmlformats.org/drawingml/2006/main" xmlns:r="http://schemas.openxmlformats.org/officeDocument/2006/relationships" xmlns:p="http://schemas.openxmlformats.org/presentationml/2006/main">
-  <p:cSld>
-    <p:spTree>
-      <p:nvGrpSpPr>
-        <p:cNvPr id="1" name=""/>
-        <p:cNvGrpSpPr/>
-        <p:nvPr/>
-      </p:nvGrpSpPr>
-      <p:grpSpPr>
-        <a:xfrm>
-          <a:off x="0" y="0"/>
-          <a:ext cx="0" cy="0"/>
-          <a:chOff x="0" y="0"/>
-          <a:chExt cx="0" cy="0"/>
-        </a:xfrm>
-      </p:grpSpPr>
-      <p:sp>
-        <p:nvSpPr>
-          <p:cNvPr id="2" name="Rectangle 1"/>
-          <p:cNvSpPr/>
-          <p:nvPr/>
-        </p:nvSpPr>
-        <p:spPr>
-          <a:xfrm>
-            <a:off x="489581" y="1028415"/>
-            <a:ext cx="8372898" cy="5133713"/>
-          </a:xfrm>
-          <a:prstGeom prst="rect">
-            <a:avLst/>
-          </a:prstGeom>
-        </p:spPr>
-        <p:txBody>
-          <a:bodyPr wrap="square">
-            <a:spAutoFit/>
-          </a:bodyPr>
-          <a:lstStyle/>
-          <a:p>
-            <a:pPr algn="just"/>
-            <a:r>
-              <a:rPr lang="en-US" sz="1400" dirty="0">
-                <a:solidFill>
-                  <a:schemeClr val="tx2">
-                    <a:lumMod val="60000"/>
-                    <a:lumOff val="40000"/>
-                  </a:schemeClr>
-                </a:solidFill>
-              </a:rPr>
-              <a:t>Cisco 1941 Routers</a:t>
-            </a:r>
-          </a:p>
-          <a:p>
-            <a:pPr marL="742950" lvl="1" indent="-285750" algn="just">
-              <a:buFont typeface="Arial" panose="020B0604020202020204" pitchFamily="34" charset="0"/>
-              <a:buChar char="•"/>
-            </a:pPr>
-            <a:r>
-              <a:rPr lang="en-US" sz="1400" dirty="0"/>
-              <a:t>High-Performance Routing: Known for high-performance capabilities suitable for routing tasks.</a:t>
-            </a:r>
-          </a:p>
-          <a:p>
-            <a:pPr marL="742950" lvl="1" indent="-285750" algn="just">
-              <a:buFont typeface="Arial" panose="020B0604020202020204" pitchFamily="34" charset="0"/>
-              <a:buChar char="•"/>
-            </a:pPr>
-            <a:r>
-              <a:rPr lang="en-US" sz="1400" dirty="0"/>
-              <a:t>Scalability: Offers scalability to accommodate growing network needs.</a:t>
-            </a:r>
-          </a:p>
-          <a:p>
-            <a:pPr marL="742950" lvl="1" indent="-285750" algn="just">
-              <a:buFont typeface="Arial" panose="020B0604020202020204" pitchFamily="34" charset="0"/>
-              <a:buChar char="•"/>
-            </a:pPr>
-            <a:r>
-              <a:rPr lang="en-US" sz="1400" dirty="0"/>
-              <a:t>Security Features: Advanced security features for firewall capabilities, access control, and VPN support.</a:t>
-            </a:r>
-          </a:p>
-          <a:p>
-            <a:pPr marL="742950" lvl="1" indent="-285750" algn="just">
-              <a:buFont typeface="Arial" panose="020B0604020202020204" pitchFamily="34" charset="0"/>
-              <a:buChar char="•"/>
-            </a:pPr>
-            <a:r>
-              <a:rPr lang="en-US" sz="1400" dirty="0"/>
-              <a:t>Modular Design: Flexibility in adding modules for specific functionalities.</a:t>
-            </a:r>
-          </a:p>
-          <a:p>
-            <a:pPr marL="742950" lvl="1" indent="-285750" algn="just">
-              <a:buFont typeface="Arial" panose="020B0604020202020204" pitchFamily="34" charset="0"/>
-              <a:buChar char="•"/>
-            </a:pPr>
-            <a:r>
-              <a:rPr lang="en-US" sz="1400" dirty="0"/>
-              <a:t>Reliability: Ensures uninterrupted connectivity and minimizes downtime.</a:t>
-            </a:r>
-          </a:p>
-          <a:p>
-            <a:pPr algn="just"/>
-            <a:r>
-              <a:rPr lang="en-US" sz="1400" dirty="0">
-                <a:solidFill>
-                  <a:schemeClr val="tx2">
-                    <a:lumMod val="60000"/>
-                    <a:lumOff val="40000"/>
-                  </a:schemeClr>
-                </a:solidFill>
-              </a:rPr>
-              <a:t>Cisco 2960-24 Switch</a:t>
-            </a:r>
-          </a:p>
-          <a:p>
-            <a:pPr marL="742950" lvl="1" indent="-285750" algn="just">
-              <a:buFont typeface="Arial" panose="020B0604020202020204" pitchFamily="34" charset="0"/>
-              <a:buChar char="•"/>
-            </a:pPr>
-            <a:r>
-              <a:rPr lang="en-US" sz="1400" dirty="0"/>
-              <a:t>Network Switching: Used for local network switching, providing high-performance and low-latency communication.</a:t>
-            </a:r>
-          </a:p>
-          <a:p>
-            <a:pPr marL="742950" lvl="1" indent="-285750" algn="just">
-              <a:buFont typeface="Arial" panose="020B0604020202020204" pitchFamily="34" charset="0"/>
-              <a:buChar char="•"/>
-            </a:pPr>
-            <a:r>
-              <a:rPr lang="en-US" sz="1400" dirty="0"/>
-              <a:t>Port Density: With 24 ports, accommodates numerous devices within the local network.</a:t>
-            </a:r>
-          </a:p>
-          <a:p>
-            <a:pPr marL="742950" lvl="1" indent="-285750" algn="just">
-              <a:buFont typeface="Arial" panose="020B0604020202020204" pitchFamily="34" charset="0"/>
-              <a:buChar char="•"/>
-            </a:pPr>
-            <a:r>
-              <a:rPr lang="en-US" sz="1400" dirty="0"/>
-              <a:t>Battery Backup: Ensures continuous power supply, crucial for maintaining network operations during power outages.</a:t>
-            </a:r>
-          </a:p>
-          <a:p>
-            <a:pPr algn="just"/>
-            <a:r>
-              <a:rPr lang="en-US" sz="1400" dirty="0">
-                <a:solidFill>
-                  <a:schemeClr val="tx2">
-                    <a:lumMod val="60000"/>
-                    <a:lumOff val="40000"/>
-                  </a:schemeClr>
-                </a:solidFill>
-              </a:rPr>
-              <a:t>Server</a:t>
-            </a:r>
-          </a:p>
-          <a:p>
-            <a:pPr algn="just"/>
-            <a:r>
-              <a:rPr lang="en-US" sz="1400" dirty="0"/>
-              <a:t>The server serves various purposes, contributing to the overall functionality, efficiency, and management of the network:</a:t>
-            </a:r>
-          </a:p>
-          <a:p>
-            <a:pPr marL="742950" lvl="1" indent="-285750" algn="just">
-              <a:buFont typeface="Arial" panose="020B0604020202020204" pitchFamily="34" charset="0"/>
-              <a:buChar char="•"/>
-            </a:pPr>
-            <a:endParaRPr lang="en-US" sz="1400" dirty="0"/>
-          </a:p>
-          <a:p>
-            <a:pPr marL="742950" lvl="1" indent="-285750" algn="just">
-              <a:buFont typeface="Arial" panose="020B0604020202020204" pitchFamily="34" charset="0"/>
-              <a:buChar char="•"/>
-            </a:pPr>
-            <a:r>
-              <a:rPr lang="en-US" sz="1400" dirty="0"/>
-              <a:t>Centralized Resource Hosting</a:t>
-            </a:r>
-          </a:p>
-          <a:p>
-            <a:pPr marL="742950" lvl="1" indent="-285750" algn="just">
-              <a:buFont typeface="Arial" panose="020B0604020202020204" pitchFamily="34" charset="0"/>
-              <a:buChar char="•"/>
-            </a:pPr>
-            <a:r>
-              <a:rPr lang="en-US" sz="1400" dirty="0"/>
-              <a:t>User Authentication and Authorization</a:t>
-            </a:r>
-          </a:p>
-          <a:p>
-            <a:pPr marL="742950" lvl="1" indent="-285750" algn="just">
-              <a:buFont typeface="Arial" panose="020B0604020202020204" pitchFamily="34" charset="0"/>
-              <a:buChar char="•"/>
-            </a:pPr>
-            <a:r>
-              <a:rPr lang="en-US" sz="1400" dirty="0"/>
-              <a:t>Network Services</a:t>
-            </a:r>
-          </a:p>
-          <a:p>
-            <a:pPr marL="742950" lvl="1" indent="-285750" algn="just">
-              <a:buFont typeface="Arial" panose="020B0604020202020204" pitchFamily="34" charset="0"/>
-              <a:buChar char="•"/>
-            </a:pPr>
-            <a:r>
-              <a:rPr lang="en-US" sz="1400" dirty="0"/>
-              <a:t>Data Storage and Backup</a:t>
-            </a:r>
-          </a:p>
-          <a:p>
-            <a:pPr marL="742950" lvl="1" indent="-285750" algn="just">
-              <a:buFont typeface="Arial" panose="020B0604020202020204" pitchFamily="34" charset="0"/>
-              <a:buChar char="•"/>
-            </a:pPr>
-            <a:r>
-              <a:rPr lang="en-US" sz="1400" dirty="0"/>
-              <a:t>Application Hosting</a:t>
-            </a:r>
-          </a:p>
-          <a:p>
-            <a:pPr marL="742950" lvl="1" indent="-285750" algn="just">
-              <a:buFont typeface="Arial" panose="020B0604020202020204" pitchFamily="34" charset="0"/>
-              <a:buChar char="•"/>
-            </a:pPr>
-            <a:r>
-              <a:rPr lang="en-US" sz="1400" dirty="0"/>
-              <a:t>Security Management</a:t>
-            </a:r>
-          </a:p>
-          <a:p>
-            <a:pPr marL="742950" lvl="1" indent="-285750" algn="just">
-              <a:buFont typeface="Arial" panose="020B0604020202020204" pitchFamily="34" charset="0"/>
-              <a:buChar char="•"/>
-            </a:pPr>
-            <a:r>
-              <a:rPr lang="en-US" sz="1400" dirty="0"/>
-              <a:t>Power Resilience and Controlled Shutdown</a:t>
-            </a:r>
-          </a:p>
-          <a:p>
-            <a:pPr marL="742950" lvl="1" indent="-285750" algn="just">
-              <a:buFont typeface="Arial" panose="020B0604020202020204" pitchFamily="34" charset="0"/>
-              <a:buChar char="•"/>
-            </a:pPr>
-            <a:r>
-              <a:rPr lang="en-US" sz="1400" dirty="0"/>
-              <a:t>Centralized Updates and Patch Management</a:t>
-            </a:r>
-          </a:p>
-          <a:p>
-            <a:pPr marL="742950" lvl="1" indent="-285750" algn="just">
-              <a:buFont typeface="Arial" panose="020B0604020202020204" pitchFamily="34" charset="0"/>
-              <a:buChar char="•"/>
-            </a:pPr>
-            <a:r>
-              <a:rPr lang="en-US" sz="1400" dirty="0"/>
-              <a:t>Network Administration and Monitoring</a:t>
-            </a:r>
-          </a:p>
-        </p:txBody>
-      </p:sp>
-      <p:sp>
-        <p:nvSpPr>
-          <p:cNvPr id="3" name="Rectangle 2"/>
-          <p:cNvSpPr/>
-          <p:nvPr/>
-        </p:nvSpPr>
-        <p:spPr>
-          <a:xfrm>
-            <a:off x="143739" y="603683"/>
-            <a:ext cx="3658374" cy="424732"/>
-          </a:xfrm>
-          <a:prstGeom prst="rect">
-            <a:avLst/>
-          </a:prstGeom>
-        </p:spPr>
-        <p:txBody>
-          <a:bodyPr wrap="none">
-            <a:spAutoFit/>
-          </a:bodyPr>
-          <a:lstStyle/>
-          <a:p>
-            <a:r>
-              <a:rPr lang="en-US" dirty="0">
-                <a:solidFill>
-                  <a:schemeClr val="tx2">
-                    <a:lumMod val="60000"/>
-                    <a:lumOff val="40000"/>
-                  </a:schemeClr>
-                </a:solidFill>
-              </a:rPr>
-              <a:t>VPN-For-Remote-Access</a:t>
-            </a:r>
-          </a:p>
-        </p:txBody>
-      </p:sp>
-    </p:spTree>
-    <p:extLst>
-      <p:ext uri="{BB962C8B-B14F-4D97-AF65-F5344CB8AC3E}">
-        <p14:creationId xmlns:p14="http://schemas.microsoft.com/office/powerpoint/2010/main" val="3403736333"/>
-      </p:ext>
-    </p:extLst>
-  </p:cSld>
-  <p:clrMapOvr>
-    <a:masterClrMapping/>
-  </p:clrMapOvr>
-  <p:timing>
-    <p:tnLst>
-      <p:par>
-        <p:cTn id="1" dur="indefinite" restart="never" nodeType="tmRoot"/>
-      </p:par>
-    </p:tnLst>
-  </p:timing>
-</p:sld>
-</file>
-
-<file path=ppt/slides/slide65.xml><?xml version="1.0" encoding="utf-8"?>
-<p:sld xmlns:a="http://schemas.openxmlformats.org/drawingml/2006/main" xmlns:r="http://schemas.openxmlformats.org/officeDocument/2006/relationships" xmlns:p="http://schemas.openxmlformats.org/presentationml/2006/main">
-  <p:cSld>
-    <p:spTree>
-      <p:nvGrpSpPr>
-        <p:cNvPr id="1" name=""/>
-        <p:cNvGrpSpPr/>
-        <p:nvPr/>
-      </p:nvGrpSpPr>
-      <p:grpSpPr>
-        <a:xfrm>
-          <a:off x="0" y="0"/>
-          <a:ext cx="0" cy="0"/>
-          <a:chOff x="0" y="0"/>
-          <a:chExt cx="0" cy="0"/>
-        </a:xfrm>
-      </p:grpSpPr>
-      <p:sp>
-        <p:nvSpPr>
-          <p:cNvPr id="2" name="Rectangle 1"/>
-          <p:cNvSpPr/>
-          <p:nvPr/>
-        </p:nvSpPr>
-        <p:spPr>
-          <a:xfrm>
-            <a:off x="424294" y="603683"/>
-            <a:ext cx="3658374" cy="424732"/>
-          </a:xfrm>
-          <a:prstGeom prst="rect">
-            <a:avLst/>
-          </a:prstGeom>
-        </p:spPr>
-        <p:txBody>
-          <a:bodyPr wrap="none">
-            <a:spAutoFit/>
-          </a:bodyPr>
-          <a:lstStyle/>
-          <a:p>
-            <a:r>
-              <a:rPr lang="en-US" dirty="0">
-                <a:solidFill>
-                  <a:schemeClr val="tx2">
-                    <a:lumMod val="60000"/>
-                    <a:lumOff val="40000"/>
-                  </a:schemeClr>
-                </a:solidFill>
-              </a:rPr>
-              <a:t>VPN-For-Remote-Access</a:t>
-            </a:r>
-          </a:p>
-        </p:txBody>
-      </p:sp>
-      <p:sp>
-        <p:nvSpPr>
-          <p:cNvPr id="3" name="Rectangle 2"/>
-          <p:cNvSpPr/>
-          <p:nvPr/>
-        </p:nvSpPr>
-        <p:spPr>
-          <a:xfrm>
-            <a:off x="489581" y="1028415"/>
-            <a:ext cx="8372898" cy="4358116"/>
-          </a:xfrm>
-          <a:prstGeom prst="rect">
-            <a:avLst/>
-          </a:prstGeom>
-        </p:spPr>
-        <p:txBody>
-          <a:bodyPr wrap="square">
-            <a:spAutoFit/>
-          </a:bodyPr>
-          <a:lstStyle/>
-          <a:p>
-            <a:pPr algn="just"/>
-            <a:r>
-              <a:rPr lang="en-US" sz="1400" dirty="0" smtClean="0">
-                <a:solidFill>
-                  <a:schemeClr val="tx2">
-                    <a:lumMod val="60000"/>
-                    <a:lumOff val="40000"/>
-                  </a:schemeClr>
-                </a:solidFill>
-              </a:rPr>
-              <a:t>Working</a:t>
-            </a:r>
-          </a:p>
-          <a:p>
-            <a:pPr algn="just"/>
-            <a:r>
-              <a:rPr lang="en-US" sz="1400" i="1" u="sng" dirty="0">
-                <a:solidFill>
-                  <a:schemeClr val="tx2">
-                    <a:lumMod val="60000"/>
-                    <a:lumOff val="40000"/>
-                  </a:schemeClr>
-                </a:solidFill>
-              </a:rPr>
-              <a:t>Network Connectivity</a:t>
-            </a:r>
-          </a:p>
-          <a:p>
-            <a:pPr algn="just"/>
-            <a:r>
-              <a:rPr lang="en-US" sz="1400" dirty="0">
-                <a:solidFill>
-                  <a:schemeClr val="tx2">
-                    <a:lumMod val="60000"/>
-                    <a:lumOff val="40000"/>
-                  </a:schemeClr>
-                </a:solidFill>
-              </a:rPr>
-              <a:t>The Cisco 1941 routers are responsible for routing traffic within your network. They facilitate communication between different subnets and connect your local network to the internet.</a:t>
-            </a:r>
-          </a:p>
-          <a:p>
-            <a:pPr algn="just"/>
-            <a:endParaRPr lang="en-US" sz="1400" dirty="0">
-              <a:solidFill>
-                <a:schemeClr val="tx2">
-                  <a:lumMod val="60000"/>
-                  <a:lumOff val="40000"/>
-                </a:schemeClr>
-              </a:solidFill>
-            </a:endParaRPr>
-          </a:p>
-          <a:p>
-            <a:pPr algn="just"/>
-            <a:r>
-              <a:rPr lang="en-US" sz="1400" i="1" u="sng" dirty="0">
-                <a:solidFill>
-                  <a:schemeClr val="tx2">
-                    <a:lumMod val="60000"/>
-                    <a:lumOff val="40000"/>
-                  </a:schemeClr>
-                </a:solidFill>
-              </a:rPr>
-              <a:t>VPN Tunnel Configuration</a:t>
-            </a:r>
-          </a:p>
-          <a:p>
-            <a:pPr algn="just"/>
-            <a:r>
-              <a:rPr lang="en-US" sz="1400" dirty="0">
-                <a:solidFill>
-                  <a:schemeClr val="tx2">
-                    <a:lumMod val="60000"/>
-                    <a:lumOff val="40000"/>
-                  </a:schemeClr>
-                </a:solidFill>
-              </a:rPr>
-              <a:t>The routers are configured to establish an </a:t>
-            </a:r>
-            <a:r>
-              <a:rPr lang="en-US" sz="1400" dirty="0" err="1">
-                <a:solidFill>
-                  <a:schemeClr val="tx2">
-                    <a:lumMod val="60000"/>
-                    <a:lumOff val="40000"/>
-                  </a:schemeClr>
-                </a:solidFill>
-              </a:rPr>
-              <a:t>IPSec</a:t>
-            </a:r>
-            <a:r>
-              <a:rPr lang="en-US" sz="1400" dirty="0">
-                <a:solidFill>
-                  <a:schemeClr val="tx2">
-                    <a:lumMod val="60000"/>
-                    <a:lumOff val="40000"/>
-                  </a:schemeClr>
-                </a:solidFill>
-              </a:rPr>
-              <a:t> VPN tunnel between them. This tunnel allows secure communication between the routers, even if they have duplicate LAN subnets. The VPN ensures that data exchanged between the routers is encrypted and secure.</a:t>
-            </a:r>
-          </a:p>
-          <a:p>
-            <a:pPr algn="just"/>
-            <a:endParaRPr lang="en-US" sz="1400" i="1" u="sng" dirty="0">
-              <a:solidFill>
-                <a:schemeClr val="tx2">
-                  <a:lumMod val="60000"/>
-                  <a:lumOff val="40000"/>
-                </a:schemeClr>
-              </a:solidFill>
-            </a:endParaRPr>
-          </a:p>
-          <a:p>
-            <a:pPr algn="just"/>
-            <a:r>
-              <a:rPr lang="en-US" sz="1400" i="1" u="sng" dirty="0">
-                <a:solidFill>
-                  <a:schemeClr val="tx2">
-                    <a:lumMod val="60000"/>
-                    <a:lumOff val="40000"/>
-                  </a:schemeClr>
-                </a:solidFill>
-              </a:rPr>
-              <a:t>Switching and Local Network Connectivity</a:t>
-            </a:r>
-          </a:p>
-          <a:p>
-            <a:pPr algn="just"/>
-            <a:r>
-              <a:rPr lang="en-US" sz="1400" dirty="0">
-                <a:solidFill>
-                  <a:schemeClr val="tx2">
-                    <a:lumMod val="60000"/>
-                    <a:lumOff val="40000"/>
-                  </a:schemeClr>
-                </a:solidFill>
-              </a:rPr>
-              <a:t>The Cisco 2960-24 switch is used for local network switching. It provides efficient communication between devices within your local network, allowing devices to connect, communicate, and share resources seamlessly.</a:t>
-            </a:r>
-          </a:p>
-          <a:p>
-            <a:pPr algn="just"/>
-            <a:endParaRPr lang="en-US" sz="1400" i="1" u="sng" dirty="0">
-              <a:solidFill>
-                <a:schemeClr val="tx2">
-                  <a:lumMod val="60000"/>
-                  <a:lumOff val="40000"/>
-                </a:schemeClr>
-              </a:solidFill>
-            </a:endParaRPr>
-          </a:p>
-          <a:p>
-            <a:pPr algn="just"/>
-            <a:r>
-              <a:rPr lang="en-US" sz="1400" i="1" u="sng" dirty="0">
-                <a:solidFill>
-                  <a:schemeClr val="tx2">
-                    <a:lumMod val="60000"/>
-                    <a:lumOff val="40000"/>
-                  </a:schemeClr>
-                </a:solidFill>
-              </a:rPr>
-              <a:t>Server Functionality</a:t>
-            </a:r>
-          </a:p>
-          <a:p>
-            <a:pPr algn="just"/>
-            <a:r>
-              <a:rPr lang="en-US" sz="1400" dirty="0">
-                <a:solidFill>
-                  <a:schemeClr val="tx2">
-                    <a:lumMod val="60000"/>
-                    <a:lumOff val="40000"/>
-                  </a:schemeClr>
-                </a:solidFill>
-              </a:rPr>
-              <a:t>The server serves as a centralized hub for hosting various resources, including applications, databases, and shared files. It provides a platform for user authentication and authorization, ensuring secure access to network resources.</a:t>
-            </a:r>
-          </a:p>
-          <a:p>
-            <a:pPr algn="just"/>
-            <a:endParaRPr lang="en-US" sz="1400" dirty="0">
-              <a:solidFill>
-                <a:schemeClr val="tx2">
-                  <a:lumMod val="60000"/>
-                  <a:lumOff val="40000"/>
-                </a:schemeClr>
-              </a:solidFill>
-            </a:endParaRPr>
-          </a:p>
-          <a:p>
-            <a:pPr algn="just"/>
-            <a:r>
-              <a:rPr lang="en-US" sz="1400" i="1" u="sng" dirty="0">
-                <a:solidFill>
-                  <a:schemeClr val="tx2">
-                    <a:lumMod val="60000"/>
-                    <a:lumOff val="40000"/>
-                  </a:schemeClr>
-                </a:solidFill>
-              </a:rPr>
-              <a:t>Accessing Server from Worker 1</a:t>
-            </a:r>
-          </a:p>
-          <a:p>
-            <a:pPr algn="just"/>
-            <a:r>
-              <a:rPr lang="en-US" sz="1400" dirty="0">
-                <a:solidFill>
-                  <a:schemeClr val="tx2">
-                    <a:lumMod val="60000"/>
-                    <a:lumOff val="40000"/>
-                  </a:schemeClr>
-                </a:solidFill>
-              </a:rPr>
-              <a:t>Insert specific details on how to access the server from Worker 1.</a:t>
-            </a:r>
-          </a:p>
-        </p:txBody>
-      </p:sp>
-    </p:spTree>
-    <p:extLst>
-      <p:ext uri="{BB962C8B-B14F-4D97-AF65-F5344CB8AC3E}">
-        <p14:creationId xmlns:p14="http://schemas.microsoft.com/office/powerpoint/2010/main" val="428428673"/>
-      </p:ext>
-    </p:extLst>
-  </p:cSld>
-  <p:clrMapOvr>
-    <a:masterClrMapping/>
-  </p:clrMapOvr>
-  <p:timing>
-    <p:tnLst>
-      <p:par>
-        <p:cTn id="1" dur="indefinite" restart="never" nodeType="tmRoot"/>
-      </p:par>
-    </p:tnLst>
-  </p:timing>
-</p:sld>
-</file>
-
-<file path=ppt/slides/slide7.xml><?xml version="1.0" encoding="utf-8"?>
 <p:sld xmlns:a="http://schemas.openxmlformats.org/drawingml/2006/main" xmlns:r="http://schemas.openxmlformats.org/officeDocument/2006/relationships" xmlns:p="http://schemas.openxmlformats.org/presentationml/2006/main">
   <p:cSld>
     <p:spTree>
@@ -24490,6 +22062,146 @@
 </p:sld>
 </file>
 
+<file path=ppt/slides/slide7.xml><?xml version="1.0" encoding="utf-8"?>
+<p:sld xmlns:a="http://schemas.openxmlformats.org/drawingml/2006/main" xmlns:r="http://schemas.openxmlformats.org/officeDocument/2006/relationships" xmlns:p="http://schemas.openxmlformats.org/presentationml/2006/main">
+  <p:cSld>
+    <p:spTree>
+      <p:nvGrpSpPr>
+        <p:cNvPr id="1" name=""/>
+        <p:cNvGrpSpPr/>
+        <p:nvPr/>
+      </p:nvGrpSpPr>
+      <p:grpSpPr>
+        <a:xfrm>
+          <a:off x="0" y="0"/>
+          <a:ext cx="0" cy="0"/>
+          <a:chOff x="0" y="0"/>
+          <a:chExt cx="0" cy="0"/>
+        </a:xfrm>
+      </p:grpSpPr>
+      <p:sp>
+        <p:nvSpPr>
+          <p:cNvPr id="7170" name="Rectangle 2"/>
+          <p:cNvSpPr>
+            <a:spLocks noGrp="1" noChangeArrowheads="1"/>
+          </p:cNvSpPr>
+          <p:nvPr>
+            <p:ph type="title"/>
+          </p:nvPr>
+        </p:nvSpPr>
+        <p:spPr>
+          <a:xfrm>
+            <a:off x="434295" y="472578"/>
+            <a:ext cx="8145462" cy="838200"/>
+          </a:xfrm>
+        </p:spPr>
+        <p:txBody>
+          <a:bodyPr/>
+          <a:lstStyle/>
+          <a:p>
+            <a:pPr eaLnBrk="1" hangingPunct="1"/>
+            <a:r>
+              <a:rPr lang="en-US" sz="1800" dirty="0" smtClean="0">
+                <a:ea typeface="ＭＳ Ｐゴシック" pitchFamily="34" charset="-128"/>
+              </a:rPr>
+              <a:t>Fundamentals of VPNs</a:t>
+            </a:r>
+            <a:br>
+              <a:rPr lang="en-US" sz="1800" dirty="0" smtClean="0">
+                <a:ea typeface="ＭＳ Ｐゴシック" pitchFamily="34" charset="-128"/>
+              </a:rPr>
+            </a:br>
+            <a:r>
+              <a:rPr lang="en-US" dirty="0" smtClean="0">
+                <a:ea typeface="ＭＳ Ｐゴシック" pitchFamily="34" charset="-128"/>
+              </a:rPr>
+              <a:t>Benefits of VPNs</a:t>
+            </a:r>
+          </a:p>
+        </p:txBody>
+      </p:sp>
+      <p:sp>
+        <p:nvSpPr>
+          <p:cNvPr id="2" name="Content Placeholder 1"/>
+          <p:cNvSpPr>
+            <a:spLocks noGrp="1"/>
+          </p:cNvSpPr>
+          <p:nvPr>
+            <p:ph idx="1"/>
+          </p:nvPr>
+        </p:nvSpPr>
+        <p:spPr>
+          <a:xfrm>
+            <a:off x="522513" y="1480457"/>
+            <a:ext cx="8098973" cy="5050972"/>
+          </a:xfrm>
+        </p:spPr>
+        <p:txBody>
+          <a:bodyPr/>
+          <a:lstStyle/>
+          <a:p>
+            <a:r>
+              <a:rPr lang="en-US" sz="2000" b="1" dirty="0" smtClean="0"/>
+              <a:t>Cost </a:t>
+            </a:r>
+            <a:r>
+              <a:rPr lang="en-US" sz="2000" b="1" dirty="0"/>
+              <a:t>savings </a:t>
+            </a:r>
+            <a:endParaRPr lang="en-US" sz="2000" dirty="0" smtClean="0"/>
+          </a:p>
+          <a:p>
+            <a:pPr marL="682625" lvl="1" indent="-225425">
+              <a:buFont typeface="Arial" panose="020B0604020202020204" pitchFamily="34" charset="0"/>
+              <a:buChar char="•"/>
+            </a:pPr>
+            <a:r>
+              <a:rPr lang="en-US" dirty="0" smtClean="0"/>
+              <a:t>Enable organizations to use cost-effective, third-party Internet transport to connect remote offices and remote users to the main site.</a:t>
+            </a:r>
+          </a:p>
+          <a:p>
+            <a:r>
+              <a:rPr lang="en-US" sz="2000" b="1" dirty="0" smtClean="0"/>
+              <a:t>Scalability </a:t>
+            </a:r>
+            <a:endParaRPr lang="en-US" sz="2000" dirty="0" smtClean="0"/>
+          </a:p>
+          <a:p>
+            <a:pPr marL="682625" lvl="1" indent="-225425">
+              <a:buFont typeface="Arial" panose="020B0604020202020204" pitchFamily="34" charset="0"/>
+              <a:buChar char="•"/>
+              <a:tabLst>
+                <a:tab pos="682625" algn="l"/>
+              </a:tabLst>
+            </a:pPr>
+            <a:r>
+              <a:rPr lang="en-US" dirty="0" smtClean="0"/>
+              <a:t>Enable organizations to use the Internet infrastructure within ISPs and devices, which makes it easy to add new users.</a:t>
+            </a:r>
+          </a:p>
+        </p:txBody>
+      </p:sp>
+    </p:spTree>
+    <p:extLst>
+      <p:ext uri="{BB962C8B-B14F-4D97-AF65-F5344CB8AC3E}">
+        <p14:creationId xmlns:p14="http://schemas.microsoft.com/office/powerpoint/2010/main" val="1275120229"/>
+      </p:ext>
+    </p:extLst>
+  </p:cSld>
+  <p:clrMapOvr>
+    <a:masterClrMapping/>
+  </p:clrMapOvr>
+  <p:timing>
+    <p:tnLst>
+      <p:par>
+        <p:cTn id="1" dur="indefinite" restart="never" nodeType="tmRoot"/>
+      </p:par>
+    </p:tnLst>
+  </p:timing>
+</p:sld>
+</file>
+
 <file path=ppt/slides/slide8.xml><?xml version="1.0" encoding="utf-8"?>
 <p:sld xmlns:a="http://schemas.openxmlformats.org/drawingml/2006/main" xmlns:r="http://schemas.openxmlformats.org/officeDocument/2006/relationships" xmlns:p="http://schemas.openxmlformats.org/presentationml/2006/main">
   <p:cSld>
@@ -24519,7 +22231,7 @@
         </p:nvSpPr>
         <p:spPr>
           <a:xfrm>
-            <a:off x="434295" y="472578"/>
+            <a:off x="419781" y="443550"/>
             <a:ext cx="8145462" cy="838200"/>
           </a:xfrm>
         </p:spPr>
@@ -24543,7 +22255,7 @@
               <a:rPr lang="en-US" dirty="0" smtClean="0">
                 <a:ea typeface="ＭＳ Ｐゴシック" pitchFamily="34" charset="-128"/>
               </a:rPr>
-              <a:t>Benefits of VPNs</a:t>
+              <a:t>Benefits of VPNs (cont.)</a:t>
             </a:r>
           </a:p>
         </p:txBody>
@@ -24560,8 +22272,8 @@
         </p:nvSpPr>
         <p:spPr>
           <a:xfrm>
-            <a:off x="522513" y="1480457"/>
-            <a:ext cx="8098973" cy="5050972"/>
+            <a:off x="522513" y="1436913"/>
+            <a:ext cx="8098973" cy="5144631"/>
           </a:xfrm>
         </p:spPr>
         <p:txBody>
@@ -24570,50 +22282,90 @@
           <a:p>
             <a:r>
               <a:rPr lang="en-US" sz="2000" b="1" dirty="0" smtClean="0"/>
-              <a:t>Cost </a:t>
+              <a:t>Compatibility </a:t>
             </a:r>
             <a:r>
               <a:rPr lang="en-US" sz="2000" b="1" dirty="0"/>
-              <a:t>savings </a:t>
+              <a:t>with broadband technology </a:t>
             </a:r>
             <a:endParaRPr lang="en-US" sz="2000" dirty="0" smtClean="0"/>
           </a:p>
           <a:p>
             <a:pPr marL="682625" lvl="1" indent="-225425">
-              <a:buFont typeface="Arial" panose="020B0604020202020204" pitchFamily="34" charset="0"/>
+              <a:buFont typeface="Arial" pitchFamily="34" charset="0"/>
               <a:buChar char="•"/>
             </a:pPr>
             <a:r>
+              <a:rPr lang="en-US" dirty="0"/>
+              <a:t>A</a:t>
+            </a:r>
+            <a:r>
               <a:rPr lang="en-US" dirty="0" smtClean="0"/>
-              <a:t>Enable organizations to use cost-effective, third-party Internet transport to connect remote offices and remote users to the main site.</a:t>
+              <a:t>llow </a:t>
+            </a:r>
+            <a:r>
+              <a:rPr lang="en-US" dirty="0"/>
+              <a:t>mobile </a:t>
+            </a:r>
+            <a:r>
+              <a:rPr lang="en-US" dirty="0" smtClean="0"/>
+              <a:t>workers and telecommuters </a:t>
+            </a:r>
+            <a:r>
+              <a:rPr lang="en-US" dirty="0"/>
+              <a:t>to take advantage of high-speed, broadband connectivity, such as DSL and cable, to gain access to the networks of their organization, </a:t>
+            </a:r>
+            <a:r>
+              <a:rPr lang="en-US" dirty="0" smtClean="0"/>
+              <a:t>providing workers flexibility </a:t>
+            </a:r>
+            <a:r>
+              <a:rPr lang="en-US" dirty="0"/>
+              <a:t>and </a:t>
+            </a:r>
+            <a:r>
+              <a:rPr lang="en-US" dirty="0" smtClean="0"/>
+              <a:t>efficiency.</a:t>
+            </a:r>
+          </a:p>
+          <a:p>
+            <a:pPr marL="682625" lvl="1" indent="-225425">
+              <a:buFont typeface="Arial" pitchFamily="34" charset="0"/>
+              <a:buChar char="•"/>
+            </a:pPr>
+            <a:r>
+              <a:rPr lang="en-US" dirty="0" smtClean="0"/>
+              <a:t>Provide </a:t>
+            </a:r>
+            <a:r>
+              <a:rPr lang="en-US" dirty="0"/>
+              <a:t>a cost-effective solution for connecting remote offices.</a:t>
             </a:r>
           </a:p>
           <a:p>
             <a:r>
               <a:rPr lang="en-US" sz="2000" b="1" dirty="0" smtClean="0"/>
-              <a:t>Scalability </a:t>
+              <a:t>Security </a:t>
             </a:r>
             <a:endParaRPr lang="en-US" sz="2000" dirty="0" smtClean="0"/>
           </a:p>
           <a:p>
             <a:pPr marL="682625" lvl="1" indent="-225425">
-              <a:buFont typeface="Arial" panose="020B0604020202020204" pitchFamily="34" charset="0"/>
+              <a:buFont typeface="Arial" pitchFamily="34" charset="0"/>
               <a:buChar char="•"/>
-              <a:tabLst>
-                <a:tab pos="682625" algn="l"/>
-              </a:tabLst>
             </a:pPr>
             <a:r>
               <a:rPr lang="en-US" dirty="0" smtClean="0"/>
-              <a:t>Enable organizations to use the Internet infrastructure within ISPs and devices, which makes it easy to add new users.</a:t>
-            </a:r>
+              <a:t>Can include security mechanisms that provide the highest level of security by using advanced encryption and authentication protocols that protect data from unauthorized access.</a:t>
+            </a:r>
+            <a:endParaRPr lang="en-US" dirty="0"/>
           </a:p>
         </p:txBody>
       </p:sp>
     </p:spTree>
     <p:extLst>
       <p:ext uri="{BB962C8B-B14F-4D97-AF65-F5344CB8AC3E}">
-        <p14:creationId xmlns:p14="http://schemas.microsoft.com/office/powerpoint/2010/main" val="1275120229"/>
+        <p14:creationId xmlns:p14="http://schemas.microsoft.com/office/powerpoint/2010/main" val="136648129"/>
       </p:ext>
     </p:extLst>
   </p:cSld>
@@ -24659,7 +22411,7 @@
         </p:nvSpPr>
         <p:spPr>
           <a:xfrm>
-            <a:off x="419781" y="443550"/>
+            <a:off x="419781" y="450171"/>
             <a:ext cx="8145462" cy="838200"/>
           </a:xfrm>
         </p:spPr>
@@ -24672,7 +22424,7 @@
               <a:rPr lang="en-US" sz="1800" dirty="0" smtClean="0">
                 <a:ea typeface="ＭＳ Ｐゴシック" pitchFamily="34" charset="-128"/>
               </a:rPr>
-              <a:t>Fundamentals of VPNs</a:t>
+              <a:t>Types of VPNs</a:t>
             </a:r>
             <a:br>
               <a:rPr lang="en-US" sz="1800" dirty="0" smtClean="0">
@@ -24683,7 +22435,7 @@
               <a:rPr lang="en-US" dirty="0" smtClean="0">
                 <a:ea typeface="ＭＳ Ｐゴシック" pitchFamily="34" charset="-128"/>
               </a:rPr>
-              <a:t>Benefits of VPNs (cont.)</a:t>
+              <a:t>Site-to-Site VPNs</a:t>
             </a:r>
           </a:p>
         </p:txBody>
@@ -24700,8 +22452,8 @@
         </p:nvSpPr>
         <p:spPr>
           <a:xfrm>
-            <a:off x="522513" y="1436913"/>
-            <a:ext cx="8098973" cy="5144631"/>
+            <a:off x="432690" y="1523998"/>
+            <a:ext cx="8362967" cy="5199127"/>
           </a:xfrm>
         </p:spPr>
         <p:txBody>
@@ -24709,91 +22461,61 @@
           <a:lstStyle/>
           <a:p>
             <a:r>
-              <a:rPr lang="en-US" sz="2000" b="1" dirty="0" smtClean="0"/>
-              <a:t>Compatibility </a:t>
-            </a:r>
-            <a:r>
-              <a:rPr lang="en-US" sz="2000" b="1" dirty="0"/>
-              <a:t>with broadband technology </a:t>
-            </a:r>
-            <a:endParaRPr lang="en-US" sz="2000" dirty="0" smtClean="0"/>
-          </a:p>
-          <a:p>
-            <a:pPr marL="682625" lvl="1" indent="-225425">
-              <a:buFont typeface="Arial" pitchFamily="34" charset="0"/>
-              <a:buChar char="•"/>
-            </a:pPr>
-            <a:r>
-              <a:rPr lang="en-US" dirty="0"/>
-              <a:t>A</a:t>
-            </a:r>
-            <a:r>
-              <a:rPr lang="en-US" dirty="0" smtClean="0"/>
-              <a:t>llow </a:t>
-            </a:r>
-            <a:r>
-              <a:rPr lang="en-US" dirty="0"/>
-              <a:t>mobile </a:t>
-            </a:r>
-            <a:r>
-              <a:rPr lang="en-US" dirty="0" smtClean="0"/>
-              <a:t>workers and telecommuters </a:t>
-            </a:r>
-            <a:r>
-              <a:rPr lang="en-US" dirty="0"/>
-              <a:t>to take advantage of high-speed, broadband connectivity, such as DSL and cable, to gain access to the networks of their organization, </a:t>
-            </a:r>
-            <a:r>
-              <a:rPr lang="en-US" dirty="0" smtClean="0"/>
-              <a:t>providing workers flexibility </a:t>
-            </a:r>
-            <a:r>
-              <a:rPr lang="en-US" dirty="0"/>
-              <a:t>and </a:t>
-            </a:r>
-            <a:r>
-              <a:rPr lang="en-US" dirty="0" smtClean="0"/>
-              <a:t>efficiency.</a:t>
-            </a:r>
-          </a:p>
-          <a:p>
-            <a:pPr marL="682625" lvl="1" indent="-225425">
-              <a:buFont typeface="Arial" pitchFamily="34" charset="0"/>
-              <a:buChar char="•"/>
-            </a:pPr>
-            <a:r>
-              <a:rPr lang="en-US" dirty="0" smtClean="0"/>
-              <a:t>Provide </a:t>
-            </a:r>
-            <a:r>
-              <a:rPr lang="en-US" dirty="0"/>
-              <a:t>a cost-effective solution for connecting remote offices.</a:t>
-            </a:r>
-          </a:p>
-          <a:p>
-            <a:r>
-              <a:rPr lang="en-US" sz="2000" b="1" dirty="0" smtClean="0"/>
-              <a:t>Security </a:t>
-            </a:r>
-            <a:endParaRPr lang="en-US" sz="2000" dirty="0" smtClean="0"/>
-          </a:p>
-          <a:p>
-            <a:pPr marL="682625" lvl="1" indent="-225425">
-              <a:buFont typeface="Arial" pitchFamily="34" charset="0"/>
-              <a:buChar char="•"/>
-            </a:pPr>
-            <a:r>
-              <a:rPr lang="en-US" dirty="0" smtClean="0"/>
-              <a:t>Can include security mechanisms that provide the highest level of security by using advanced encryption and authentication protocols that protect data from unauthorized access.</a:t>
-            </a:r>
-            <a:endParaRPr lang="en-US" dirty="0"/>
+              <a:rPr lang="en-US" sz="2000" dirty="0" smtClean="0"/>
+              <a:t>Connect </a:t>
+            </a:r>
+            <a:r>
+              <a:rPr lang="en-US" sz="2000" dirty="0"/>
+              <a:t>entire networks to each other, </a:t>
+            </a:r>
+            <a:r>
+              <a:rPr lang="en-US" sz="2000" dirty="0" smtClean="0"/>
+              <a:t>in </a:t>
+            </a:r>
+            <a:r>
+              <a:rPr lang="en-US" sz="2000" dirty="0"/>
+              <a:t>the past, a leased line or Frame Relay connection was required to connect sites, but because most corporations now have Internet access, these connections can be replaced with site-to-site </a:t>
+            </a:r>
+            <a:r>
+              <a:rPr lang="en-US" sz="2000" dirty="0" smtClean="0"/>
+              <a:t>VPNs.</a:t>
+            </a:r>
+            <a:endParaRPr lang="en-US" sz="2000" dirty="0"/>
+          </a:p>
+          <a:p>
+            <a:r>
+              <a:rPr lang="en-US" sz="2000" dirty="0" smtClean="0"/>
+              <a:t>Internal hosts have no </a:t>
+            </a:r>
+            <a:r>
+              <a:rPr lang="en-US" sz="2000" dirty="0"/>
+              <a:t>knowledge that a VPN </a:t>
+            </a:r>
+            <a:r>
+              <a:rPr lang="en-US" sz="2000" dirty="0" smtClean="0"/>
+              <a:t>exists.</a:t>
+            </a:r>
+          </a:p>
+          <a:p>
+            <a:r>
+              <a:rPr lang="en-US" sz="2000" dirty="0" smtClean="0"/>
+              <a:t>Created </a:t>
+            </a:r>
+            <a:r>
+              <a:rPr lang="en-US" sz="2000" dirty="0"/>
+              <a:t>when devices on both sides of the VPN connection are aware of the VPN configuration in </a:t>
+            </a:r>
+            <a:r>
+              <a:rPr lang="en-US" sz="2000" dirty="0" smtClean="0"/>
+              <a:t>advance.</a:t>
+            </a:r>
           </a:p>
         </p:txBody>
       </p:sp>
     </p:spTree>
     <p:extLst>
       <p:ext uri="{BB962C8B-B14F-4D97-AF65-F5344CB8AC3E}">
-        <p14:creationId xmlns:p14="http://schemas.microsoft.com/office/powerpoint/2010/main" val="136648129"/>
+        <p14:creationId xmlns:p14="http://schemas.microsoft.com/office/powerpoint/2010/main" val="3987836530"/>
       </p:ext>
     </p:extLst>
   </p:cSld>
